--- a/test_2_082025_pptx.pptx
+++ b/test_2_082025_pptx.pptx
@@ -29,11 +29,6 @@
     <p:sldId id="277" r:id="rId23"/>
     <p:sldId id="278" r:id="rId24"/>
     <p:sldId id="279" r:id="rId25"/>
-    <p:sldId id="280" r:id="rId26"/>
-    <p:sldId id="281" r:id="rId27"/>
-    <p:sldId id="282" r:id="rId28"/>
-    <p:sldId id="283" r:id="rId29"/>
-    <p:sldId id="284" r:id="rId30"/>
   </p:sldIdLst>
   <p:sldSz cx="9144000" cy="5143500" type="screen16x9"/>
   <p:notesSz cx="6858000" cy="9144000"/>
@@ -3143,7 +3138,7 @@
             </a:pPr>
             <a:r>
               <a:rPr/>
-              <a:t>Likelihood-Based Estimation</a:t>
+              <a:t>Bootstrap Estimation for Mean and Median Biomarker Values</a:t>
             </a:r>
           </a:p>
         </p:txBody>
@@ -3222,7 +3217,7 @@
             </a:pPr>
             <a:r>
               <a:rPr/>
-              <a:t>Linear Regression as Model-Based Estimation</a:t>
+              <a:t>Scientific Question and Estimands</a:t>
             </a:r>
           </a:p>
         </p:txBody>
@@ -3248,26 +3243,17 @@
                   <a:buNone/>
                 </a:pPr>
                 <a:r>
-                  <a:rPr b="1"/>
-                  <a:t>linear regression model</a:t>
-                </a:r>
-                <a:r>
                   <a:rPr/>
-                  <a:t>: statistical model that represents the expected value of a continuous outcome as a linear function of predictor variables with unknown parameters estimated from observed data</a:t>
+                  <a:t>Primary scientific question:</a:t>
                 </a:r>
               </a:p>
               <a:p>
-                <a:pPr lvl="0"/>
+                <a:pPr lvl="0" indent="0" marL="1270000">
+                  <a:buNone/>
+                </a:pPr>
                 <a:r>
-                  <a:rPr/>
-                  <a:t>linear regression - parameters β define the relationship between predictors (X) and outcome (Y)</a:t>
-                </a:r>
-              </a:p>
-              <a:p>
-                <a:pPr lvl="0"/>
-                <a:r>
-                  <a:rPr/>
-                  <a:t>parameters are estimated from the data using maximum likelihood</a:t>
+                  <a:rPr sz="2000"/>
+                  <a:t>What is a typical tumor mutation burden among patients with solid tumors in the target sequencing population?</a:t>
                 </a:r>
               </a:p>
               <a:p>
@@ -3276,14 +3262,7 @@
                 </a:pPr>
                 <a:r>
                   <a:rPr/>
-                  <a:t>Model specification [simple linear regression]</a:t>
-                </a:r>
-              </a:p>
-              <a:p>
-                <a:pPr lvl="0"/>
-                <a:r>
-                  <a:rPr/>
-                  <a:t>conditional mean of the outcome is a linear function of the predictor</a:t>
+                  <a:t>Population quantities of interest:</a:t>
                 </a:r>
               </a:p>
               <a:p>
@@ -3291,78 +3270,69 @@
                   <a:buNone/>
                 </a:pPr>
                 <a14:m>
-                  <m:oMathPara xmlns:m="http://schemas.openxmlformats.org/officeDocument/2006/math">
-                    <m:oMathParaPr>
-                      <m:jc m:val="center"/>
-                    </m:oMathParaPr>
-                    <m:oMath>
-                      <m:r>
-                        <m:t>E</m:t>
-                      </m:r>
-                      <m:d>
-                        <m:dPr>
-                          <m:begChr m:val="("/>
-                          <m:sepChr m:val=""/>
-                          <m:endChr m:val=")"/>
-                          <m:grow/>
-                        </m:dPr>
-                        <m:e>
-                          <m:r>
-                            <m:t>Y</m:t>
-                          </m:r>
-                          <m:r>
-                            <m:rPr>
-                              <m:sty m:val="p"/>
-                            </m:rPr>
-                            <m:t>∣</m:t>
-                          </m:r>
-                          <m:r>
-                            <m:t>X</m:t>
-                          </m:r>
-                        </m:e>
-                      </m:d>
-                      <m:r>
-                        <m:rPr>
-                          <m:sty m:val="p"/>
-                        </m:rPr>
-                        <m:t>=</m:t>
-                      </m:r>
-                      <m:sSub>
-                        <m:e>
-                          <m:r>
-                            <m:t>β</m:t>
-                          </m:r>
-                        </m:e>
-                        <m:sub>
-                          <m:r>
-                            <m:t>0</m:t>
-                          </m:r>
-                        </m:sub>
-                      </m:sSub>
-                      <m:r>
-                        <m:rPr>
-                          <m:sty m:val="p"/>
-                        </m:rPr>
-                        <m:t>+</m:t>
-                      </m:r>
-                      <m:sSub>
-                        <m:e>
-                          <m:r>
-                            <m:t>β</m:t>
-                          </m:r>
-                        </m:e>
-                        <m:sub>
-                          <m:r>
-                            <m:t>1</m:t>
-                          </m:r>
-                        </m:sub>
-                      </m:sSub>
-                      <m:r>
-                        <m:t>X</m:t>
-                      </m:r>
-                    </m:oMath>
-                  </m:oMathPara>
+                  <m:oMath xmlns:m="http://schemas.openxmlformats.org/officeDocument/2006/math">
+                    <m:sSub>
+                      <m:e>
+                        <m:r>
+                          <m:t>θ</m:t>
+                        </m:r>
+                      </m:e>
+                      <m:sub>
+                        <m:r>
+                          <m:t>m</m:t>
+                        </m:r>
+                        <m:r>
+                          <m:t>e</m:t>
+                        </m:r>
+                        <m:r>
+                          <m:t>a</m:t>
+                        </m:r>
+                        <m:r>
+                          <m:t>n</m:t>
+                        </m:r>
+                      </m:sub>
+                    </m:sSub>
+                  </m:oMath>
                 </a14:m>
+                <a:r>
+                  <a:rPr/>
+                  <a:t> = population mean tumor mutation burden </a:t>
+                </a:r>
+                <a14:m>
+                  <m:oMath xmlns:m="http://schemas.openxmlformats.org/officeDocument/2006/math">
+                    <m:sSub>
+                      <m:e>
+                        <m:r>
+                          <m:t>θ</m:t>
+                        </m:r>
+                      </m:e>
+                      <m:sub>
+                        <m:r>
+                          <m:t>m</m:t>
+                        </m:r>
+                        <m:r>
+                          <m:t>e</m:t>
+                        </m:r>
+                        <m:r>
+                          <m:t>d</m:t>
+                        </m:r>
+                        <m:r>
+                          <m:t>i</m:t>
+                        </m:r>
+                        <m:r>
+                          <m:t>a</m:t>
+                        </m:r>
+                        <m:r>
+                          <m:t>n</m:t>
+                        </m:r>
+                      </m:sub>
+                    </m:sSub>
+                  </m:oMath>
+                </a14:m>
+                <a:r>
+                  <a:rPr/>
+                  <a:t> = population median tumor mutation burden</a:t>
+                </a:r>
               </a:p>
               <a:p>
                 <a:pPr lvl="0" indent="0" marL="0">
@@ -3370,133 +3340,78 @@
                 </a:pPr>
                 <a:r>
                   <a:rPr/>
-                  <a:t>Where:</a:t>
+                  <a:t>Corresponding estimators:</a:t>
+                </a:r>
+              </a:p>
+              <a:p>
+                <a:pPr lvl="0" indent="0" marL="0">
+                  <a:buNone/>
+                </a:pPr>
+                <a14:m>
+                  <m:oMath xmlns:m="http://schemas.openxmlformats.org/officeDocument/2006/math">
+                    <m:acc>
+                      <m:accPr>
+                        <m:chr m:val="‾"/>
+                      </m:accPr>
+                      <m:e>
+                        <m:r>
+                          <m:t>x</m:t>
+                        </m:r>
+                      </m:e>
+                    </m:acc>
+                  </m:oMath>
+                </a14:m>
+                <a:r>
+                  <a:rPr/>
+                  <a:t> = sample mean tumor mutation burden </a:t>
+                </a:r>
+                <a14:m>
+                  <m:oMath xmlns:m="http://schemas.openxmlformats.org/officeDocument/2006/math">
+                    <m:acc>
+                      <m:accPr>
+                        <m:chr m:val="‾"/>
+                      </m:accPr>
+                      <m:e>
+                        <m:r>
+                          <m:t>x</m:t>
+                        </m:r>
+                      </m:e>
+                    </m:acc>
+                  </m:oMath>
+                </a14:m>
+                <a:r>
+                  <a:rPr/>
+                  <a:t> = sample median tumor mutation burden</a:t>
+                </a:r>
+              </a:p>
+              <a:p>
+                <a:pPr lvl="0" indent="0" marL="0">
+                  <a:buNone/>
+                </a:pPr>
+                <a:r>
+                  <a:rPr/>
+                  <a:t>Bootstrap methods will be used to estimate:</a:t>
                 </a:r>
               </a:p>
               <a:p>
                 <a:pPr lvl="0"/>
-                <a14:m>
-                  <m:oMath xmlns:m="http://schemas.openxmlformats.org/officeDocument/2006/math">
-                    <m:r>
-                      <m:t>E</m:t>
-                    </m:r>
-                    <m:d>
-                      <m:dPr>
-                        <m:begChr m:val="("/>
-                        <m:sepChr m:val=""/>
-                        <m:endChr m:val=")"/>
-                        <m:grow/>
-                      </m:dPr>
-                      <m:e>
-                        <m:r>
-                          <m:t>Y</m:t>
-                        </m:r>
-                        <m:r>
-                          <m:rPr>
-                            <m:sty m:val="p"/>
-                          </m:rPr>
-                          <m:t>∣</m:t>
-                        </m:r>
-                        <m:r>
-                          <m:t>X</m:t>
-                        </m:r>
-                      </m:e>
-                    </m:d>
-                  </m:oMath>
-                </a14:m>
                 <a:r>
                   <a:rPr/>
-                  <a:t> : xpected value of the outcome given the predictors </a:t>
+                  <a:t>standard error of the mean TMB</a:t>
                 </a:r>
-                <a14:m>
-                  <m:oMath xmlns:m="http://schemas.openxmlformats.org/officeDocument/2006/math">
-                    <m:r>
-                      <m:t>X</m:t>
-                    </m:r>
-                  </m:oMath>
-                </a14:m>
               </a:p>
               <a:p>
                 <a:pPr lvl="0"/>
-                <a14:m>
-                  <m:oMath xmlns:m="http://schemas.openxmlformats.org/officeDocument/2006/math">
-                    <m:sSub>
-                      <m:e>
-                        <m:r>
-                          <m:t>β</m:t>
-                        </m:r>
-                      </m:e>
-                      <m:sub>
-                        <m:r>
-                          <m:t>0</m:t>
-                        </m:r>
-                      </m:sub>
-                    </m:sSub>
-                  </m:oMath>
-                </a14:m>
                 <a:r>
                   <a:rPr/>
-                  <a:t> : intercept → expected outcome when the predictor equals zero or when all predictors are at their reference values </a:t>
+                  <a:t>standard error of the median TMB</a:t>
                 </a:r>
-                <a14:m>
-                  <m:oMath xmlns:m="http://schemas.openxmlformats.org/officeDocument/2006/math">
-                    <m:r>
-                      <m:t>X</m:t>
-                    </m:r>
-                    <m:r>
-                      <m:rPr>
-                        <m:sty m:val="p"/>
-                      </m:rPr>
-                      <m:t>=</m:t>
-                    </m:r>
-                    <m:r>
-                      <m:t>0</m:t>
-                    </m:r>
-                  </m:oMath>
-                </a14:m>
               </a:p>
               <a:p>
                 <a:pPr lvl="0"/>
-                <a14:m>
-                  <m:oMath xmlns:m="http://schemas.openxmlformats.org/officeDocument/2006/math">
-                    <m:sSub>
-                      <m:e>
-                        <m:r>
-                          <m:t>β</m:t>
-                        </m:r>
-                      </m:e>
-                      <m:sub>
-                        <m:r>
-                          <m:t>1</m:t>
-                        </m:r>
-                      </m:sub>
-                    </m:sSub>
-                  </m:oMath>
-                </a14:m>
                 <a:r>
                   <a:rPr/>
-                  <a:t> : slope → expected change in the outcome for a one-unit change in the predictor </a:t>
-                </a:r>
-                <a14:m>
-                  <m:oMath xmlns:m="http://schemas.openxmlformats.org/officeDocument/2006/math">
-                    <m:r>
-                      <m:t>X</m:t>
-                    </m:r>
-                  </m:oMath>
-                </a14:m>
-              </a:p>
-              <a:p>
-                <a:pPr lvl="0"/>
-                <a14:m>
-                  <m:oMath xmlns:m="http://schemas.openxmlformats.org/officeDocument/2006/math">
-                    <m:r>
-                      <m:t>X</m:t>
-                    </m:r>
-                  </m:oMath>
-                </a14:m>
-                <a:r>
-                  <a:rPr/>
-                  <a:t> : predictor</a:t>
+                  <a:t>stability of each estimator across resampled datasets</a:t>
                 </a:r>
               </a:p>
             </p:txBody>
@@ -3545,214 +3460,62 @@
             </a:pPr>
             <a:r>
               <a:rPr/>
-              <a:t>Linear Regression as Model-Based Estimation</a:t>
-            </a:r>
-          </a:p>
-        </p:txBody>
-      </p:sp>
-      <mc:AlternateContent xmlns:mc="http://schemas.openxmlformats.org/markup-compatibility/2006">
-        <mc:Choice xmlns:a14="http://schemas.microsoft.com/office/drawing/2010/main" Requires="a14">
-          <p:sp>
-            <p:nvSpPr>
-              <p:cNvPr id="3" name="Content Placeholder 2"/>
-              <p:cNvSpPr>
-                <a:spLocks noGrp="1"/>
-              </p:cNvSpPr>
-              <p:nvPr>
-                <p:ph idx="1"/>
-              </p:nvPr>
-            </p:nvSpPr>
-            <p:spPr/>
-            <p:txBody>
-              <a:bodyPr/>
-              <a:lstStyle/>
-              <a:p>
-                <a:pPr lvl="0"/>
-                <a:r>
-                  <a:rPr/>
-                  <a:t>linear model defines a probability distribution for the observed data</a:t>
-                </a:r>
-              </a:p>
-              <a:p>
-                <a:pPr lvl="0"/>
-                <a:r>
-                  <a:rPr/>
-                  <a:t>likelihood evaluates how plausible different parameter values </a:t>
-                </a:r>
-                <a14:m>
-                  <m:oMath xmlns:m="http://schemas.openxmlformats.org/officeDocument/2006/math">
-                    <m:d>
-                      <m:dPr>
-                        <m:begChr m:val="("/>
-                        <m:sepChr m:val=""/>
-                        <m:endChr m:val=")"/>
-                        <m:grow/>
-                      </m:dPr>
-                      <m:e>
-                        <m:r>
-                          <m:t>β</m:t>
-                        </m:r>
-                        <m:r>
-                          <m:rPr>
-                            <m:sty m:val="p"/>
-                          </m:rPr>
-                          <m:t>,</m:t>
-                        </m:r>
-                        <m:sSup>
-                          <m:e>
-                            <m:r>
-                              <m:t>σ</m:t>
-                            </m:r>
-                          </m:e>
-                          <m:sup>
-                            <m:r>
-                              <m:t>2</m:t>
-                            </m:r>
-                          </m:sup>
-                        </m:sSup>
-                      </m:e>
-                    </m:d>
-                  </m:oMath>
-                </a14:m>
-              </a:p>
-              <a:p>
-                <a:pPr lvl="0"/>
-                <a:r>
-                  <a:rPr/>
-                  <a:t>unknown parameters include:</a:t>
-                </a:r>
-              </a:p>
-              <a:p>
-                <a:pPr lvl="1"/>
-                <a14:m>
-                  <m:oMath xmlns:m="http://schemas.openxmlformats.org/officeDocument/2006/math">
-                    <m:sSub>
-                      <m:e>
-                        <m:r>
-                          <m:t>β</m:t>
-                        </m:r>
-                      </m:e>
-                      <m:sub>
-                        <m:r>
-                          <m:t>0</m:t>
-                        </m:r>
-                      </m:sub>
-                    </m:sSub>
-                    <m:r>
-                      <m:rPr>
-                        <m:sty m:val="p"/>
-                      </m:rPr>
-                      <m:t>,</m:t>
-                    </m:r>
-                    <m:sSub>
-                      <m:e>
-                        <m:r>
-                          <m:t>β</m:t>
-                        </m:r>
-                      </m:e>
-                      <m:sub>
-                        <m:r>
-                          <m:t>1</m:t>
-                        </m:r>
-                      </m:sub>
-                    </m:sSub>
-                  </m:oMath>
-                </a14:m>
-                <a:r>
-                  <a:rPr/>
-                  <a:t> : describes how the expected outcome depends on </a:t>
-                </a:r>
-                <a14:m>
-                  <m:oMath xmlns:m="http://schemas.openxmlformats.org/officeDocument/2006/math">
-                    <m:r>
-                      <m:t>X</m:t>
-                    </m:r>
-                  </m:oMath>
-                </a14:m>
-              </a:p>
-              <a:p>
-                <a:pPr lvl="1"/>
-                <a14:m>
-                  <m:oMath xmlns:m="http://schemas.openxmlformats.org/officeDocument/2006/math">
-                    <m:sSup>
-                      <m:e>
-                        <m:r>
-                          <m:t>σ</m:t>
-                        </m:r>
-                      </m:e>
-                      <m:sup>
-                        <m:r>
-                          <m:t>2</m:t>
-                        </m:r>
-                      </m:sup>
-                    </m:sSup>
-                  </m:oMath>
-                </a14:m>
-                <a:r>
-                  <a:rPr/>
-                  <a:t> : describes how much outcomes vary around the mean</a:t>
-                </a:r>
-              </a:p>
-              <a:p>
-                <a:pPr lvl="0"/>
-                <a:r>
-                  <a:rPr/>
-                  <a:t>likelihood function:</a:t>
-                </a:r>
-              </a:p>
-              <a:p>
-                <a:pPr lvl="1"/>
-                <a:r>
-                  <a:rPr/>
-                  <a:t>evaluates how plausible the observed data are for different values of </a:t>
-                </a:r>
-                <a14:m>
-                  <m:oMath xmlns:m="http://schemas.openxmlformats.org/officeDocument/2006/math">
-                    <m:d>
-                      <m:dPr>
-                        <m:begChr m:val="("/>
-                        <m:sepChr m:val=""/>
-                        <m:endChr m:val=")"/>
-                        <m:grow/>
-                      </m:dPr>
-                      <m:e>
-                        <m:r>
-                          <m:t>β</m:t>
-                        </m:r>
-                        <m:r>
-                          <m:rPr>
-                            <m:sty m:val="p"/>
-                          </m:rPr>
-                          <m:t>,</m:t>
-                        </m:r>
-                        <m:sSup>
-                          <m:e>
-                            <m:r>
-                              <m:t>σ</m:t>
-                            </m:r>
-                          </m:e>
-                          <m:sup>
-                            <m:r>
-                              <m:t>2</m:t>
-                            </m:r>
-                          </m:sup>
-                        </m:sSup>
-                      </m:e>
-                    </m:d>
-                  </m:oMath>
-                </a14:m>
-              </a:p>
-              <a:p>
-                <a:pPr lvl="1"/>
-                <a:r>
-                  <a:rPr/>
-                  <a:t>data is fixed and varies the parameter values</a:t>
-                </a:r>
-              </a:p>
-            </p:txBody>
-          </p:sp>
-        </mc:Choice>
-      </mc:AlternateContent>
+              <a:t>Visualize the TMB Distribution</a:t>
+            </a:r>
+          </a:p>
+        </p:txBody>
+      </p:sp>
+      <p:sp>
+        <p:nvSpPr>
+          <p:cNvPr id="3" name="Content Placeholder 2"/>
+          <p:cNvSpPr>
+            <a:spLocks noGrp="1"/>
+          </p:cNvSpPr>
+          <p:nvPr>
+            <p:ph idx="1"/>
+          </p:nvPr>
+        </p:nvSpPr>
+        <p:spPr/>
+        <p:txBody>
+          <a:bodyPr/>
+          <a:lstStyle/>
+          <a:p>
+            <a:pPr lvl="0" indent="0" marL="0">
+              <a:buNone/>
+            </a:pPr>
+          </a:p>
+          <a:p>
+            <a:pPr lvl="0" indent="0" marL="0">
+              <a:buNone/>
+            </a:pPr>
+            <a:r>
+              <a:rPr b="1"/>
+              <a:t>Interpretation of the Distribution</a:t>
+            </a:r>
+          </a:p>
+          <a:p>
+            <a:pPr lvl="0"/>
+            <a:r>
+              <a:rPr/>
+              <a:t>histogram shows the distribution of tumor mutation burden across sequenced tumors</a:t>
+            </a:r>
+          </a:p>
+          <a:p>
+            <a:pPr lvl="0"/>
+            <a:r>
+              <a:rPr/>
+              <a:t>distribution is right-skewed positivelyskewed</a:t>
+            </a:r>
+          </a:p>
+          <a:p>
+            <a:pPr lvl="0"/>
+            <a:r>
+              <a:rPr/>
+              <a:t>due to skewness the mean is likely larger than the median</a:t>
+            </a:r>
+          </a:p>
+        </p:txBody>
+      </p:sp>
     </p:spTree>
   </p:cSld>
 </p:sld>
@@ -3795,7 +3558,7 @@
             </a:pPr>
             <a:r>
               <a:rPr/>
-              <a:t>Linear Regression: Example</a:t>
+              <a:t>Visualize the TMB Distribution</a:t>
             </a:r>
           </a:p>
         </p:txBody>
@@ -3818,13 +3581,14 @@
             <a:pPr lvl="0" indent="0" marL="0">
               <a:buNone/>
             </a:pPr>
+          </a:p>
+          <a:p>
+            <a:pPr lvl="0" indent="0" marL="0">
+              <a:buNone/>
+            </a:pPr>
             <a:r>
               <a:rPr b="1"/>
-              <a:t>Background</a:t>
-            </a:r>
-            <a:r>
-              <a:rPr/>
-              <a:t>: In many clinical and translational studies, immune system activity is measured using circulating biomarkers. One commonly studied marker is interferon-gamma (IFN-γ), a cytokine that plays a central role in immune activation, inflammation, and host defense against infections. IFN-γ is often used to evaluate whether a therapeutic intervention can modify an immune response.</a:t>
+              <a:t>Interpretation of the Distribution</a:t>
             </a:r>
           </a:p>
           <a:p>
@@ -3832,26 +3596,29 @@
               <a:buNone/>
             </a:pPr>
             <a:r>
-              <a:rPr b="1"/>
-              <a:t>Aim</a:t>
-            </a:r>
-            <a:r>
-              <a:rPr/>
-              <a:t>: Consider a study designed to evaluate a new therapy compared to a placebo control, where the goal is to understand both biological response and clinical outcomes. The scientific motivation is grounded in questions such as:</a:t>
-            </a:r>
-          </a:p>
-          <a:p>
-            <a:pPr lvl="0"/>
-            <a:r>
-              <a:rPr/>
-              <a:t>How does IFN-γ differ across treatment groups?</a:t>
-            </a:r>
-          </a:p>
-          <a:p>
-            <a:pPr lvl="0"/>
-            <a:r>
-              <a:rPr/>
-              <a:t>What is the magnitude of those differences?</a:t>
+              <a:rPr/>
+              <a:t>Note: mean may generate an overestimation of the typical tumor mutation burden in this sample because of extreme values</a:t>
+            </a:r>
+          </a:p>
+          <a:p>
+            <a:pPr lvl="0"/>
+            <a:r>
+              <a:rPr/>
+              <a:t>most tumors contain relatively low-to-moderate TMB values</a:t>
+            </a:r>
+          </a:p>
+          <a:p>
+            <a:pPr lvl="0"/>
+            <a:r>
+              <a:rPr/>
+              <a:t>smaller number of tumors contain substantially elevated mutation burden</a:t>
+            </a:r>
+          </a:p>
+          <a:p>
+            <a:pPr lvl="0"/>
+            <a:r>
+              <a:rPr/>
+              <a:t>long right tail indicates genomic heterogeneity across tumors</a:t>
             </a:r>
           </a:p>
         </p:txBody>
@@ -3898,7 +3665,7 @@
             </a:pPr>
             <a:r>
               <a:rPr/>
-              <a:t>Linear Regression: Example</a:t>
+              <a:t>Bootstrap Appraoch</a:t>
             </a:r>
           </a:p>
         </p:txBody>
@@ -3922,65 +3689,64 @@
               <a:buNone/>
             </a:pPr>
             <a:r>
+              <a:rPr>
+                <a:latin typeface="Courier"/>
+              </a:rPr>
+              <a:t>bootstrap resampling</a:t>
+            </a:r>
+            <a:r>
+              <a:rPr/>
+              <a:t>: approximates repeated sampling using the observed data</a:t>
+            </a:r>
+          </a:p>
+          <a:p>
+            <a:pPr lvl="0" indent="0" marL="0">
+              <a:buNone/>
+            </a:pPr>
+            <a:r>
+              <a:rPr/>
+              <a:t>Each bootstrap iteration executes the following:</a:t>
+            </a:r>
+          </a:p>
+          <a:p>
+            <a:pPr lvl="0" indent="0" marL="0">
+              <a:buNone/>
+            </a:pPr>
+            <a:r>
               <a:rPr b="1"/>
-              <a:t>Description of the Dataset</a:t>
-            </a:r>
-          </a:p>
-          <a:p>
-            <a:pPr lvl="0" indent="0">
-              <a:buNone/>
-            </a:pPr>
-            <a:r>
-              <a:rPr>
-                <a:solidFill>
-                  <a:srgbClr val="4758AB"/>
-                </a:solidFill>
-                <a:latin typeface="Courier"/>
-              </a:rPr>
-              <a:t>head</a:t>
-            </a:r>
-            <a:r>
-              <a:rPr>
-                <a:solidFill>
-                  <a:srgbClr val="003B4F"/>
-                </a:solidFill>
-                <a:latin typeface="Courier"/>
-              </a:rPr>
-              <a:t>(biomarker_df, </a:t>
-            </a:r>
-            <a:r>
-              <a:rPr>
-                <a:solidFill>
-                  <a:srgbClr val="AD0000"/>
-                </a:solidFill>
-                <a:latin typeface="Courier"/>
-              </a:rPr>
-              <a:t>3</a:t>
-            </a:r>
-            <a:r>
-              <a:rPr>
-                <a:solidFill>
-                  <a:srgbClr val="003B4F"/>
-                </a:solidFill>
-                <a:latin typeface="Courier"/>
-              </a:rPr>
-              <a:t>)</a:t>
-            </a:r>
-          </a:p>
-          <a:p>
-            <a:pPr lvl="0" indent="0">
-              <a:buNone/>
-            </a:pPr>
-            <a:r>
-              <a:rPr>
-                <a:latin typeface="Courier"/>
-              </a:rPr>
-              <a:t># A tibble: 3 × 7
-     id treatment  ifng response infections   age   bmi
-  &lt;int&gt; &lt;chr&gt;     &lt;dbl&gt;    &lt;int&gt;      &lt;int&gt; &lt;dbl&gt; &lt;dbl&gt;
-1     1 Placebo    10.0        0          3    57  31.4
-2     2 Placebo    14.1        1          1    77  31.9
-3     3 Placebo    14.2        0          3    51  35  </a:t>
+              <a:t>1. resample TMB values</a:t>
+            </a:r>
+            <a:r>
+              <a:rPr/>
+              <a:t> with replacement</a:t>
+            </a:r>
+          </a:p>
+          <a:p>
+            <a:pPr lvl="0"/>
+            <a:r>
+              <a:rPr/>
+              <a:t>after a value is selected, it is returned to the dataset and can be selected again</a:t>
+            </a:r>
+          </a:p>
+          <a:p>
+            <a:pPr lvl="0"/>
+            <a:r>
+              <a:rPr/>
+              <a:t>allowing the bootstrap sample to:</a:t>
+            </a:r>
+          </a:p>
+          <a:p>
+            <a:pPr lvl="1"/>
+            <a:r>
+              <a:rPr/>
+              <a:t>maintain same size as the original dataset</a:t>
+            </a:r>
+          </a:p>
+          <a:p>
+            <a:pPr lvl="1"/>
+            <a:r>
+              <a:rPr/>
+              <a:t>note that each resample may include some participants more than once and may omit some participants</a:t>
             </a:r>
           </a:p>
           <a:p>
@@ -3988,85 +3754,35 @@
               <a:buNone/>
             </a:pPr>
             <a:r>
-              <a:rPr/>
-              <a:t>Each row in the dataset represents one patient enrolled in the study. The variables capture both biological measurements and clinical outcomes:</a:t>
-            </a:r>
-          </a:p>
-          <a:p>
-            <a:pPr lvl="0"/>
-            <a:r>
               <a:rPr b="1"/>
-              <a:t>id</a:t>
-            </a:r>
-            <a:r>
-              <a:rPr/>
-              <a:t>: unique patient identifier</a:t>
-            </a:r>
-          </a:p>
-          <a:p>
-            <a:pPr lvl="0"/>
+              <a:t>2. compute the estimator on that resampled dataset</a:t>
+            </a:r>
+          </a:p>
+          <a:p>
+            <a:pPr lvl="0" indent="0" marL="0">
+              <a:buNone/>
+            </a:pPr>
             <a:r>
               <a:rPr b="1"/>
-              <a:t>treatment</a:t>
-            </a:r>
-            <a:r>
-              <a:rPr/>
-              <a:t>: treatment group assignment [placebo or low dose therapy]</a:t>
-            </a:r>
-          </a:p>
-          <a:p>
-            <a:pPr lvl="0"/>
+              <a:t>3. store the result</a:t>
+            </a:r>
+          </a:p>
+          <a:p>
+            <a:pPr lvl="0" indent="0" marL="0">
+              <a:buNone/>
+            </a:pPr>
             <a:r>
               <a:rPr b="1"/>
-              <a:t>ifng</a:t>
-            </a:r>
-            <a:r>
-              <a:rPr/>
-              <a:t>: continuous measurement of IFN-γ concentration [immune biomarker]</a:t>
-            </a:r>
-          </a:p>
-          <a:p>
-            <a:pPr lvl="0"/>
-            <a:r>
-              <a:rPr b="1"/>
-              <a:t>response</a:t>
-            </a:r>
-            <a:r>
-              <a:rPr/>
-              <a:t>: binary clinical outcome [1 = responded to treatment, 0 = no response]</a:t>
-            </a:r>
-          </a:p>
-          <a:p>
-            <a:pPr lvl="0"/>
-            <a:r>
-              <a:rPr b="1"/>
-              <a:t>infections</a:t>
-            </a:r>
-            <a:r>
-              <a:rPr/>
-              <a:t>: count of infection events during follow-up</a:t>
-            </a:r>
-          </a:p>
-          <a:p>
-            <a:pPr lvl="0"/>
-            <a:r>
-              <a:rPr b="1"/>
-              <a:t>age</a:t>
-            </a:r>
-            <a:r>
-              <a:rPr/>
-              <a:t>: patient age in years</a:t>
-            </a:r>
-          </a:p>
-          <a:p>
-            <a:pPr lvl="0"/>
-            <a:r>
-              <a:rPr b="1"/>
-              <a:t>bmi</a:t>
-            </a:r>
-            <a:r>
-              <a:rPr/>
-              <a:t>: body mass index</a:t>
+              <a:t>4. repeat many times</a:t>
+            </a:r>
+          </a:p>
+          <a:p>
+            <a:pPr lvl="0" indent="0" marL="0">
+              <a:buNone/>
+            </a:pPr>
+            <a:r>
+              <a:rPr/>
+              <a:t>After many iterations the collection of estimates approximates the sampling distribution of the estimator</a:t>
             </a:r>
           </a:p>
         </p:txBody>
@@ -4113,252 +3829,126 @@
             </a:pPr>
             <a:r>
               <a:rPr/>
-              <a:t>Linear Regression for IFN-gamma</a:t>
-            </a:r>
-          </a:p>
-        </p:txBody>
-      </p:sp>
-      <mc:AlternateContent xmlns:mc="http://schemas.openxmlformats.org/markup-compatibility/2006">
-        <mc:Choice xmlns:a14="http://schemas.microsoft.com/office/drawing/2010/main" Requires="a14">
-          <p:sp>
-            <p:nvSpPr>
-              <p:cNvPr id="3" name="Content Placeholder 2"/>
-              <p:cNvSpPr>
-                <a:spLocks noGrp="1"/>
-              </p:cNvSpPr>
-              <p:nvPr>
-                <p:ph idx="1"/>
-              </p:nvPr>
-            </p:nvSpPr>
-            <p:spPr/>
-            <p:txBody>
-              <a:bodyPr/>
-              <a:lstStyle/>
-              <a:p>
-                <a:pPr lvl="0" indent="0" marL="0">
-                  <a:buNone/>
-                </a:pPr>
-                <a:r>
-                  <a:rPr/>
-                  <a:t>Expected [average] IFN-γ level for each treatment group</a:t>
-                </a:r>
-              </a:p>
-              <a:p>
-                <a:pPr lvl="0" indent="0" marL="0">
-                  <a:buNone/>
-                </a:pPr>
-                <a14:m>
-                  <m:oMathPara xmlns:m="http://schemas.openxmlformats.org/officeDocument/2006/math">
-                    <m:oMathParaPr>
-                      <m:jc m:val="center"/>
-                    </m:oMathParaPr>
-                    <m:oMath>
-                      <m:r>
-                        <m:t>E</m:t>
-                      </m:r>
-                      <m:d>
-                        <m:dPr>
-                          <m:begChr m:val="("/>
-                          <m:sepChr m:val=""/>
-                          <m:endChr m:val=")"/>
-                          <m:grow/>
-                        </m:dPr>
-                        <m:e>
-                          <m:r>
-                            <m:rPr>
-                              <m:nor/>
-                              <m:sty m:val="p"/>
-                            </m:rPr>
-                            <m:t>IFNy∣treatment</m:t>
-                          </m:r>
-                        </m:e>
-                      </m:d>
-                      <m:r>
-                        <m:rPr>
-                          <m:sty m:val="p"/>
-                        </m:rPr>
-                        <m:t>=</m:t>
-                      </m:r>
-                      <m:sSub>
-                        <m:e>
-                          <m:r>
-                            <m:t>β</m:t>
-                          </m:r>
-                        </m:e>
-                        <m:sub>
-                          <m:r>
-                            <m:t>0</m:t>
-                          </m:r>
-                        </m:sub>
-                      </m:sSub>
-                      <m:r>
-                        <m:rPr>
-                          <m:sty m:val="p"/>
-                        </m:rPr>
-                        <m:t>+</m:t>
-                      </m:r>
-                      <m:sSub>
-                        <m:e>
-                          <m:r>
-                            <m:t>β</m:t>
-                          </m:r>
-                        </m:e>
-                        <m:sub>
-                          <m:r>
-                            <m:t>1</m:t>
-                          </m:r>
-                        </m:sub>
-                      </m:sSub>
-                      <m:r>
-                        <m:rPr>
-                          <m:sty m:val="p"/>
-                        </m:rPr>
-                        <m:t>⋅</m:t>
-                      </m:r>
-                      <m:r>
-                        <m:t>t</m:t>
-                      </m:r>
-                      <m:r>
-                        <m:t>r</m:t>
-                      </m:r>
-                      <m:r>
-                        <m:t>e</m:t>
-                      </m:r>
-                      <m:r>
-                        <m:t>a</m:t>
-                      </m:r>
-                      <m:r>
-                        <m:t>t</m:t>
-                      </m:r>
-                      <m:r>
-                        <m:t>m</m:t>
-                      </m:r>
-                      <m:r>
-                        <m:t>e</m:t>
-                      </m:r>
-                      <m:r>
-                        <m:t>n</m:t>
-                      </m:r>
-                      <m:r>
-                        <m:t>t</m:t>
-                      </m:r>
-                    </m:oMath>
-                  </m:oMathPara>
-                </a14:m>
-              </a:p>
-              <a:p>
-                <a:pPr lvl="0" indent="0" marL="0">
-                  <a:buNone/>
-                </a:pPr>
-                <a:r>
-                  <a:rPr/>
-                  <a:t>Where:</a:t>
-                </a:r>
-              </a:p>
-              <a:p>
-                <a:pPr lvl="0" indent="0" marL="0">
-                  <a:buNone/>
-                </a:pPr>
-                <a14:m>
-                  <m:oMath xmlns:m="http://schemas.openxmlformats.org/officeDocument/2006/math">
-                    <m:sSub>
-                      <m:e>
-                        <m:r>
-                          <m:t>β</m:t>
-                        </m:r>
-                      </m:e>
-                      <m:sub>
-                        <m:r>
-                          <m:t>0</m:t>
-                        </m:r>
-                      </m:sub>
-                    </m:sSub>
-                  </m:oMath>
-                </a14:m>
-                <a:r>
-                  <a:rPr/>
-                  <a:t> : mean IFN-γ in the reference group [high-dose group]</a:t>
-                </a:r>
-                <a:br/>
-                <a14:m>
-                  <m:oMath xmlns:m="http://schemas.openxmlformats.org/officeDocument/2006/math">
-                    <m:sSub>
-                      <m:e>
-                        <m:r>
-                          <m:t>β</m:t>
-                        </m:r>
-                      </m:e>
-                      <m:sub>
-                        <m:r>
-                          <m:t>1</m:t>
-                        </m:r>
-                      </m:sub>
-                    </m:sSub>
-                  </m:oMath>
-                </a14:m>
-                <a:r>
-                  <a:rPr/>
-                  <a:t> : difference in mean IFN-γ between low dose treatment and placebo</a:t>
-                </a:r>
-              </a:p>
-              <a:p>
-                <a:pPr lvl="0"/>
-                <a:r>
-                  <a:rPr/>
-                  <a:t>intercept [</a:t>
-                </a:r>
-                <a14:m>
-                  <m:oMath xmlns:m="http://schemas.openxmlformats.org/officeDocument/2006/math">
-                    <m:sSub>
-                      <m:e>
-                        <m:r>
-                          <m:t>β</m:t>
-                        </m:r>
-                      </m:e>
-                      <m:sub>
-                        <m:r>
-                          <m:t>0</m:t>
-                        </m:r>
-                      </m:sub>
-                    </m:sSub>
-                  </m:oMath>
-                </a14:m>
-                <a:r>
-                  <a:rPr/>
-                  <a:t>] : represents the estimated mean IFN-γ in the high-dose group</a:t>
-                </a:r>
-              </a:p>
-              <a:p>
-                <a:pPr lvl="0"/>
-                <a:r>
-                  <a:rPr/>
-                  <a:t>treatment coefficient [</a:t>
-                </a:r>
-                <a14:m>
-                  <m:oMath xmlns:m="http://schemas.openxmlformats.org/officeDocument/2006/math">
-                    <m:sSub>
-                      <m:e>
-                        <m:r>
-                          <m:t>β</m:t>
-                        </m:r>
-                      </m:e>
-                      <m:sub>
-                        <m:r>
-                          <m:t>1</m:t>
-                        </m:r>
-                      </m:sub>
-                    </m:sSub>
-                  </m:oMath>
-                </a14:m>
-                <a:r>
-                  <a:rPr/>
-                  <a:t>] : represents the estimated difference in mean IFN-γ between groups</a:t>
-                </a:r>
-              </a:p>
-            </p:txBody>
-          </p:sp>
-        </mc:Choice>
-      </mc:AlternateContent>
+              <a:t>Extract the Variable</a:t>
+            </a:r>
+          </a:p>
+        </p:txBody>
+      </p:sp>
+      <p:sp>
+        <p:nvSpPr>
+          <p:cNvPr id="3" name="Content Placeholder 2"/>
+          <p:cNvSpPr>
+            <a:spLocks noGrp="1"/>
+          </p:cNvSpPr>
+          <p:nvPr>
+            <p:ph idx="1"/>
+          </p:nvPr>
+        </p:nvSpPr>
+        <p:spPr/>
+        <p:txBody>
+          <a:bodyPr/>
+          <a:lstStyle/>
+          <a:p>
+            <a:pPr lvl="0" indent="0">
+              <a:buNone/>
+            </a:pPr>
+            <a:r>
+              <a:rPr>
+                <a:solidFill>
+                  <a:srgbClr val="003B4F"/>
+                </a:solidFill>
+                <a:latin typeface="Courier"/>
+              </a:rPr>
+              <a:t>tmb_values &lt;- tmb_df</a:t>
+            </a:r>
+            <a:r>
+              <a:rPr>
+                <a:solidFill>
+                  <a:srgbClr val="5E5E5E"/>
+                </a:solidFill>
+                <a:latin typeface="Courier"/>
+              </a:rPr>
+              <a:t>$</a:t>
+            </a:r>
+            <a:r>
+              <a:rPr>
+                <a:solidFill>
+                  <a:srgbClr val="003B4F"/>
+                </a:solidFill>
+                <a:latin typeface="Courier"/>
+              </a:rPr>
+              <a:t>tmb</a:t>
+            </a:r>
+            <a:br/>
+            <a:br/>
+            <a:r>
+              <a:rPr>
+                <a:solidFill>
+                  <a:srgbClr val="4758AB"/>
+                </a:solidFill>
+                <a:latin typeface="Courier"/>
+              </a:rPr>
+              <a:t>head</a:t>
+            </a:r>
+            <a:r>
+              <a:rPr>
+                <a:solidFill>
+                  <a:srgbClr val="003B4F"/>
+                </a:solidFill>
+                <a:latin typeface="Courier"/>
+              </a:rPr>
+              <a:t>(tmb_values)</a:t>
+            </a:r>
+          </a:p>
+          <a:p>
+            <a:pPr lvl="0" indent="0">
+              <a:buNone/>
+            </a:pPr>
+            <a:r>
+              <a:rPr>
+                <a:latin typeface="Courier"/>
+              </a:rPr>
+              <a:t>[1]  2.70 11.49  5.47 10.97  4.79  2.61</a:t>
+            </a:r>
+          </a:p>
+          <a:p>
+            <a:pPr lvl="0" indent="0" marL="0">
+              <a:buNone/>
+            </a:pPr>
+            <a:r>
+              <a:rPr b="1"/>
+              <a:t>Notes</a:t>
+            </a:r>
+          </a:p>
+          <a:p>
+            <a:pPr lvl="0"/>
+            <a:r>
+              <a:rPr>
+                <a:latin typeface="Courier"/>
+              </a:rPr>
+              <a:t>tmb_df$tmb</a:t>
+            </a:r>
+            <a:r>
+              <a:rPr/>
+              <a:t> extracts the tumor mutation burden column</a:t>
+            </a:r>
+          </a:p>
+          <a:p>
+            <a:pPr lvl="0"/>
+            <a:r>
+              <a:rPr/>
+              <a:t>bootstrap resampling operates on the observed TMB measurements</a:t>
+            </a:r>
+          </a:p>
+          <a:p>
+            <a:pPr lvl="0"/>
+            <a:r>
+              <a:rPr/>
+              <a:t>vector contains one TMB value per tumor sample</a:t>
+            </a:r>
+          </a:p>
+        </p:txBody>
+      </p:sp>
     </p:spTree>
   </p:cSld>
 </p:sld>
@@ -4401,7 +3991,7 @@
             </a:pPr>
             <a:r>
               <a:rPr/>
-              <a:t>Linear Regression for IFN-gamma</a:t>
+              <a:t>Generate One Bootstrap Sample</a:t>
             </a:r>
           </a:p>
         </p:txBody>
@@ -4426,44 +4016,290 @@
             </a:pPr>
             <a:r>
               <a:rPr>
-                <a:latin typeface="Courier"/>
-              </a:rPr>
-              <a:t>
-Call:
-lm(formula = ifng ~ treatment, data = biomarker_df)
-Residuals:
-     Min       1Q   Median       3Q      Max 
--12.9145  -2.7698  -0.5039   3.2670  10.2419 
-Coefficients:
-                  Estimate Std. Error t value Pr(&gt;|t|)    
-(Intercept)        19.5543     0.5711  34.240  &lt; 2e-16 ***
-treatmentLow dose  -2.9835     0.8077  -3.694 0.000294 ***
-treatmentPlacebo   -8.1065     0.8077 -10.037  &lt; 2e-16 ***
----
-Signif. codes:  0 '***' 0.001 '**' 0.01 '*' 0.05 '.' 0.1 ' ' 1
-Residual standard error: 4.424 on 177 degrees of freedom
-Multiple R-squared:  0.368, Adjusted R-squared:  0.3609 
-F-statistic: 51.54 on 2 and 177 DF,  p-value: &lt; 2.2e-16</a:t>
-            </a:r>
-          </a:p>
-          <a:p>
-            <a:pPr lvl="0"/>
-            <a:r>
-              <a:rPr>
-                <a:latin typeface="Courier"/>
-              </a:rPr>
-              <a:t>lm()</a:t>
-            </a:r>
-            <a:r>
-              <a:rPr/>
-              <a:t> function in base R fits linear model</a:t>
-            </a:r>
-          </a:p>
-          <a:p>
-            <a:pPr lvl="0"/>
-            <a:r>
-              <a:rPr/>
-              <a:t>model estimates the average IFN-gamma level as a function of treatment group</a:t>
+                <a:solidFill>
+                  <a:srgbClr val="4758AB"/>
+                </a:solidFill>
+                <a:latin typeface="Courier"/>
+              </a:rPr>
+              <a:t>set.seed</a:t>
+            </a:r>
+            <a:r>
+              <a:rPr>
+                <a:solidFill>
+                  <a:srgbClr val="003B4F"/>
+                </a:solidFill>
+                <a:latin typeface="Courier"/>
+              </a:rPr>
+              <a:t>(</a:t>
+            </a:r>
+            <a:r>
+              <a:rPr>
+                <a:solidFill>
+                  <a:srgbClr val="AD0000"/>
+                </a:solidFill>
+                <a:latin typeface="Courier"/>
+              </a:rPr>
+              <a:t>100</a:t>
+            </a:r>
+            <a:r>
+              <a:rPr>
+                <a:solidFill>
+                  <a:srgbClr val="003B4F"/>
+                </a:solidFill>
+                <a:latin typeface="Courier"/>
+              </a:rPr>
+              <a:t>)</a:t>
+            </a:r>
+            <a:br/>
+            <a:br/>
+            <a:r>
+              <a:rPr>
+                <a:solidFill>
+                  <a:srgbClr val="003B4F"/>
+                </a:solidFill>
+                <a:latin typeface="Courier"/>
+              </a:rPr>
+              <a:t>bootstrap_sample &lt;- </a:t>
+            </a:r>
+            <a:r>
+              <a:rPr>
+                <a:solidFill>
+                  <a:srgbClr val="4758AB"/>
+                </a:solidFill>
+                <a:latin typeface="Courier"/>
+              </a:rPr>
+              <a:t>sample</a:t>
+            </a:r>
+            <a:r>
+              <a:rPr>
+                <a:solidFill>
+                  <a:srgbClr val="003B4F"/>
+                </a:solidFill>
+                <a:latin typeface="Courier"/>
+              </a:rPr>
+              <a:t>(</a:t>
+            </a:r>
+            <a:br/>
+            <a:r>
+              <a:rPr>
+                <a:solidFill>
+                  <a:srgbClr val="003B4F"/>
+                </a:solidFill>
+                <a:latin typeface="Courier"/>
+              </a:rPr>
+              <a:t>  </a:t>
+            </a:r>
+            <a:r>
+              <a:rPr>
+                <a:solidFill>
+                  <a:srgbClr val="657422"/>
+                </a:solidFill>
+                <a:latin typeface="Courier"/>
+              </a:rPr>
+              <a:t>x =</a:t>
+            </a:r>
+            <a:r>
+              <a:rPr>
+                <a:solidFill>
+                  <a:srgbClr val="003B4F"/>
+                </a:solidFill>
+                <a:latin typeface="Courier"/>
+              </a:rPr>
+              <a:t> tmb_values,</a:t>
+            </a:r>
+            <a:br/>
+            <a:r>
+              <a:rPr>
+                <a:solidFill>
+                  <a:srgbClr val="003B4F"/>
+                </a:solidFill>
+                <a:latin typeface="Courier"/>
+              </a:rPr>
+              <a:t>  </a:t>
+            </a:r>
+            <a:r>
+              <a:rPr>
+                <a:solidFill>
+                  <a:srgbClr val="657422"/>
+                </a:solidFill>
+                <a:latin typeface="Courier"/>
+              </a:rPr>
+              <a:t>size =</a:t>
+            </a:r>
+            <a:r>
+              <a:rPr>
+                <a:solidFill>
+                  <a:srgbClr val="003B4F"/>
+                </a:solidFill>
+                <a:latin typeface="Courier"/>
+              </a:rPr>
+              <a:t> </a:t>
+            </a:r>
+            <a:r>
+              <a:rPr>
+                <a:solidFill>
+                  <a:srgbClr val="4758AB"/>
+                </a:solidFill>
+                <a:latin typeface="Courier"/>
+              </a:rPr>
+              <a:t>length</a:t>
+            </a:r>
+            <a:r>
+              <a:rPr>
+                <a:solidFill>
+                  <a:srgbClr val="003B4F"/>
+                </a:solidFill>
+                <a:latin typeface="Courier"/>
+              </a:rPr>
+              <a:t>(tmb_values),</a:t>
+            </a:r>
+            <a:br/>
+            <a:r>
+              <a:rPr>
+                <a:solidFill>
+                  <a:srgbClr val="003B4F"/>
+                </a:solidFill>
+                <a:latin typeface="Courier"/>
+              </a:rPr>
+              <a:t>  </a:t>
+            </a:r>
+            <a:r>
+              <a:rPr>
+                <a:solidFill>
+                  <a:srgbClr val="657422"/>
+                </a:solidFill>
+                <a:latin typeface="Courier"/>
+              </a:rPr>
+              <a:t>replace =</a:t>
+            </a:r>
+            <a:r>
+              <a:rPr>
+                <a:solidFill>
+                  <a:srgbClr val="003B4F"/>
+                </a:solidFill>
+                <a:latin typeface="Courier"/>
+              </a:rPr>
+              <a:t> </a:t>
+            </a:r>
+            <a:r>
+              <a:rPr>
+                <a:solidFill>
+                  <a:srgbClr val="8F5902"/>
+                </a:solidFill>
+                <a:latin typeface="Courier"/>
+              </a:rPr>
+              <a:t>TRUE</a:t>
+            </a:r>
+            <a:br/>
+            <a:r>
+              <a:rPr>
+                <a:solidFill>
+                  <a:srgbClr val="003B4F"/>
+                </a:solidFill>
+                <a:latin typeface="Courier"/>
+              </a:rPr>
+              <a:t>)</a:t>
+            </a:r>
+            <a:br/>
+            <a:br/>
+            <a:r>
+              <a:rPr>
+                <a:solidFill>
+                  <a:srgbClr val="4758AB"/>
+                </a:solidFill>
+                <a:latin typeface="Courier"/>
+              </a:rPr>
+              <a:t>head</a:t>
+            </a:r>
+            <a:r>
+              <a:rPr>
+                <a:solidFill>
+                  <a:srgbClr val="003B4F"/>
+                </a:solidFill>
+                <a:latin typeface="Courier"/>
+              </a:rPr>
+              <a:t>(bootstrap_sample)</a:t>
+            </a:r>
+          </a:p>
+          <a:p>
+            <a:pPr lvl="0" indent="0">
+              <a:buNone/>
+            </a:pPr>
+            <a:r>
+              <a:rPr>
+                <a:latin typeface="Courier"/>
+              </a:rPr>
+              <a:t>[1]  7.07 10.67  6.62  2.05  1.89 11.13</a:t>
+            </a:r>
+          </a:p>
+          <a:p>
+            <a:pPr lvl="0" indent="0" marL="0">
+              <a:buNone/>
+            </a:pPr>
+            <a:r>
+              <a:rPr b="1"/>
+              <a:t>Notes</a:t>
+            </a:r>
+          </a:p>
+          <a:p>
+            <a:pPr lvl="0"/>
+            <a:r>
+              <a:rPr>
+                <a:latin typeface="Courier"/>
+              </a:rPr>
+              <a:t>sample()</a:t>
+            </a:r>
+            <a:r>
+              <a:rPr/>
+              <a:t> draws observations from the original TMB values</a:t>
+            </a:r>
+          </a:p>
+          <a:p>
+            <a:pPr lvl="0"/>
+            <a:r>
+              <a:rPr>
+                <a:latin typeface="Courier"/>
+              </a:rPr>
+              <a:t>x = tmb_values</a:t>
+            </a:r>
+          </a:p>
+          <a:p>
+            <a:pPr lvl="1"/>
+            <a:r>
+              <a:rPr/>
+              <a:t>variable that stores values being resampled</a:t>
+            </a:r>
+          </a:p>
+          <a:p>
+            <a:pPr lvl="0"/>
+            <a:r>
+              <a:rPr>
+                <a:latin typeface="Courier"/>
+              </a:rPr>
+              <a:t>size = length(tmb_values)</a:t>
+            </a:r>
+          </a:p>
+          <a:p>
+            <a:pPr lvl="1"/>
+            <a:r>
+              <a:rPr/>
+              <a:t>bootstrap sample has the same size as the original dataset</a:t>
+            </a:r>
+          </a:p>
+          <a:p>
+            <a:pPr lvl="0"/>
+            <a:r>
+              <a:rPr>
+                <a:latin typeface="Courier"/>
+              </a:rPr>
+              <a:t>replace = TRUE</a:t>
+            </a:r>
+          </a:p>
+          <a:p>
+            <a:pPr lvl="1"/>
+            <a:r>
+              <a:rPr/>
+              <a:t>observations can appear more than once</a:t>
             </a:r>
           </a:p>
         </p:txBody>
@@ -4510,7 +4346,7 @@
             </a:pPr>
             <a:r>
               <a:rPr/>
-              <a:t>Linear Regression for IFN-gamma</a:t>
+              <a:t>Compute an Estimator</a:t>
             </a:r>
           </a:p>
         </p:txBody>
@@ -4535,24 +4371,73 @@
             </a:pPr>
             <a:r>
               <a:rPr>
-                <a:latin typeface="Courier"/>
-              </a:rPr>
-              <a:t>
-Call:
-lm(formula = ifng ~ treatment, data = biomarker_df)
-Residuals:
-     Min       1Q   Median       3Q      Max 
--12.9145  -2.7698  -0.5039   3.2670  10.2419 
-Coefficients:
-                  Estimate Std. Error t value Pr(&gt;|t|)    
-(Intercept)        19.5543     0.5711  34.240  &lt; 2e-16 ***
-treatmentLow dose  -2.9835     0.8077  -3.694 0.000294 ***
-treatmentPlacebo   -8.1065     0.8077 -10.037  &lt; 2e-16 ***
----
-Signif. codes:  0 '***' 0.001 '**' 0.01 '*' 0.05 '.' 0.1 ' ' 1
-Residual standard error: 4.424 on 177 degrees of freedom
-Multiple R-squared:  0.368, Adjusted R-squared:  0.3609 
-F-statistic: 51.54 on 2 and 177 DF,  p-value: &lt; 2.2e-16</a:t>
+                <a:solidFill>
+                  <a:srgbClr val="4758AB"/>
+                </a:solidFill>
+                <a:latin typeface="Courier"/>
+              </a:rPr>
+              <a:t>mean</a:t>
+            </a:r>
+            <a:r>
+              <a:rPr>
+                <a:solidFill>
+                  <a:srgbClr val="003B4F"/>
+                </a:solidFill>
+                <a:latin typeface="Courier"/>
+              </a:rPr>
+              <a:t>(bootstrap_sample)</a:t>
+            </a:r>
+          </a:p>
+          <a:p>
+            <a:pPr lvl="0" indent="0">
+              <a:buNone/>
+            </a:pPr>
+            <a:r>
+              <a:rPr>
+                <a:latin typeface="Courier"/>
+              </a:rPr>
+              <a:t>[1] 7.538273</a:t>
+            </a:r>
+          </a:p>
+          <a:p>
+            <a:pPr lvl="0" indent="0">
+              <a:buNone/>
+            </a:pPr>
+            <a:r>
+              <a:rPr>
+                <a:solidFill>
+                  <a:srgbClr val="4758AB"/>
+                </a:solidFill>
+                <a:latin typeface="Courier"/>
+              </a:rPr>
+              <a:t>median</a:t>
+            </a:r>
+            <a:r>
+              <a:rPr>
+                <a:solidFill>
+                  <a:srgbClr val="003B4F"/>
+                </a:solidFill>
+                <a:latin typeface="Courier"/>
+              </a:rPr>
+              <a:t>(bootstrap_sample)</a:t>
+            </a:r>
+          </a:p>
+          <a:p>
+            <a:pPr lvl="0" indent="0">
+              <a:buNone/>
+            </a:pPr>
+            <a:r>
+              <a:rPr>
+                <a:latin typeface="Courier"/>
+              </a:rPr>
+              <a:t>[1] 7.005</a:t>
+            </a:r>
+          </a:p>
+          <a:p>
+            <a:pPr lvl="0"/>
+            <a:r>
+              <a:rPr/>
+              <a:t>represents estimators [sample mean and median TMB] from a single bootstrap sample</a:t>
             </a:r>
           </a:p>
           <a:p>
@@ -4560,33 +4445,29 @@
               <a:buNone/>
             </a:pPr>
             <a:r>
-              <a:rPr b="1"/>
-              <a:t>Interpretation of Treatment Effects</a:t>
-            </a:r>
-          </a:p>
-          <a:p>
-            <a:pPr lvl="0" indent="0" marL="0">
-              <a:buNone/>
-            </a:pPr>
-            <a:r>
-              <a:rPr/>
-              <a:t>Each coefficient represents a difference in mean IFN-γ relative to the reference group [high dose treatment group]:</a:t>
-            </a:r>
-          </a:p>
-          <a:p>
-            <a:pPr lvl="0" indent="0" marL="0">
-              <a:buNone/>
-            </a:pPr>
-            <a:r>
-              <a:rPr/>
-              <a:t>Intercept = 19.55</a:t>
-            </a:r>
-          </a:p>
-          <a:p>
-            <a:pPr lvl="0"/>
-            <a:r>
-              <a:rPr/>
-              <a:t>estimated mean IFN-γ in the reference group [high-dose treatment]</a:t>
+              <a:rPr/>
+              <a:t>After generating the resample:</a:t>
+            </a:r>
+          </a:p>
+          <a:p>
+            <a:pPr lvl="0"/>
+            <a:r>
+              <a:rPr/>
+              <a:t>compute the estimator of interest</a:t>
+            </a:r>
+          </a:p>
+          <a:p>
+            <a:pPr lvl="0"/>
+            <a:r>
+              <a:rPr/>
+              <a:t>store the result</a:t>
+            </a:r>
+          </a:p>
+          <a:p>
+            <a:pPr lvl="0"/>
+            <a:r>
+              <a:rPr/>
+              <a:t>repeat many times</a:t>
             </a:r>
           </a:p>
         </p:txBody>
@@ -4633,7 +4514,7 @@
             </a:pPr>
             <a:r>
               <a:rPr/>
-              <a:t>Linear Regression for IFN-gamma</a:t>
+              <a:t>Bootstrap for the Mean TMB</a:t>
             </a:r>
           </a:p>
         </p:txBody>
@@ -4658,24 +4539,307 @@
             </a:pPr>
             <a:r>
               <a:rPr>
-                <a:latin typeface="Courier"/>
-              </a:rPr>
-              <a:t>
-Call:
-lm(formula = ifng ~ treatment, data = biomarker_df)
-Residuals:
-     Min       1Q   Median       3Q      Max 
--12.9145  -2.7698  -0.5039   3.2670  10.2419 
-Coefficients:
-                  Estimate Std. Error t value Pr(&gt;|t|)    
-(Intercept)        19.5543     0.5711  34.240  &lt; 2e-16 ***
-treatmentLow dose  -2.9835     0.8077  -3.694 0.000294 ***
-treatmentPlacebo   -8.1065     0.8077 -10.037  &lt; 2e-16 ***
----
-Signif. codes:  0 '***' 0.001 '**' 0.01 '*' 0.05 '.' 0.1 ' ' 1
-Residual standard error: 4.424 on 177 degrees of freedom
-Multiple R-squared:  0.368, Adjusted R-squared:  0.3609 
-F-statistic: 51.54 on 2 and 177 DF,  p-value: &lt; 2.2e-16</a:t>
+                <a:solidFill>
+                  <a:srgbClr val="4758AB"/>
+                </a:solidFill>
+                <a:latin typeface="Courier"/>
+              </a:rPr>
+              <a:t>set.seed</a:t>
+            </a:r>
+            <a:r>
+              <a:rPr>
+                <a:solidFill>
+                  <a:srgbClr val="003B4F"/>
+                </a:solidFill>
+                <a:latin typeface="Courier"/>
+              </a:rPr>
+              <a:t>(</a:t>
+            </a:r>
+            <a:r>
+              <a:rPr>
+                <a:solidFill>
+                  <a:srgbClr val="AD0000"/>
+                </a:solidFill>
+                <a:latin typeface="Courier"/>
+              </a:rPr>
+              <a:t>222</a:t>
+            </a:r>
+            <a:r>
+              <a:rPr>
+                <a:solidFill>
+                  <a:srgbClr val="003B4F"/>
+                </a:solidFill>
+                <a:latin typeface="Courier"/>
+              </a:rPr>
+              <a:t>)</a:t>
+            </a:r>
+            <a:br/>
+            <a:br/>
+            <a:r>
+              <a:rPr>
+                <a:solidFill>
+                  <a:srgbClr val="003B4F"/>
+                </a:solidFill>
+                <a:latin typeface="Courier"/>
+              </a:rPr>
+              <a:t>boot_means &lt;- </a:t>
+            </a:r>
+            <a:r>
+              <a:rPr>
+                <a:solidFill>
+                  <a:srgbClr val="4758AB"/>
+                </a:solidFill>
+                <a:latin typeface="Courier"/>
+              </a:rPr>
+              <a:t>replicate</a:t>
+            </a:r>
+            <a:r>
+              <a:rPr>
+                <a:solidFill>
+                  <a:srgbClr val="003B4F"/>
+                </a:solidFill>
+                <a:latin typeface="Courier"/>
+              </a:rPr>
+              <a:t>(</a:t>
+            </a:r>
+            <a:r>
+              <a:rPr>
+                <a:solidFill>
+                  <a:srgbClr val="AD0000"/>
+                </a:solidFill>
+                <a:latin typeface="Courier"/>
+              </a:rPr>
+              <a:t>2000</a:t>
+            </a:r>
+            <a:r>
+              <a:rPr>
+                <a:solidFill>
+                  <a:srgbClr val="003B4F"/>
+                </a:solidFill>
+                <a:latin typeface="Courier"/>
+              </a:rPr>
+              <a:t>, {</a:t>
+            </a:r>
+            <a:br/>
+            <a:br/>
+            <a:r>
+              <a:rPr>
+                <a:solidFill>
+                  <a:srgbClr val="003B4F"/>
+                </a:solidFill>
+                <a:latin typeface="Courier"/>
+              </a:rPr>
+              <a:t>  x_star &lt;- </a:t>
+            </a:r>
+            <a:r>
+              <a:rPr>
+                <a:solidFill>
+                  <a:srgbClr val="4758AB"/>
+                </a:solidFill>
+                <a:latin typeface="Courier"/>
+              </a:rPr>
+              <a:t>sample</a:t>
+            </a:r>
+            <a:r>
+              <a:rPr>
+                <a:solidFill>
+                  <a:srgbClr val="003B4F"/>
+                </a:solidFill>
+                <a:latin typeface="Courier"/>
+              </a:rPr>
+              <a:t>(</a:t>
+            </a:r>
+            <a:br/>
+            <a:r>
+              <a:rPr>
+                <a:solidFill>
+                  <a:srgbClr val="003B4F"/>
+                </a:solidFill>
+                <a:latin typeface="Courier"/>
+              </a:rPr>
+              <a:t>    tmb_df</a:t>
+            </a:r>
+            <a:r>
+              <a:rPr>
+                <a:solidFill>
+                  <a:srgbClr val="5E5E5E"/>
+                </a:solidFill>
+                <a:latin typeface="Courier"/>
+              </a:rPr>
+              <a:t>$</a:t>
+            </a:r>
+            <a:r>
+              <a:rPr>
+                <a:solidFill>
+                  <a:srgbClr val="003B4F"/>
+                </a:solidFill>
+                <a:latin typeface="Courier"/>
+              </a:rPr>
+              <a:t>tmb,</a:t>
+            </a:r>
+            <a:br/>
+            <a:r>
+              <a:rPr>
+                <a:solidFill>
+                  <a:srgbClr val="003B4F"/>
+                </a:solidFill>
+                <a:latin typeface="Courier"/>
+              </a:rPr>
+              <a:t>    </a:t>
+            </a:r>
+            <a:r>
+              <a:rPr>
+                <a:solidFill>
+                  <a:srgbClr val="657422"/>
+                </a:solidFill>
+                <a:latin typeface="Courier"/>
+              </a:rPr>
+              <a:t>size =</a:t>
+            </a:r>
+            <a:r>
+              <a:rPr>
+                <a:solidFill>
+                  <a:srgbClr val="003B4F"/>
+                </a:solidFill>
+                <a:latin typeface="Courier"/>
+              </a:rPr>
+              <a:t> </a:t>
+            </a:r>
+            <a:r>
+              <a:rPr>
+                <a:solidFill>
+                  <a:srgbClr val="4758AB"/>
+                </a:solidFill>
+                <a:latin typeface="Courier"/>
+              </a:rPr>
+              <a:t>nrow</a:t>
+            </a:r>
+            <a:r>
+              <a:rPr>
+                <a:solidFill>
+                  <a:srgbClr val="003B4F"/>
+                </a:solidFill>
+                <a:latin typeface="Courier"/>
+              </a:rPr>
+              <a:t>(tmb_df),</a:t>
+            </a:r>
+            <a:br/>
+            <a:r>
+              <a:rPr>
+                <a:solidFill>
+                  <a:srgbClr val="003B4F"/>
+                </a:solidFill>
+                <a:latin typeface="Courier"/>
+              </a:rPr>
+              <a:t>    </a:t>
+            </a:r>
+            <a:r>
+              <a:rPr>
+                <a:solidFill>
+                  <a:srgbClr val="657422"/>
+                </a:solidFill>
+                <a:latin typeface="Courier"/>
+              </a:rPr>
+              <a:t>replace =</a:t>
+            </a:r>
+            <a:r>
+              <a:rPr>
+                <a:solidFill>
+                  <a:srgbClr val="003B4F"/>
+                </a:solidFill>
+                <a:latin typeface="Courier"/>
+              </a:rPr>
+              <a:t> </a:t>
+            </a:r>
+            <a:r>
+              <a:rPr>
+                <a:solidFill>
+                  <a:srgbClr val="8F5902"/>
+                </a:solidFill>
+                <a:latin typeface="Courier"/>
+              </a:rPr>
+              <a:t>TRUE</a:t>
+            </a:r>
+            <a:br/>
+            <a:r>
+              <a:rPr>
+                <a:solidFill>
+                  <a:srgbClr val="003B4F"/>
+                </a:solidFill>
+                <a:latin typeface="Courier"/>
+              </a:rPr>
+              <a:t>  )</a:t>
+            </a:r>
+            <a:br/>
+            <a:br/>
+            <a:r>
+              <a:rPr>
+                <a:solidFill>
+                  <a:srgbClr val="003B4F"/>
+                </a:solidFill>
+                <a:latin typeface="Courier"/>
+              </a:rPr>
+              <a:t>  </a:t>
+            </a:r>
+            <a:r>
+              <a:rPr>
+                <a:solidFill>
+                  <a:srgbClr val="4758AB"/>
+                </a:solidFill>
+                <a:latin typeface="Courier"/>
+              </a:rPr>
+              <a:t>mean</a:t>
+            </a:r>
+            <a:r>
+              <a:rPr>
+                <a:solidFill>
+                  <a:srgbClr val="003B4F"/>
+                </a:solidFill>
+                <a:latin typeface="Courier"/>
+              </a:rPr>
+              <a:t>(x_star)</a:t>
+            </a:r>
+            <a:br/>
+            <a:br/>
+            <a:r>
+              <a:rPr>
+                <a:solidFill>
+                  <a:srgbClr val="003B4F"/>
+                </a:solidFill>
+                <a:latin typeface="Courier"/>
+              </a:rPr>
+              <a:t>})</a:t>
+            </a:r>
+            <a:br/>
+            <a:br/>
+            <a:r>
+              <a:rPr>
+                <a:solidFill>
+                  <a:srgbClr val="4758AB"/>
+                </a:solidFill>
+                <a:latin typeface="Courier"/>
+              </a:rPr>
+              <a:t>head</a:t>
+            </a:r>
+            <a:r>
+              <a:rPr>
+                <a:solidFill>
+                  <a:srgbClr val="003B4F"/>
+                </a:solidFill>
+                <a:latin typeface="Courier"/>
+              </a:rPr>
+              <a:t>(boot_means)</a:t>
+            </a:r>
+          </a:p>
+          <a:p>
+            <a:pPr lvl="0" indent="0">
+              <a:buNone/>
+            </a:pPr>
+            <a:r>
+              <a:rPr>
+                <a:latin typeface="Courier"/>
+              </a:rPr>
+              <a:t>[1] 7.447818 7.735682 7.742182 7.226182 7.382591 8.189727</a:t>
             </a:r>
           </a:p>
           <a:p>
@@ -4684,7 +4848,20 @@
             </a:pPr>
             <a:r>
               <a:rPr b="1"/>
-              <a:t>Interpretation of Treatment Effects</a:t>
+              <a:t>Notes</a:t>
+            </a:r>
+          </a:p>
+          <a:p>
+            <a:pPr lvl="0"/>
+            <a:r>
+              <a:rPr>
+                <a:latin typeface="Courier"/>
+              </a:rPr>
+              <a:t>replicate(2000, { ... })</a:t>
+            </a:r>
+            <a:r>
+              <a:rPr/>
+              <a:t> : repeats the bootstrap procedure 2000 times</a:t>
             </a:r>
           </a:p>
           <a:p>
@@ -4693,21 +4870,28 @@
             </a:pPr>
             <a:r>
               <a:rPr/>
-              <a:t>Low dose: −2.98</a:t>
-            </a:r>
-          </a:p>
-          <a:p>
-            <a:pPr lvl="0"/>
-            <a:r>
-              <a:rPr/>
-              <a:t>IFN-γ is about 3 units lower than the high-dose group</a:t>
-            </a:r>
-          </a:p>
-          <a:p>
-            <a:pPr lvl="0"/>
-            <a:r>
-              <a:rPr/>
-              <a:t>p = 0.000294 → strong evidence this difference is real</a:t>
+              <a:t>Within each iteration:</a:t>
+            </a:r>
+          </a:p>
+          <a:p>
+            <a:pPr lvl="0"/>
+            <a:r>
+              <a:rPr/>
+              <a:t>generate a bootstrap resample of TMB values</a:t>
+            </a:r>
+          </a:p>
+          <a:p>
+            <a:pPr lvl="0"/>
+            <a:r>
+              <a:rPr/>
+              <a:t>compute the sample mean TMB</a:t>
+            </a:r>
+          </a:p>
+          <a:p>
+            <a:pPr lvl="0"/>
+            <a:r>
+              <a:rPr/>
+              <a:t>return the computed value</a:t>
             </a:r>
           </a:p>
           <a:p>
@@ -4716,21 +4900,27 @@
             </a:pPr>
             <a:r>
               <a:rPr/>
-              <a:t>Placebo: −8.11</a:t>
-            </a:r>
-          </a:p>
-          <a:p>
-            <a:pPr lvl="0"/>
-            <a:r>
-              <a:rPr/>
-              <a:t>IFN-γ is about 8 units lower than the high-dose group</a:t>
-            </a:r>
-          </a:p>
-          <a:p>
-            <a:pPr lvl="0"/>
-            <a:r>
-              <a:rPr/>
-              <a:t>p &lt; 2e−16 → strong evidence of a difference between groups</a:t>
+              <a:t>Result:</a:t>
+            </a:r>
+          </a:p>
+          <a:p>
+            <a:pPr lvl="0"/>
+            <a:r>
+              <a:rPr>
+                <a:latin typeface="Courier"/>
+              </a:rPr>
+              <a:t>boot_means</a:t>
+            </a:r>
+            <a:r>
+              <a:rPr/>
+              <a:t> contains 2000 bootstrap estimates</a:t>
+            </a:r>
+          </a:p>
+          <a:p>
+            <a:pPr lvl="0"/>
+            <a:r>
+              <a:rPr/>
+              <a:t>collection approximates the sampling distribution of the mean TMB</a:t>
             </a:r>
           </a:p>
         </p:txBody>
@@ -4777,7 +4967,7 @@
             </a:pPr>
             <a:r>
               <a:rPr/>
-              <a:t>Linear Regression for IFN-gamma</a:t>
+              <a:t>Convert Estimates into a Distribution</a:t>
             </a:r>
           </a:p>
         </p:txBody>
@@ -4797,38 +4987,38 @@
           <a:bodyPr/>
           <a:lstStyle/>
           <a:p>
-            <a:pPr lvl="0" indent="0">
-              <a:buNone/>
-            </a:pPr>
-            <a:r>
-              <a:rPr>
-                <a:latin typeface="Courier"/>
-              </a:rPr>
-              <a:t>
-Call:
-lm(formula = ifng ~ treatment, data = biomarker_df)
-Residuals:
-     Min       1Q   Median       3Q      Max 
--12.9145  -2.7698  -0.5039   3.2670  10.2419 
-Coefficients:
-                  Estimate Std. Error t value Pr(&gt;|t|)    
-(Intercept)        19.5543     0.5711  34.240  &lt; 2e-16 ***
-treatmentLow dose  -2.9835     0.8077  -3.694 0.000294 ***
-treatmentPlacebo   -8.1065     0.8077 -10.037  &lt; 2e-16 ***
----
-Signif. codes:  0 '***' 0.001 '**' 0.01 '*' 0.05 '.' 0.1 ' ' 1
-Residual standard error: 4.424 on 177 degrees of freedom
-Multiple R-squared:  0.368, Adjusted R-squared:  0.3609 
-F-statistic: 51.54 on 2 and 177 DF,  p-value: &lt; 2.2e-16</a:t>
-            </a:r>
-          </a:p>
-          <a:p>
             <a:pPr lvl="0" indent="0" marL="0">
               <a:buNone/>
             </a:pPr>
+          </a:p>
+          <a:p>
+            <a:pPr lvl="0" indent="0" marL="0">
+              <a:buNone/>
+            </a:pPr>
             <a:r>
               <a:rPr b="1"/>
-              <a:t>Interpretation of Treatment Effects</a:t>
+              <a:t>Interpretation</a:t>
+            </a:r>
+          </a:p>
+          <a:p>
+            <a:pPr lvl="0"/>
+            <a:r>
+              <a:rPr/>
+              <a:t>each bar represents bootstrap-estimated mean TMB values</a:t>
+            </a:r>
+          </a:p>
+          <a:p>
+            <a:pPr lvl="0"/>
+            <a:r>
+              <a:rPr/>
+              <a:t>histogram approximates the sampling distribution of the mean</a:t>
+            </a:r>
+          </a:p>
+          <a:p>
+            <a:pPr lvl="0"/>
+            <a:r>
+              <a:rPr/>
+              <a:t>spread reflects sampling variability</a:t>
             </a:r>
           </a:p>
           <a:p>
@@ -4837,7 +5027,14 @@
             </a:pPr>
             <a:r>
               <a:rPr/>
-              <a:t>Suggested dose–response pattern:</a:t>
+              <a:t>Narrow distribution:</a:t>
+            </a:r>
+          </a:p>
+          <a:p>
+            <a:pPr lvl="0"/>
+            <a:r>
+              <a:rPr/>
+              <a:t>mean TMB is relatively stable across resamples</a:t>
             </a:r>
           </a:p>
           <a:p>
@@ -4846,42 +5043,14 @@
             </a:pPr>
             <a:r>
               <a:rPr/>
-              <a:t>Highest IFN-γ response: high-dose treatment Intermediate IFN-γ response: low dose Lowest IFN-γ response: placebo</a:t>
-            </a:r>
-          </a:p>
-          <a:p>
-            <a:pPr lvl="0"/>
-            <a:r>
-              <a:rPr/>
-              <a:t>therapy increases immune activation</a:t>
-            </a:r>
-          </a:p>
-          <a:p>
-            <a:pPr lvl="0"/>
-            <a:r>
-              <a:rPr/>
-              <a:t>magnitude of increase is dose-dependent</a:t>
-            </a:r>
-          </a:p>
-          <a:p>
-            <a:pPr lvl="0"/>
-            <a:r>
-              <a:rPr/>
-              <a:t>intervention is mechanistically active</a:t>
-            </a:r>
-          </a:p>
-          <a:p>
-            <a:pPr lvl="0"/>
-            <a:r>
-              <a:rPr/>
-              <a:t>linear model estimates group-specific mean IFN-γ levels</a:t>
-            </a:r>
-          </a:p>
-          <a:p>
-            <a:pPr lvl="0"/>
-            <a:r>
-              <a:rPr/>
-              <a:t>quantifies differences between treatment groups</a:t>
+              <a:t>Wide distribution:</a:t>
+            </a:r>
+          </a:p>
+          <a:p>
+            <a:pPr lvl="0"/>
+            <a:r>
+              <a:rPr/>
+              <a:t>mean TMB varies more across resampled datasets</a:t>
             </a:r>
           </a:p>
         </p:txBody>
@@ -4928,41 +5097,366 @@
             </a:pPr>
             <a:r>
               <a:rPr/>
-              <a:t>Visualizing Fitted Means from the Linear Model</a:t>
-            </a:r>
-          </a:p>
-        </p:txBody>
-      </p:sp>
-      <p:pic>
-        <p:nvPicPr>
-          <p:cNvPr descr="test_2_082025_pptx_files/figure-pptx/unnamed-chunk-6-1.png" id="0" name="Picture 1"/>
-          <p:cNvPicPr>
-            <a:picLocks noGrp="1" noChangeAspect="1"/>
-          </p:cNvPicPr>
-          <p:nvPr/>
-        </p:nvPicPr>
-        <p:blipFill>
-          <a:blip r:embed="rId2"/>
-          <a:stretch>
-            <a:fillRect/>
-          </a:stretch>
-        </p:blipFill>
-        <p:spPr bwMode="auto">
-          <a:xfrm>
-            <a:off x="1181100" y="1193800"/>
-            <a:ext cx="6781800" cy="3390900"/>
-          </a:xfrm>
-          <a:prstGeom prst="rect">
-            <a:avLst/>
-          </a:prstGeom>
-          <a:noFill/>
-          <a:ln w="9525">
-            <a:noFill/>
-            <a:headEnd/>
-            <a:tailEnd/>
-          </a:ln>
-        </p:spPr>
-      </p:pic>
+              <a:t>Bootstrap for the Median TMB</a:t>
+            </a:r>
+          </a:p>
+        </p:txBody>
+      </p:sp>
+      <p:sp>
+        <p:nvSpPr>
+          <p:cNvPr id="3" name="Content Placeholder 2"/>
+          <p:cNvSpPr>
+            <a:spLocks noGrp="1"/>
+          </p:cNvSpPr>
+          <p:nvPr>
+            <p:ph idx="1"/>
+          </p:nvPr>
+        </p:nvSpPr>
+        <p:spPr/>
+        <p:txBody>
+          <a:bodyPr/>
+          <a:lstStyle/>
+          <a:p>
+            <a:pPr lvl="0" indent="0">
+              <a:buNone/>
+            </a:pPr>
+            <a:r>
+              <a:rPr>
+                <a:solidFill>
+                  <a:srgbClr val="4758AB"/>
+                </a:solidFill>
+                <a:latin typeface="Courier"/>
+              </a:rPr>
+              <a:t>set.seed</a:t>
+            </a:r>
+            <a:r>
+              <a:rPr>
+                <a:solidFill>
+                  <a:srgbClr val="003B4F"/>
+                </a:solidFill>
+                <a:latin typeface="Courier"/>
+              </a:rPr>
+              <a:t>(</a:t>
+            </a:r>
+            <a:r>
+              <a:rPr>
+                <a:solidFill>
+                  <a:srgbClr val="AD0000"/>
+                </a:solidFill>
+                <a:latin typeface="Courier"/>
+              </a:rPr>
+              <a:t>333</a:t>
+            </a:r>
+            <a:r>
+              <a:rPr>
+                <a:solidFill>
+                  <a:srgbClr val="003B4F"/>
+                </a:solidFill>
+                <a:latin typeface="Courier"/>
+              </a:rPr>
+              <a:t>)</a:t>
+            </a:r>
+            <a:br/>
+            <a:br/>
+            <a:r>
+              <a:rPr>
+                <a:solidFill>
+                  <a:srgbClr val="003B4F"/>
+                </a:solidFill>
+                <a:latin typeface="Courier"/>
+              </a:rPr>
+              <a:t>boot_medians &lt;- </a:t>
+            </a:r>
+            <a:r>
+              <a:rPr>
+                <a:solidFill>
+                  <a:srgbClr val="4758AB"/>
+                </a:solidFill>
+                <a:latin typeface="Courier"/>
+              </a:rPr>
+              <a:t>replicate</a:t>
+            </a:r>
+            <a:r>
+              <a:rPr>
+                <a:solidFill>
+                  <a:srgbClr val="003B4F"/>
+                </a:solidFill>
+                <a:latin typeface="Courier"/>
+              </a:rPr>
+              <a:t>(</a:t>
+            </a:r>
+            <a:r>
+              <a:rPr>
+                <a:solidFill>
+                  <a:srgbClr val="AD0000"/>
+                </a:solidFill>
+                <a:latin typeface="Courier"/>
+              </a:rPr>
+              <a:t>2000</a:t>
+            </a:r>
+            <a:r>
+              <a:rPr>
+                <a:solidFill>
+                  <a:srgbClr val="003B4F"/>
+                </a:solidFill>
+                <a:latin typeface="Courier"/>
+              </a:rPr>
+              <a:t>, {</a:t>
+            </a:r>
+            <a:br/>
+            <a:br/>
+            <a:r>
+              <a:rPr>
+                <a:solidFill>
+                  <a:srgbClr val="003B4F"/>
+                </a:solidFill>
+                <a:latin typeface="Courier"/>
+              </a:rPr>
+              <a:t>  x_star &lt;- </a:t>
+            </a:r>
+            <a:r>
+              <a:rPr>
+                <a:solidFill>
+                  <a:srgbClr val="4758AB"/>
+                </a:solidFill>
+                <a:latin typeface="Courier"/>
+              </a:rPr>
+              <a:t>sample</a:t>
+            </a:r>
+            <a:r>
+              <a:rPr>
+                <a:solidFill>
+                  <a:srgbClr val="003B4F"/>
+                </a:solidFill>
+                <a:latin typeface="Courier"/>
+              </a:rPr>
+              <a:t>(</a:t>
+            </a:r>
+            <a:br/>
+            <a:r>
+              <a:rPr>
+                <a:solidFill>
+                  <a:srgbClr val="003B4F"/>
+                </a:solidFill>
+                <a:latin typeface="Courier"/>
+              </a:rPr>
+              <a:t>    tmb_df</a:t>
+            </a:r>
+            <a:r>
+              <a:rPr>
+                <a:solidFill>
+                  <a:srgbClr val="5E5E5E"/>
+                </a:solidFill>
+                <a:latin typeface="Courier"/>
+              </a:rPr>
+              <a:t>$</a:t>
+            </a:r>
+            <a:r>
+              <a:rPr>
+                <a:solidFill>
+                  <a:srgbClr val="003B4F"/>
+                </a:solidFill>
+                <a:latin typeface="Courier"/>
+              </a:rPr>
+              <a:t>tmb,</a:t>
+            </a:r>
+            <a:br/>
+            <a:r>
+              <a:rPr>
+                <a:solidFill>
+                  <a:srgbClr val="003B4F"/>
+                </a:solidFill>
+                <a:latin typeface="Courier"/>
+              </a:rPr>
+              <a:t>    </a:t>
+            </a:r>
+            <a:r>
+              <a:rPr>
+                <a:solidFill>
+                  <a:srgbClr val="657422"/>
+                </a:solidFill>
+                <a:latin typeface="Courier"/>
+              </a:rPr>
+              <a:t>size =</a:t>
+            </a:r>
+            <a:r>
+              <a:rPr>
+                <a:solidFill>
+                  <a:srgbClr val="003B4F"/>
+                </a:solidFill>
+                <a:latin typeface="Courier"/>
+              </a:rPr>
+              <a:t> </a:t>
+            </a:r>
+            <a:r>
+              <a:rPr>
+                <a:solidFill>
+                  <a:srgbClr val="4758AB"/>
+                </a:solidFill>
+                <a:latin typeface="Courier"/>
+              </a:rPr>
+              <a:t>nrow</a:t>
+            </a:r>
+            <a:r>
+              <a:rPr>
+                <a:solidFill>
+                  <a:srgbClr val="003B4F"/>
+                </a:solidFill>
+                <a:latin typeface="Courier"/>
+              </a:rPr>
+              <a:t>(tmb_df),</a:t>
+            </a:r>
+            <a:br/>
+            <a:r>
+              <a:rPr>
+                <a:solidFill>
+                  <a:srgbClr val="003B4F"/>
+                </a:solidFill>
+                <a:latin typeface="Courier"/>
+              </a:rPr>
+              <a:t>    </a:t>
+            </a:r>
+            <a:r>
+              <a:rPr>
+                <a:solidFill>
+                  <a:srgbClr val="657422"/>
+                </a:solidFill>
+                <a:latin typeface="Courier"/>
+              </a:rPr>
+              <a:t>replace =</a:t>
+            </a:r>
+            <a:r>
+              <a:rPr>
+                <a:solidFill>
+                  <a:srgbClr val="003B4F"/>
+                </a:solidFill>
+                <a:latin typeface="Courier"/>
+              </a:rPr>
+              <a:t> </a:t>
+            </a:r>
+            <a:r>
+              <a:rPr>
+                <a:solidFill>
+                  <a:srgbClr val="8F5902"/>
+                </a:solidFill>
+                <a:latin typeface="Courier"/>
+              </a:rPr>
+              <a:t>TRUE</a:t>
+            </a:r>
+            <a:br/>
+            <a:r>
+              <a:rPr>
+                <a:solidFill>
+                  <a:srgbClr val="003B4F"/>
+                </a:solidFill>
+                <a:latin typeface="Courier"/>
+              </a:rPr>
+              <a:t>  )</a:t>
+            </a:r>
+            <a:br/>
+            <a:br/>
+            <a:r>
+              <a:rPr>
+                <a:solidFill>
+                  <a:srgbClr val="003B4F"/>
+                </a:solidFill>
+                <a:latin typeface="Courier"/>
+              </a:rPr>
+              <a:t>  </a:t>
+            </a:r>
+            <a:r>
+              <a:rPr>
+                <a:solidFill>
+                  <a:srgbClr val="4758AB"/>
+                </a:solidFill>
+                <a:latin typeface="Courier"/>
+              </a:rPr>
+              <a:t>median</a:t>
+            </a:r>
+            <a:r>
+              <a:rPr>
+                <a:solidFill>
+                  <a:srgbClr val="003B4F"/>
+                </a:solidFill>
+                <a:latin typeface="Courier"/>
+              </a:rPr>
+              <a:t>(x_star)</a:t>
+            </a:r>
+            <a:br/>
+            <a:br/>
+            <a:r>
+              <a:rPr>
+                <a:solidFill>
+                  <a:srgbClr val="003B4F"/>
+                </a:solidFill>
+                <a:latin typeface="Courier"/>
+              </a:rPr>
+              <a:t>})</a:t>
+            </a:r>
+            <a:br/>
+            <a:br/>
+            <a:r>
+              <a:rPr>
+                <a:solidFill>
+                  <a:srgbClr val="4758AB"/>
+                </a:solidFill>
+                <a:latin typeface="Courier"/>
+              </a:rPr>
+              <a:t>head</a:t>
+            </a:r>
+            <a:r>
+              <a:rPr>
+                <a:solidFill>
+                  <a:srgbClr val="003B4F"/>
+                </a:solidFill>
+                <a:latin typeface="Courier"/>
+              </a:rPr>
+              <a:t>(boot_medians)</a:t>
+            </a:r>
+          </a:p>
+          <a:p>
+            <a:pPr lvl="0" indent="0">
+              <a:buNone/>
+            </a:pPr>
+            <a:r>
+              <a:rPr>
+                <a:latin typeface="Courier"/>
+              </a:rPr>
+              <a:t>[1] 6.515 6.985 7.150 5.970 7.070 6.730</a:t>
+            </a:r>
+          </a:p>
+          <a:p>
+            <a:pPr lvl="0" indent="0" marL="0">
+              <a:buNone/>
+            </a:pPr>
+            <a:r>
+              <a:rPr b="1"/>
+              <a:t>Notes</a:t>
+            </a:r>
+          </a:p>
+          <a:p>
+            <a:pPr lvl="0"/>
+            <a:r>
+              <a:rPr/>
+              <a:t>code repeats the same bootstrap procedure for median</a:t>
+            </a:r>
+          </a:p>
+          <a:p>
+            <a:pPr lvl="0"/>
+            <a:r>
+              <a:rPr/>
+              <a:t>boot_medians contains 2000 bootstrap median TMB estimates</a:t>
+            </a:r>
+          </a:p>
+          <a:p>
+            <a:pPr lvl="0"/>
+            <a:r>
+              <a:rPr/>
+              <a:t>distribution approximates the sampling distribution of the median TMB</a:t>
+            </a:r>
+          </a:p>
+        </p:txBody>
+      </p:sp>
     </p:spTree>
   </p:cSld>
 </p:sld>
@@ -5005,7 +5499,7 @@
             </a:pPr>
             <a:r>
               <a:rPr/>
-              <a:t>Lecture Objectives</a:t>
+              <a:t>Review</a:t>
             </a:r>
           </a:p>
         </p:txBody>
@@ -5025,38 +5519,39 @@
           <a:bodyPr/>
           <a:lstStyle/>
           <a:p>
-            <a:pPr lvl="0"/>
-            <a:r>
-              <a:rPr/>
-              <a:t>define likelihood as a general estimation principle</a:t>
-            </a:r>
-          </a:p>
-          <a:p>
-            <a:pPr lvl="0"/>
-            <a:r>
-              <a:rPr/>
-              <a:t>sample summaries estimate population quantities using only observed group-level data [i.e.: sample means, proportions]</a:t>
-            </a:r>
-          </a:p>
-          <a:p>
-            <a:pPr lvl="0"/>
-            <a:r>
-              <a:rPr/>
-              <a:t>discuss how model-based estimation use statistical models to estimate relationships between variables [i.e.: regression]</a:t>
-            </a:r>
-          </a:p>
-          <a:p>
-            <a:pPr lvl="0"/>
-            <a:r>
-              <a:rPr/>
-              <a:t>high level interpretation of linear and logistic regression output at an introductory level</a:t>
-            </a:r>
-          </a:p>
-          <a:p>
-            <a:pPr lvl="0"/>
-            <a:r>
-              <a:rPr/>
-              <a:t>connect coefficients to clinically meaningful effect measures</a:t>
+            <a:pPr lvl="0" indent="0" marL="0">
+              <a:buNone/>
+            </a:pPr>
+            <a:r>
+              <a:rPr/>
+              <a:t>Previous lectures established what is typically estimated in statistical analysis—defining population quantities and constructing estimators to compare groups [i.e.: mean differences, risk differences, odds ratios]</a:t>
+            </a:r>
+          </a:p>
+          <a:p>
+            <a:pPr lvl="0" indent="0" marL="0">
+              <a:buNone/>
+            </a:pPr>
+            <a:r>
+              <a:rPr/>
+              <a:t>Current lecture focuses on the following:</a:t>
+            </a:r>
+          </a:p>
+          <a:p>
+            <a:pPr lvl="0" indent="0" marL="1270000">
+              <a:buNone/>
+            </a:pPr>
+            <a:r>
+              <a:rPr sz="2000"/>
+              <a:t>Given an estimator and a single observed dataset, how do we quantify its sampling variability when formulas rely on assumptions that may not reflect the observed data?</a:t>
+            </a:r>
+          </a:p>
+          <a:p>
+            <a:pPr lvl="0" indent="0" marL="0">
+              <a:buNone/>
+            </a:pPr>
+            <a:r>
+              <a:rPr/>
+              <a:t>Bootstrap resampling provides a data-driven way to approximate the sampling distribution of an estimator</a:t>
             </a:r>
           </a:p>
         </p:txBody>
@@ -5085,6 +5580,31 @@
       </p:grpSpPr>
       <p:sp>
         <p:nvSpPr>
+          <p:cNvPr id="2" name="Title 1"/>
+          <p:cNvSpPr>
+            <a:spLocks noGrp="1"/>
+          </p:cNvSpPr>
+          <p:nvPr>
+            <p:ph type="title"/>
+          </p:nvPr>
+        </p:nvSpPr>
+        <p:spPr/>
+        <p:txBody>
+          <a:bodyPr/>
+          <a:lstStyle/>
+          <a:p>
+            <a:pPr lvl="0" indent="0" marL="0">
+              <a:buNone/>
+            </a:pPr>
+            <a:r>
+              <a:rPr/>
+              <a:t>Convert Estimates into a Distribution</a:t>
+            </a:r>
+          </a:p>
+        </p:txBody>
+      </p:sp>
+      <p:sp>
+        <p:nvSpPr>
           <p:cNvPr id="3" name="Content Placeholder 2"/>
           <p:cNvSpPr>
             <a:spLocks noGrp="1"/>
@@ -5097,6 +5617,11 @@
         <p:txBody>
           <a:bodyPr/>
           <a:lstStyle/>
+          <a:p>
+            <a:pPr lvl="0" indent="0" marL="0">
+              <a:buNone/>
+            </a:pPr>
+          </a:p>
           <a:p>
             <a:pPr lvl="0" indent="0" marL="0">
               <a:buNone/>
@@ -5110,28 +5635,35 @@
             <a:pPr lvl="0"/>
             <a:r>
               <a:rPr/>
-              <a:t>bar plot showing estimated mean IFN-gamma levels for each treatment group based our linear model</a:t>
-            </a:r>
-          </a:p>
-          <a:p>
-            <a:pPr lvl="0"/>
-            <a:r>
-              <a:rPr/>
-              <a:t>High dose: estimated mean ≈ 19.6 pg/mL [model intercept]</a:t>
-            </a:r>
-          </a:p>
-          <a:p>
-            <a:pPr lvl="0"/>
-            <a:r>
-              <a:rPr/>
-              <a:t>Low dose: estimated group mean difference ≈ 16.6 pg/mL [19.55−2.98=16.57]</a:t>
-            </a:r>
-          </a:p>
-          <a:p>
-            <a:pPr lvl="0"/>
-            <a:r>
-              <a:rPr/>
-              <a:t>Placebo: estimated group mean difference ≈ 11.5 pg/mL [19.55−8.11=11.45]</a:t>
+              <a:t>each bar represents bootstrap-estimated median TMB values</a:t>
+            </a:r>
+          </a:p>
+          <a:p>
+            <a:pPr lvl="0"/>
+            <a:r>
+              <a:rPr/>
+              <a:t>histogram approximates the sampling distribution of the median</a:t>
+            </a:r>
+          </a:p>
+          <a:p>
+            <a:pPr lvl="0"/>
+            <a:r>
+              <a:rPr/>
+              <a:t>spread reflects how much the median changes across resamples</a:t>
+            </a:r>
+          </a:p>
+          <a:p>
+            <a:pPr lvl="0"/>
+            <a:r>
+              <a:rPr/>
+              <a:t>median is less affected by extreme high TMB values</a:t>
+            </a:r>
+          </a:p>
+          <a:p>
+            <a:pPr lvl="0"/>
+            <a:r>
+              <a:rPr/>
+              <a:t>bootstrap helps quantify uncertainty for this robust estimator</a:t>
             </a:r>
           </a:p>
         </p:txBody>
@@ -5178,68 +5710,550 @@
             </a:pPr>
             <a:r>
               <a:rPr/>
-              <a:t>Logistic Regression</a:t>
-            </a:r>
-          </a:p>
-        </p:txBody>
-      </p:sp>
-      <p:sp>
-        <p:nvSpPr>
-          <p:cNvPr id="3" name="Content Placeholder 2"/>
-          <p:cNvSpPr>
-            <a:spLocks noGrp="1"/>
-          </p:cNvSpPr>
-          <p:nvPr>
-            <p:ph idx="1"/>
-          </p:nvPr>
-        </p:nvSpPr>
-        <p:spPr/>
-        <p:txBody>
-          <a:bodyPr/>
-          <a:lstStyle/>
-          <a:p>
-            <a:pPr lvl="0" indent="0" marL="0">
-              <a:buNone/>
-            </a:pPr>
-            <a:r>
-              <a:rPr b="1"/>
-              <a:t>logistic regression</a:t>
-            </a:r>
-            <a:r>
-              <a:rPr/>
-              <a:t> : models how the probability of an event changes across predictors for binary outcomes</a:t>
-            </a:r>
-          </a:p>
-          <a:p>
-            <a:pPr lvl="0"/>
-            <a:r>
-              <a:rPr/>
-              <a:t>estimates and interprets how predictors influence the probability of a binary outcome</a:t>
-            </a:r>
-          </a:p>
-          <a:p>
-            <a:pPr lvl="0"/>
-            <a:r>
-              <a:rPr/>
-              <a:t>models the probability that an event occurs as a function of predictors</a:t>
-            </a:r>
-          </a:p>
-          <a:p>
-            <a:pPr lvl="0"/>
-            <a:r>
-              <a:rPr/>
-              <a:t>model estimates differences in event probability expressed through odds</a:t>
-            </a:r>
-          </a:p>
-          <a:p>
-            <a:pPr lvl="0"/>
-            <a:r>
-              <a:rPr/>
-              <a:t>model provides estimated probabilities for each group and uncertainty through standard errors and confidence intervals</a:t>
-            </a:r>
-          </a:p>
-        </p:txBody>
-      </p:sp>
+              <a:t>Estimating the Bootstrap Standard Error</a:t>
+            </a:r>
+          </a:p>
+        </p:txBody>
+      </p:sp>
+      <mc:AlternateContent xmlns:mc="http://schemas.openxmlformats.org/markup-compatibility/2006">
+        <mc:Choice xmlns:a14="http://schemas.microsoft.com/office/drawing/2010/main" Requires="a14">
+          <p:sp>
+            <p:nvSpPr>
+              <p:cNvPr id="3" name="Content Placeholder 2"/>
+              <p:cNvSpPr>
+                <a:spLocks noGrp="1"/>
+              </p:cNvSpPr>
+              <p:nvPr>
+                <p:ph idx="1"/>
+              </p:nvPr>
+            </p:nvSpPr>
+            <p:spPr/>
+            <p:txBody>
+              <a:bodyPr/>
+              <a:lstStyle/>
+              <a:p>
+                <a:pPr lvl="0" indent="0">
+                  <a:buNone/>
+                </a:pPr>
+                <a:r>
+                  <a:rPr>
+                    <a:solidFill>
+                      <a:srgbClr val="003B4F"/>
+                    </a:solidFill>
+                    <a:latin typeface="Courier"/>
+                  </a:rPr>
+                  <a:t>boot_mean_se &lt;- </a:t>
+                </a:r>
+                <a:r>
+                  <a:rPr>
+                    <a:solidFill>
+                      <a:srgbClr val="4758AB"/>
+                    </a:solidFill>
+                    <a:latin typeface="Courier"/>
+                  </a:rPr>
+                  <a:t>sd</a:t>
+                </a:r>
+                <a:r>
+                  <a:rPr>
+                    <a:solidFill>
+                      <a:srgbClr val="003B4F"/>
+                    </a:solidFill>
+                    <a:latin typeface="Courier"/>
+                  </a:rPr>
+                  <a:t>(boot_means)</a:t>
+                </a:r>
+                <a:br/>
+                <a:r>
+                  <a:rPr>
+                    <a:solidFill>
+                      <a:srgbClr val="003B4F"/>
+                    </a:solidFill>
+                    <a:latin typeface="Courier"/>
+                  </a:rPr>
+                  <a:t>boot_median_se &lt;- </a:t>
+                </a:r>
+                <a:r>
+                  <a:rPr>
+                    <a:solidFill>
+                      <a:srgbClr val="4758AB"/>
+                    </a:solidFill>
+                    <a:latin typeface="Courier"/>
+                  </a:rPr>
+                  <a:t>sd</a:t>
+                </a:r>
+                <a:r>
+                  <a:rPr>
+                    <a:solidFill>
+                      <a:srgbClr val="003B4F"/>
+                    </a:solidFill>
+                    <a:latin typeface="Courier"/>
+                  </a:rPr>
+                  <a:t>(boot_medians)</a:t>
+                </a:r>
+                <a:br/>
+                <a:br/>
+                <a:r>
+                  <a:rPr>
+                    <a:solidFill>
+                      <a:srgbClr val="4758AB"/>
+                    </a:solidFill>
+                    <a:latin typeface="Courier"/>
+                  </a:rPr>
+                  <a:t>tibble</a:t>
+                </a:r>
+                <a:r>
+                  <a:rPr>
+                    <a:solidFill>
+                      <a:srgbClr val="003B4F"/>
+                    </a:solidFill>
+                    <a:latin typeface="Courier"/>
+                  </a:rPr>
+                  <a:t>(</a:t>
+                </a:r>
+                <a:br/>
+                <a:r>
+                  <a:rPr>
+                    <a:solidFill>
+                      <a:srgbClr val="003B4F"/>
+                    </a:solidFill>
+                    <a:latin typeface="Courier"/>
+                  </a:rPr>
+                  <a:t>  </a:t>
+                </a:r>
+                <a:r>
+                  <a:rPr>
+                    <a:solidFill>
+                      <a:srgbClr val="657422"/>
+                    </a:solidFill>
+                    <a:latin typeface="Courier"/>
+                  </a:rPr>
+                  <a:t>estimator =</a:t>
+                </a:r>
+                <a:r>
+                  <a:rPr>
+                    <a:solidFill>
+                      <a:srgbClr val="003B4F"/>
+                    </a:solidFill>
+                    <a:latin typeface="Courier"/>
+                  </a:rPr>
+                  <a:t> </a:t>
+                </a:r>
+                <a:r>
+                  <a:rPr>
+                    <a:solidFill>
+                      <a:srgbClr val="4758AB"/>
+                    </a:solidFill>
+                    <a:latin typeface="Courier"/>
+                  </a:rPr>
+                  <a:t>c</a:t>
+                </a:r>
+                <a:r>
+                  <a:rPr>
+                    <a:solidFill>
+                      <a:srgbClr val="003B4F"/>
+                    </a:solidFill>
+                    <a:latin typeface="Courier"/>
+                  </a:rPr>
+                  <a:t>(</a:t>
+                </a:r>
+                <a:r>
+                  <a:rPr>
+                    <a:solidFill>
+                      <a:srgbClr val="20794D"/>
+                    </a:solidFill>
+                    <a:latin typeface="Courier"/>
+                  </a:rPr>
+                  <a:t>"Mean TMB"</a:t>
+                </a:r>
+                <a:r>
+                  <a:rPr>
+                    <a:solidFill>
+                      <a:srgbClr val="003B4F"/>
+                    </a:solidFill>
+                    <a:latin typeface="Courier"/>
+                  </a:rPr>
+                  <a:t>, </a:t>
+                </a:r>
+                <a:r>
+                  <a:rPr>
+                    <a:solidFill>
+                      <a:srgbClr val="20794D"/>
+                    </a:solidFill>
+                    <a:latin typeface="Courier"/>
+                  </a:rPr>
+                  <a:t>"Median TMB"</a:t>
+                </a:r>
+                <a:r>
+                  <a:rPr>
+                    <a:solidFill>
+                      <a:srgbClr val="003B4F"/>
+                    </a:solidFill>
+                    <a:latin typeface="Courier"/>
+                  </a:rPr>
+                  <a:t>),</a:t>
+                </a:r>
+                <a:br/>
+                <a:r>
+                  <a:rPr>
+                    <a:solidFill>
+                      <a:srgbClr val="003B4F"/>
+                    </a:solidFill>
+                    <a:latin typeface="Courier"/>
+                  </a:rPr>
+                  <a:t>  </a:t>
+                </a:r>
+                <a:r>
+                  <a:rPr>
+                    <a:solidFill>
+                      <a:srgbClr val="657422"/>
+                    </a:solidFill>
+                    <a:latin typeface="Courier"/>
+                  </a:rPr>
+                  <a:t>bootstrap_se =</a:t>
+                </a:r>
+                <a:r>
+                  <a:rPr>
+                    <a:solidFill>
+                      <a:srgbClr val="003B4F"/>
+                    </a:solidFill>
+                    <a:latin typeface="Courier"/>
+                  </a:rPr>
+                  <a:t> </a:t>
+                </a:r>
+                <a:r>
+                  <a:rPr>
+                    <a:solidFill>
+                      <a:srgbClr val="4758AB"/>
+                    </a:solidFill>
+                    <a:latin typeface="Courier"/>
+                  </a:rPr>
+                  <a:t>c</a:t>
+                </a:r>
+                <a:r>
+                  <a:rPr>
+                    <a:solidFill>
+                      <a:srgbClr val="003B4F"/>
+                    </a:solidFill>
+                    <a:latin typeface="Courier"/>
+                  </a:rPr>
+                  <a:t>(boot_mean_se, boot_median_se)</a:t>
+                </a:r>
+                <a:br/>
+                <a:r>
+                  <a:rPr>
+                    <a:solidFill>
+                      <a:srgbClr val="003B4F"/>
+                    </a:solidFill>
+                    <a:latin typeface="Courier"/>
+                  </a:rPr>
+                  <a:t>)</a:t>
+                </a:r>
+              </a:p>
+              <a:p>
+                <a:pPr lvl="0" indent="0">
+                  <a:buNone/>
+                </a:pPr>
+                <a:r>
+                  <a:rPr>
+                    <a:latin typeface="Courier"/>
+                  </a:rPr>
+                  <a:t># A tibble: 2 × 2
+  estimator  bootstrap_se
+  &lt;chr&gt;             &lt;dbl&gt;
+1 Mean TMB          0.310
+2 Median TMB        0.369</a:t>
+                </a:r>
+              </a:p>
+              <a:p>
+                <a:pPr lvl="0"/>
+                <a:r>
+                  <a:rPr/>
+                  <a:t>bootstrap standard error is computed directly from the bootstrap estimates</a:t>
+                </a:r>
+              </a:p>
+              <a:p>
+                <a:pPr lvl="0"/>
+                <a:r>
+                  <a:rPr/>
+                  <a:t>measures how much the estimator varies across repeated resamples</a:t>
+                </a:r>
+              </a:p>
+              <a:p>
+                <a:pPr lvl="0" indent="0" marL="0">
+                  <a:buNone/>
+                </a:pPr>
+                <a14:m>
+                  <m:oMathPara xmlns:m="http://schemas.openxmlformats.org/officeDocument/2006/math">
+                    <m:oMathParaPr>
+                      <m:jc m:val="center"/>
+                    </m:oMathParaPr>
+                    <m:oMath>
+                      <m:r>
+                        <m:t>S</m:t>
+                      </m:r>
+                      <m:sSub>
+                        <m:e>
+                          <m:r>
+                            <m:t>E</m:t>
+                          </m:r>
+                        </m:e>
+                        <m:sub>
+                          <m:r>
+                            <m:rPr>
+                              <m:sty m:val="p"/>
+                            </m:rPr>
+                            <m:t>b</m:t>
+                          </m:r>
+                          <m:r>
+                            <m:rPr>
+                              <m:sty m:val="p"/>
+                            </m:rPr>
+                            <m:t>o</m:t>
+                          </m:r>
+                          <m:r>
+                            <m:rPr>
+                              <m:sty m:val="p"/>
+                            </m:rPr>
+                            <m:t>o</m:t>
+                          </m:r>
+                          <m:r>
+                            <m:rPr>
+                              <m:sty m:val="p"/>
+                            </m:rPr>
+                            <m:t>t</m:t>
+                          </m:r>
+                        </m:sub>
+                      </m:sSub>
+                      <m:r>
+                        <m:rPr>
+                          <m:sty m:val="p"/>
+                        </m:rPr>
+                        <m:t>=</m:t>
+                      </m:r>
+                      <m:rad>
+                        <m:radPr>
+                          <m:degHide m:val="on"/>
+                        </m:radPr>
+                        <m:deg/>
+                        <m:e>
+                          <m:f>
+                            <m:fPr>
+                              <m:type m:val="bar"/>
+                            </m:fPr>
+                            <m:num>
+                              <m:r>
+                                <m:t>1</m:t>
+                              </m:r>
+                            </m:num>
+                            <m:den>
+                              <m:r>
+                                <m:t>B</m:t>
+                              </m:r>
+                              <m:r>
+                                <m:rPr>
+                                  <m:sty m:val="p"/>
+                                </m:rPr>
+                                <m:t>−</m:t>
+                              </m:r>
+                              <m:r>
+                                <m:t>1</m:t>
+                              </m:r>
+                            </m:den>
+                          </m:f>
+                          <m:nary>
+                            <m:naryPr>
+                              <m:chr m:val="∑"/>
+                              <m:limLoc m:val="undOvr"/>
+                              <m:subHide m:val="off"/>
+                              <m:supHide m:val="off"/>
+                            </m:naryPr>
+                            <m:sub>
+                              <m:r>
+                                <m:t>b</m:t>
+                              </m:r>
+                              <m:r>
+                                <m:rPr>
+                                  <m:sty m:val="p"/>
+                                </m:rPr>
+                                <m:t>=</m:t>
+                              </m:r>
+                              <m:r>
+                                <m:t>1</m:t>
+                              </m:r>
+                            </m:sub>
+                            <m:sup>
+                              <m:r>
+                                <m:t>B</m:t>
+                              </m:r>
+                            </m:sup>
+                            <m:e>
+                              <m:sSup>
+                                <m:e>
+                                  <m:d>
+                                    <m:dPr>
+                                      <m:begChr m:val="("/>
+                                      <m:sepChr m:val=""/>
+                                      <m:endChr m:val=")"/>
+                                      <m:grow/>
+                                    </m:dPr>
+                                    <m:e>
+                                      <m:sSubSup>
+                                        <m:e>
+                                          <m:r>
+                                            <m:t>θ</m:t>
+                                          </m:r>
+                                        </m:e>
+                                        <m:sub>
+                                          <m:r>
+                                            <m:t>b</m:t>
+                                          </m:r>
+                                        </m:sub>
+                                        <m:sup>
+                                          <m:r>
+                                            <m:rPr>
+                                              <m:sty m:val="p"/>
+                                            </m:rPr>
+                                            <m:t>*</m:t>
+                                          </m:r>
+                                        </m:sup>
+                                      </m:sSubSup>
+                                      <m:r>
+                                        <m:rPr>
+                                          <m:sty m:val="p"/>
+                                        </m:rPr>
+                                        <m:t>−</m:t>
+                                      </m:r>
+                                      <m:sSup>
+                                        <m:e>
+                                          <m:acc>
+                                            <m:accPr>
+                                              <m:chr m:val="‾"/>
+                                            </m:accPr>
+                                            <m:e>
+                                              <m:r>
+                                                <m:t>θ</m:t>
+                                              </m:r>
+                                            </m:e>
+                                          </m:acc>
+                                        </m:e>
+                                        <m:sup>
+                                          <m:r>
+                                            <m:rPr>
+                                              <m:sty m:val="p"/>
+                                            </m:rPr>
+                                            <m:t>*</m:t>
+                                          </m:r>
+                                        </m:sup>
+                                      </m:sSup>
+                                    </m:e>
+                                  </m:d>
+                                </m:e>
+                                <m:sup>
+                                  <m:r>
+                                    <m:t>2</m:t>
+                                  </m:r>
+                                </m:sup>
+                              </m:sSup>
+                            </m:e>
+                          </m:nary>
+                        </m:e>
+                      </m:rad>
+                    </m:oMath>
+                  </m:oMathPara>
+                </a14:m>
+              </a:p>
+              <a:p>
+                <a:pPr lvl="0" indent="0" marL="0">
+                  <a:buNone/>
+                </a:pPr>
+                <a:r>
+                  <a:rPr/>
+                  <a:t>Where:</a:t>
+                </a:r>
+              </a:p>
+              <a:p>
+                <a:pPr lvl="0"/>
+                <a14:m>
+                  <m:oMath xmlns:m="http://schemas.openxmlformats.org/officeDocument/2006/math">
+                    <m:r>
+                      <m:t>B</m:t>
+                    </m:r>
+                  </m:oMath>
+                </a14:m>
+                <a:r>
+                  <a:rPr/>
+                  <a:t> : number of bootstrap resamples</a:t>
+                </a:r>
+              </a:p>
+              <a:p>
+                <a:pPr lvl="0"/>
+                <a14:m>
+                  <m:oMath xmlns:m="http://schemas.openxmlformats.org/officeDocument/2006/math">
+                    <m:sSub>
+                      <m:e>
+                        <m:acc>
+                          <m:accPr>
+                            <m:chr m:val="̂"/>
+                          </m:accPr>
+                          <m:e>
+                            <m:r>
+                              <m:t>θ</m:t>
+                            </m:r>
+                          </m:e>
+                        </m:acc>
+                      </m:e>
+                      <m:sub>
+                        <m:r>
+                          <m:t>b</m:t>
+                        </m:r>
+                      </m:sub>
+                    </m:sSub>
+                  </m:oMath>
+                </a14:m>
+                <a:r>
+                  <a:rPr/>
+                  <a:t> : estimator from bootstrap sample </a:t>
+                </a:r>
+                <a14:m>
+                  <m:oMath xmlns:m="http://schemas.openxmlformats.org/officeDocument/2006/math">
+                    <m:r>
+                      <m:t>b</m:t>
+                    </m:r>
+                  </m:oMath>
+                </a14:m>
+              </a:p>
+              <a:p>
+                <a:pPr lvl="0"/>
+                <a14:m>
+                  <m:oMath xmlns:m="http://schemas.openxmlformats.org/officeDocument/2006/math">
+                    <m:acc>
+                      <m:accPr>
+                        <m:chr m:val="‾"/>
+                      </m:accPr>
+                      <m:e>
+                        <m:acc>
+                          <m:accPr>
+                            <m:chr m:val="̂"/>
+                          </m:accPr>
+                          <m:e>
+                            <m:r>
+                              <m:t>θ</m:t>
+                            </m:r>
+                          </m:e>
+                        </m:acc>
+                      </m:e>
+                    </m:acc>
+                  </m:oMath>
+                </a14:m>
+                <a:r>
+                  <a:rPr/>
+                  <a:t> : average bootstrap estimate</a:t>
+                </a:r>
+              </a:p>
+            </p:txBody>
+          </p:sp>
+        </mc:Choice>
+      </mc:AlternateContent>
     </p:spTree>
   </p:cSld>
 </p:sld>
@@ -5282,325 +6296,643 @@
             </a:pPr>
             <a:r>
               <a:rPr/>
-              <a:t>Logistic Regression</a:t>
-            </a:r>
-          </a:p>
-        </p:txBody>
-      </p:sp>
-      <mc:AlternateContent xmlns:mc="http://schemas.openxmlformats.org/markup-compatibility/2006">
-        <mc:Choice xmlns:a14="http://schemas.microsoft.com/office/drawing/2010/main" Requires="a14">
-          <p:sp>
-            <p:nvSpPr>
-              <p:cNvPr id="3" name="Content Placeholder 2"/>
-              <p:cNvSpPr>
-                <a:spLocks noGrp="1"/>
-              </p:cNvSpPr>
-              <p:nvPr>
-                <p:ph idx="1"/>
-              </p:nvPr>
-            </p:nvSpPr>
-            <p:spPr/>
-            <p:txBody>
-              <a:bodyPr/>
-              <a:lstStyle/>
-              <a:p>
-                <a:pPr lvl="0" indent="0" marL="0">
-                  <a:buNone/>
-                </a:pPr>
-                <a:r>
-                  <a:rPr/>
-                  <a:t>Model expresses the log-odds of the event as a linear function of the predictors:</a:t>
-                </a:r>
-              </a:p>
-              <a:p>
-                <a:pPr lvl="0" indent="0" marL="0">
-                  <a:buNone/>
-                </a:pPr>
-                <a14:m>
-                  <m:oMathPara xmlns:m="http://schemas.openxmlformats.org/officeDocument/2006/math">
-                    <m:oMathParaPr>
-                      <m:jc m:val="center"/>
-                    </m:oMathParaPr>
-                    <m:oMath>
-                      <m:r>
-                        <m:rPr>
-                          <m:sty m:val="p"/>
-                        </m:rPr>
-                        <m:t>log</m:t>
-                      </m:r>
-                      <m:d>
-                        <m:dPr>
-                          <m:begChr m:val="("/>
-                          <m:sepChr m:val=""/>
-                          <m:endChr m:val=")"/>
-                          <m:grow/>
-                        </m:dPr>
-                        <m:e>
-                          <m:f>
-                            <m:fPr>
-                              <m:type m:val="bar"/>
-                            </m:fPr>
-                            <m:num>
-                              <m:r>
-                                <m:t>p</m:t>
-                              </m:r>
-                            </m:num>
-                            <m:den>
-                              <m:r>
-                                <m:t>1</m:t>
-                              </m:r>
-                              <m:r>
-                                <m:rPr>
-                                  <m:sty m:val="p"/>
-                                </m:rPr>
-                                <m:t>−</m:t>
-                              </m:r>
-                              <m:r>
-                                <m:t>p</m:t>
-                              </m:r>
-                            </m:den>
-                          </m:f>
-                        </m:e>
-                      </m:d>
-                      <m:r>
-                        <m:rPr>
-                          <m:sty m:val="p"/>
-                        </m:rPr>
-                        <m:t>=</m:t>
-                      </m:r>
-                      <m:sSub>
-                        <m:e>
-                          <m:r>
-                            <m:t>β</m:t>
-                          </m:r>
-                        </m:e>
-                        <m:sub>
-                          <m:r>
-                            <m:t>0</m:t>
-                          </m:r>
-                        </m:sub>
-                      </m:sSub>
-                      <m:r>
-                        <m:rPr>
-                          <m:sty m:val="p"/>
-                        </m:rPr>
-                        <m:t>+</m:t>
-                      </m:r>
-                      <m:sSub>
-                        <m:e>
-                          <m:r>
-                            <m:t>β</m:t>
-                          </m:r>
-                        </m:e>
-                        <m:sub>
-                          <m:r>
-                            <m:t>1</m:t>
-                          </m:r>
-                        </m:sub>
-                      </m:sSub>
-                      <m:r>
-                        <m:t>X</m:t>
-                      </m:r>
-                    </m:oMath>
-                  </m:oMathPara>
-                </a14:m>
-              </a:p>
-              <a:p>
-                <a:pPr lvl="0"/>
-                <a:r>
-                  <a:rPr/>
-                  <a:t>formula states that the logarithm of the event odds is modeled as a linear function of the predictors</a:t>
-                </a:r>
-              </a:p>
-              <a:p>
-                <a:pPr lvl="0"/>
-                <a14:m>
-                  <m:oMath xmlns:m="http://schemas.openxmlformats.org/officeDocument/2006/math">
-                    <m:r>
-                      <m:t>p</m:t>
-                    </m:r>
-                  </m:oMath>
-                </a14:m>
-                <a:r>
-                  <a:rPr/>
-                  <a:t> : probability of the event for a given value of </a:t>
-                </a:r>
-                <a14:m>
-                  <m:oMath xmlns:m="http://schemas.openxmlformats.org/officeDocument/2006/math">
-                    <m:r>
-                      <m:t>X</m:t>
-                    </m:r>
-                  </m:oMath>
-                </a14:m>
-              </a:p>
-              <a:p>
-                <a:pPr lvl="1" indent="0" marL="342900">
-                  <a:buNone/>
-                </a:pPr>
-                <a:r>
-                  <a:rPr/>
-                  <a:t>e.x.: probability that a patient responds to treatment [responder vs. non-responder]</a:t>
-                </a:r>
-              </a:p>
-              <a:p>
-                <a:pPr lvl="0"/>
-                <a14:m>
-                  <m:oMath xmlns:m="http://schemas.openxmlformats.org/officeDocument/2006/math">
-                    <m:f>
-                      <m:fPr>
-                        <m:type m:val="bar"/>
-                      </m:fPr>
-                      <m:num>
-                        <m:r>
-                          <m:t>p</m:t>
-                        </m:r>
-                      </m:num>
-                      <m:den>
-                        <m:r>
-                          <m:t>1</m:t>
-                        </m:r>
-                        <m:r>
-                          <m:rPr>
-                            <m:sty m:val="p"/>
-                          </m:rPr>
-                          <m:t>−</m:t>
-                        </m:r>
-                        <m:r>
-                          <m:t>p</m:t>
-                        </m:r>
-                      </m:den>
-                    </m:f>
-                  </m:oMath>
-                </a14:m>
-                <a:r>
-                  <a:rPr/>
-                  <a:t> : compares the probability the event occurs to the probability it does not</a:t>
-                </a:r>
-              </a:p>
-              <a:p>
-                <a:pPr lvl="1" indent="0" marL="342900">
-                  <a:buNone/>
-                </a:pPr>
-                <a:r>
-                  <a:rPr/>
-                  <a:t>how likely the event is to occur relative to non-occurrence</a:t>
-                </a:r>
-              </a:p>
-              <a:p>
-                <a:pPr lvl="0"/>
-                <a14:m>
-                  <m:oMath xmlns:m="http://schemas.openxmlformats.org/officeDocument/2006/math">
-                    <m:r>
-                      <m:rPr>
-                        <m:sty m:val="p"/>
-                      </m:rPr>
-                      <m:t>log</m:t>
-                    </m:r>
-                    <m:d>
-                      <m:dPr>
-                        <m:begChr m:val="("/>
-                        <m:sepChr m:val=""/>
-                        <m:endChr m:val=")"/>
-                        <m:grow/>
-                      </m:dPr>
-                      <m:e>
-                        <m:f>
-                          <m:fPr>
-                            <m:type m:val="bar"/>
-                          </m:fPr>
-                          <m:num>
-                            <m:r>
-                              <m:t>p</m:t>
-                            </m:r>
-                          </m:num>
-                          <m:den>
-                            <m:r>
-                              <m:t>1</m:t>
-                            </m:r>
-                            <m:r>
-                              <m:rPr>
-                                <m:sty m:val="p"/>
-                              </m:rPr>
-                              <m:t>−</m:t>
-                            </m:r>
-                            <m:r>
-                              <m:t>p</m:t>
-                            </m:r>
-                          </m:den>
-                        </m:f>
-                      </m:e>
-                    </m:d>
-                  </m:oMath>
-                </a14:m>
-                <a:r>
-                  <a:rPr/>
-                  <a:t> : log-odds [logit]</a:t>
-                </a:r>
-              </a:p>
-              <a:p>
-                <a:pPr lvl="0"/>
-                <a14:m>
-                  <m:oMath xmlns:m="http://schemas.openxmlformats.org/officeDocument/2006/math">
-                    <m:sSub>
-                      <m:e>
-                        <m:r>
-                          <m:t>β</m:t>
-                        </m:r>
-                      </m:e>
-                      <m:sub>
-                        <m:r>
-                          <m:t>0</m:t>
-                        </m:r>
-                      </m:sub>
-                    </m:sSub>
-                  </m:oMath>
-                </a14:m>
-                <a:r>
-                  <a:rPr/>
-                  <a:t> : intercept</a:t>
-                </a:r>
-              </a:p>
-              <a:p>
-                <a:pPr lvl="0"/>
-                <a14:m>
-                  <m:oMath xmlns:m="http://schemas.openxmlformats.org/officeDocument/2006/math">
-                    <m:sSub>
-                      <m:e>
-                        <m:r>
-                          <m:t>β</m:t>
-                        </m:r>
-                      </m:e>
-                      <m:sub>
-                        <m:r>
-                          <m:t>1</m:t>
-                        </m:r>
-                      </m:sub>
-                    </m:sSub>
-                  </m:oMath>
-                </a14:m>
-                <a:r>
-                  <a:rPr/>
-                  <a:t> : coefficient associated with the predictor</a:t>
-                </a:r>
-              </a:p>
-              <a:p>
-                <a:pPr lvl="0"/>
-                <a14:m>
-                  <m:oMath xmlns:m="http://schemas.openxmlformats.org/officeDocument/2006/math">
-                    <m:r>
-                      <m:t>X</m:t>
-                    </m:r>
-                  </m:oMath>
-                </a14:m>
-                <a:r>
-                  <a:rPr/>
-                  <a:t> : predictor</a:t>
-                </a:r>
-              </a:p>
-            </p:txBody>
-          </p:sp>
-        </mc:Choice>
-      </mc:AlternateContent>
+              <a:t>Bootstrap Confidence Interval</a:t>
+            </a:r>
+          </a:p>
+        </p:txBody>
+      </p:sp>
+      <p:sp>
+        <p:nvSpPr>
+          <p:cNvPr id="3" name="Content Placeholder 2"/>
+          <p:cNvSpPr>
+            <a:spLocks noGrp="1"/>
+          </p:cNvSpPr>
+          <p:nvPr>
+            <p:ph idx="1"/>
+          </p:nvPr>
+        </p:nvSpPr>
+        <p:spPr/>
+        <p:txBody>
+          <a:bodyPr/>
+          <a:lstStyle/>
+          <a:p>
+            <a:pPr lvl="0" indent="0">
+              <a:buNone/>
+            </a:pPr>
+            <a:r>
+              <a:rPr>
+                <a:solidFill>
+                  <a:srgbClr val="003B4F"/>
+                </a:solidFill>
+                <a:latin typeface="Courier"/>
+              </a:rPr>
+              <a:t>mean_ci &lt;- </a:t>
+            </a:r>
+            <a:r>
+              <a:rPr>
+                <a:solidFill>
+                  <a:srgbClr val="4758AB"/>
+                </a:solidFill>
+                <a:latin typeface="Courier"/>
+              </a:rPr>
+              <a:t>quantile</a:t>
+            </a:r>
+            <a:r>
+              <a:rPr>
+                <a:solidFill>
+                  <a:srgbClr val="003B4F"/>
+                </a:solidFill>
+                <a:latin typeface="Courier"/>
+              </a:rPr>
+              <a:t>(</a:t>
+            </a:r>
+            <a:br/>
+            <a:r>
+              <a:rPr>
+                <a:solidFill>
+                  <a:srgbClr val="003B4F"/>
+                </a:solidFill>
+                <a:latin typeface="Courier"/>
+              </a:rPr>
+              <a:t>  boot_means,</a:t>
+            </a:r>
+            <a:br/>
+            <a:r>
+              <a:rPr>
+                <a:solidFill>
+                  <a:srgbClr val="003B4F"/>
+                </a:solidFill>
+                <a:latin typeface="Courier"/>
+              </a:rPr>
+              <a:t>  </a:t>
+            </a:r>
+            <a:r>
+              <a:rPr>
+                <a:solidFill>
+                  <a:srgbClr val="657422"/>
+                </a:solidFill>
+                <a:latin typeface="Courier"/>
+              </a:rPr>
+              <a:t>probs =</a:t>
+            </a:r>
+            <a:r>
+              <a:rPr>
+                <a:solidFill>
+                  <a:srgbClr val="003B4F"/>
+                </a:solidFill>
+                <a:latin typeface="Courier"/>
+              </a:rPr>
+              <a:t> </a:t>
+            </a:r>
+            <a:r>
+              <a:rPr>
+                <a:solidFill>
+                  <a:srgbClr val="4758AB"/>
+                </a:solidFill>
+                <a:latin typeface="Courier"/>
+              </a:rPr>
+              <a:t>c</a:t>
+            </a:r>
+            <a:r>
+              <a:rPr>
+                <a:solidFill>
+                  <a:srgbClr val="003B4F"/>
+                </a:solidFill>
+                <a:latin typeface="Courier"/>
+              </a:rPr>
+              <a:t>(</a:t>
+            </a:r>
+            <a:r>
+              <a:rPr>
+                <a:solidFill>
+                  <a:srgbClr val="AD0000"/>
+                </a:solidFill>
+                <a:latin typeface="Courier"/>
+              </a:rPr>
+              <a:t>0.025</a:t>
+            </a:r>
+            <a:r>
+              <a:rPr>
+                <a:solidFill>
+                  <a:srgbClr val="003B4F"/>
+                </a:solidFill>
+                <a:latin typeface="Courier"/>
+              </a:rPr>
+              <a:t>, </a:t>
+            </a:r>
+            <a:r>
+              <a:rPr>
+                <a:solidFill>
+                  <a:srgbClr val="AD0000"/>
+                </a:solidFill>
+                <a:latin typeface="Courier"/>
+              </a:rPr>
+              <a:t>0.975</a:t>
+            </a:r>
+            <a:r>
+              <a:rPr>
+                <a:solidFill>
+                  <a:srgbClr val="003B4F"/>
+                </a:solidFill>
+                <a:latin typeface="Courier"/>
+              </a:rPr>
+              <a:t>)</a:t>
+            </a:r>
+            <a:br/>
+            <a:r>
+              <a:rPr>
+                <a:solidFill>
+                  <a:srgbClr val="003B4F"/>
+                </a:solidFill>
+                <a:latin typeface="Courier"/>
+              </a:rPr>
+              <a:t>)</a:t>
+            </a:r>
+            <a:br/>
+            <a:br/>
+            <a:r>
+              <a:rPr>
+                <a:solidFill>
+                  <a:srgbClr val="003B4F"/>
+                </a:solidFill>
+                <a:latin typeface="Courier"/>
+              </a:rPr>
+              <a:t>median_ci &lt;- </a:t>
+            </a:r>
+            <a:r>
+              <a:rPr>
+                <a:solidFill>
+                  <a:srgbClr val="4758AB"/>
+                </a:solidFill>
+                <a:latin typeface="Courier"/>
+              </a:rPr>
+              <a:t>quantile</a:t>
+            </a:r>
+            <a:r>
+              <a:rPr>
+                <a:solidFill>
+                  <a:srgbClr val="003B4F"/>
+                </a:solidFill>
+                <a:latin typeface="Courier"/>
+              </a:rPr>
+              <a:t>(</a:t>
+            </a:r>
+            <a:br/>
+            <a:r>
+              <a:rPr>
+                <a:solidFill>
+                  <a:srgbClr val="003B4F"/>
+                </a:solidFill>
+                <a:latin typeface="Courier"/>
+              </a:rPr>
+              <a:t>  boot_medians,</a:t>
+            </a:r>
+            <a:br/>
+            <a:r>
+              <a:rPr>
+                <a:solidFill>
+                  <a:srgbClr val="003B4F"/>
+                </a:solidFill>
+                <a:latin typeface="Courier"/>
+              </a:rPr>
+              <a:t>  </a:t>
+            </a:r>
+            <a:r>
+              <a:rPr>
+                <a:solidFill>
+                  <a:srgbClr val="657422"/>
+                </a:solidFill>
+                <a:latin typeface="Courier"/>
+              </a:rPr>
+              <a:t>probs =</a:t>
+            </a:r>
+            <a:r>
+              <a:rPr>
+                <a:solidFill>
+                  <a:srgbClr val="003B4F"/>
+                </a:solidFill>
+                <a:latin typeface="Courier"/>
+              </a:rPr>
+              <a:t> </a:t>
+            </a:r>
+            <a:r>
+              <a:rPr>
+                <a:solidFill>
+                  <a:srgbClr val="4758AB"/>
+                </a:solidFill>
+                <a:latin typeface="Courier"/>
+              </a:rPr>
+              <a:t>c</a:t>
+            </a:r>
+            <a:r>
+              <a:rPr>
+                <a:solidFill>
+                  <a:srgbClr val="003B4F"/>
+                </a:solidFill>
+                <a:latin typeface="Courier"/>
+              </a:rPr>
+              <a:t>(</a:t>
+            </a:r>
+            <a:r>
+              <a:rPr>
+                <a:solidFill>
+                  <a:srgbClr val="AD0000"/>
+                </a:solidFill>
+                <a:latin typeface="Courier"/>
+              </a:rPr>
+              <a:t>0.025</a:t>
+            </a:r>
+            <a:r>
+              <a:rPr>
+                <a:solidFill>
+                  <a:srgbClr val="003B4F"/>
+                </a:solidFill>
+                <a:latin typeface="Courier"/>
+              </a:rPr>
+              <a:t>, </a:t>
+            </a:r>
+            <a:r>
+              <a:rPr>
+                <a:solidFill>
+                  <a:srgbClr val="AD0000"/>
+                </a:solidFill>
+                <a:latin typeface="Courier"/>
+              </a:rPr>
+              <a:t>0.975</a:t>
+            </a:r>
+            <a:r>
+              <a:rPr>
+                <a:solidFill>
+                  <a:srgbClr val="003B4F"/>
+                </a:solidFill>
+                <a:latin typeface="Courier"/>
+              </a:rPr>
+              <a:t>)</a:t>
+            </a:r>
+            <a:br/>
+            <a:r>
+              <a:rPr>
+                <a:solidFill>
+                  <a:srgbClr val="003B4F"/>
+                </a:solidFill>
+                <a:latin typeface="Courier"/>
+              </a:rPr>
+              <a:t>)</a:t>
+            </a:r>
+            <a:br/>
+            <a:br/>
+            <a:r>
+              <a:rPr>
+                <a:solidFill>
+                  <a:srgbClr val="4758AB"/>
+                </a:solidFill>
+                <a:latin typeface="Courier"/>
+              </a:rPr>
+              <a:t>tibble</a:t>
+            </a:r>
+            <a:r>
+              <a:rPr>
+                <a:solidFill>
+                  <a:srgbClr val="003B4F"/>
+                </a:solidFill>
+                <a:latin typeface="Courier"/>
+              </a:rPr>
+              <a:t>(</a:t>
+            </a:r>
+            <a:br/>
+            <a:r>
+              <a:rPr>
+                <a:solidFill>
+                  <a:srgbClr val="003B4F"/>
+                </a:solidFill>
+                <a:latin typeface="Courier"/>
+              </a:rPr>
+              <a:t>  </a:t>
+            </a:r>
+            <a:r>
+              <a:rPr>
+                <a:solidFill>
+                  <a:srgbClr val="657422"/>
+                </a:solidFill>
+                <a:latin typeface="Courier"/>
+              </a:rPr>
+              <a:t>estimator =</a:t>
+            </a:r>
+            <a:r>
+              <a:rPr>
+                <a:solidFill>
+                  <a:srgbClr val="003B4F"/>
+                </a:solidFill>
+                <a:latin typeface="Courier"/>
+              </a:rPr>
+              <a:t> </a:t>
+            </a:r>
+            <a:r>
+              <a:rPr>
+                <a:solidFill>
+                  <a:srgbClr val="4758AB"/>
+                </a:solidFill>
+                <a:latin typeface="Courier"/>
+              </a:rPr>
+              <a:t>c</a:t>
+            </a:r>
+            <a:r>
+              <a:rPr>
+                <a:solidFill>
+                  <a:srgbClr val="003B4F"/>
+                </a:solidFill>
+                <a:latin typeface="Courier"/>
+              </a:rPr>
+              <a:t>(</a:t>
+            </a:r>
+            <a:r>
+              <a:rPr>
+                <a:solidFill>
+                  <a:srgbClr val="20794D"/>
+                </a:solidFill>
+                <a:latin typeface="Courier"/>
+              </a:rPr>
+              <a:t>"Mean TMB"</a:t>
+            </a:r>
+            <a:r>
+              <a:rPr>
+                <a:solidFill>
+                  <a:srgbClr val="003B4F"/>
+                </a:solidFill>
+                <a:latin typeface="Courier"/>
+              </a:rPr>
+              <a:t>, </a:t>
+            </a:r>
+            <a:r>
+              <a:rPr>
+                <a:solidFill>
+                  <a:srgbClr val="20794D"/>
+                </a:solidFill>
+                <a:latin typeface="Courier"/>
+              </a:rPr>
+              <a:t>"Median TMB"</a:t>
+            </a:r>
+            <a:r>
+              <a:rPr>
+                <a:solidFill>
+                  <a:srgbClr val="003B4F"/>
+                </a:solidFill>
+                <a:latin typeface="Courier"/>
+              </a:rPr>
+              <a:t>),</a:t>
+            </a:r>
+            <a:br/>
+            <a:r>
+              <a:rPr>
+                <a:solidFill>
+                  <a:srgbClr val="003B4F"/>
+                </a:solidFill>
+                <a:latin typeface="Courier"/>
+              </a:rPr>
+              <a:t>  </a:t>
+            </a:r>
+            <a:r>
+              <a:rPr>
+                <a:solidFill>
+                  <a:srgbClr val="657422"/>
+                </a:solidFill>
+                <a:latin typeface="Courier"/>
+              </a:rPr>
+              <a:t>lower_95_ci =</a:t>
+            </a:r>
+            <a:r>
+              <a:rPr>
+                <a:solidFill>
+                  <a:srgbClr val="003B4F"/>
+                </a:solidFill>
+                <a:latin typeface="Courier"/>
+              </a:rPr>
+              <a:t> </a:t>
+            </a:r>
+            <a:r>
+              <a:rPr>
+                <a:solidFill>
+                  <a:srgbClr val="4758AB"/>
+                </a:solidFill>
+                <a:latin typeface="Courier"/>
+              </a:rPr>
+              <a:t>c</a:t>
+            </a:r>
+            <a:r>
+              <a:rPr>
+                <a:solidFill>
+                  <a:srgbClr val="003B4F"/>
+                </a:solidFill>
+                <a:latin typeface="Courier"/>
+              </a:rPr>
+              <a:t>(mean_ci[</a:t>
+            </a:r>
+            <a:r>
+              <a:rPr>
+                <a:solidFill>
+                  <a:srgbClr val="AD0000"/>
+                </a:solidFill>
+                <a:latin typeface="Courier"/>
+              </a:rPr>
+              <a:t>1</a:t>
+            </a:r>
+            <a:r>
+              <a:rPr>
+                <a:solidFill>
+                  <a:srgbClr val="003B4F"/>
+                </a:solidFill>
+                <a:latin typeface="Courier"/>
+              </a:rPr>
+              <a:t>], median_ci[</a:t>
+            </a:r>
+            <a:r>
+              <a:rPr>
+                <a:solidFill>
+                  <a:srgbClr val="AD0000"/>
+                </a:solidFill>
+                <a:latin typeface="Courier"/>
+              </a:rPr>
+              <a:t>1</a:t>
+            </a:r>
+            <a:r>
+              <a:rPr>
+                <a:solidFill>
+                  <a:srgbClr val="003B4F"/>
+                </a:solidFill>
+                <a:latin typeface="Courier"/>
+              </a:rPr>
+              <a:t>]),</a:t>
+            </a:r>
+            <a:br/>
+            <a:r>
+              <a:rPr>
+                <a:solidFill>
+                  <a:srgbClr val="003B4F"/>
+                </a:solidFill>
+                <a:latin typeface="Courier"/>
+              </a:rPr>
+              <a:t>  </a:t>
+            </a:r>
+            <a:r>
+              <a:rPr>
+                <a:solidFill>
+                  <a:srgbClr val="657422"/>
+                </a:solidFill>
+                <a:latin typeface="Courier"/>
+              </a:rPr>
+              <a:t>upper_95_ci =</a:t>
+            </a:r>
+            <a:r>
+              <a:rPr>
+                <a:solidFill>
+                  <a:srgbClr val="003B4F"/>
+                </a:solidFill>
+                <a:latin typeface="Courier"/>
+              </a:rPr>
+              <a:t> </a:t>
+            </a:r>
+            <a:r>
+              <a:rPr>
+                <a:solidFill>
+                  <a:srgbClr val="4758AB"/>
+                </a:solidFill>
+                <a:latin typeface="Courier"/>
+              </a:rPr>
+              <a:t>c</a:t>
+            </a:r>
+            <a:r>
+              <a:rPr>
+                <a:solidFill>
+                  <a:srgbClr val="003B4F"/>
+                </a:solidFill>
+                <a:latin typeface="Courier"/>
+              </a:rPr>
+              <a:t>(mean_ci[</a:t>
+            </a:r>
+            <a:r>
+              <a:rPr>
+                <a:solidFill>
+                  <a:srgbClr val="AD0000"/>
+                </a:solidFill>
+                <a:latin typeface="Courier"/>
+              </a:rPr>
+              <a:t>2</a:t>
+            </a:r>
+            <a:r>
+              <a:rPr>
+                <a:solidFill>
+                  <a:srgbClr val="003B4F"/>
+                </a:solidFill>
+                <a:latin typeface="Courier"/>
+              </a:rPr>
+              <a:t>], median_ci[</a:t>
+            </a:r>
+            <a:r>
+              <a:rPr>
+                <a:solidFill>
+                  <a:srgbClr val="AD0000"/>
+                </a:solidFill>
+                <a:latin typeface="Courier"/>
+              </a:rPr>
+              <a:t>2</a:t>
+            </a:r>
+            <a:r>
+              <a:rPr>
+                <a:solidFill>
+                  <a:srgbClr val="003B4F"/>
+                </a:solidFill>
+                <a:latin typeface="Courier"/>
+              </a:rPr>
+              <a:t>])</a:t>
+            </a:r>
+            <a:br/>
+            <a:r>
+              <a:rPr>
+                <a:solidFill>
+                  <a:srgbClr val="003B4F"/>
+                </a:solidFill>
+                <a:latin typeface="Courier"/>
+              </a:rPr>
+              <a:t>)</a:t>
+            </a:r>
+          </a:p>
+          <a:p>
+            <a:pPr lvl="0" indent="0">
+              <a:buNone/>
+            </a:pPr>
+            <a:r>
+              <a:rPr>
+                <a:latin typeface="Courier"/>
+              </a:rPr>
+              <a:t># A tibble: 2 × 3
+  estimator  lower_95_ci upper_95_ci
+  &lt;chr&gt;            &lt;dbl&gt;       &lt;dbl&gt;
+1 Mean TMB          7.04        8.25
+2 Median TMB        5.93        7.43</a:t>
+            </a:r>
+          </a:p>
+          <a:p>
+            <a:pPr lvl="0" indent="0" marL="0">
+              <a:buNone/>
+            </a:pPr>
+            <a:r>
+              <a:rPr b="1"/>
+              <a:t>Interpretation</a:t>
+            </a:r>
+          </a:p>
+          <a:p>
+            <a:pPr lvl="0"/>
+            <a:r>
+              <a:rPr/>
+              <a:t>confidence intervals contain the middle 95% of estimates generated from repeated bootstrap resampling</a:t>
+            </a:r>
+          </a:p>
+          <a:p>
+            <a:pPr lvl="0" indent="0" marL="0">
+              <a:buNone/>
+            </a:pPr>
+            <a:r>
+              <a:rPr/>
+              <a:t>For a 95% bootstrap confidence interval:</a:t>
+            </a:r>
+          </a:p>
+          <a:p>
+            <a:pPr lvl="0"/>
+            <a:r>
+              <a:rPr/>
+              <a:t>lower bound is the 2.5th percentile of the bootstrap estimates</a:t>
+            </a:r>
+          </a:p>
+          <a:p>
+            <a:pPr lvl="0"/>
+            <a:r>
+              <a:rPr/>
+              <a:t>upper bound is the 97.5th percentile of the bootstrap estimates</a:t>
+            </a:r>
+          </a:p>
+          <a:p>
+            <a:pPr lvl="0"/>
+            <a:r>
+              <a:rPr/>
+              <a:t>each bootstrap estimate represents one possible estimate of population TMB obtained from a resampled version of the observed sequencing dataset</a:t>
+            </a:r>
+          </a:p>
+          <a:p>
+            <a:pPr lvl="0"/>
+            <a:r>
+              <a:rPr/>
+              <a:t>some bootstrap estimates are smaller and some are larger because sampling variability causes estimates to fluctuate across samples</a:t>
+            </a:r>
+          </a:p>
+          <a:p>
+            <a:pPr lvl="0"/>
+            <a:r>
+              <a:rPr/>
+              <a:t>confidence interval summarizes the range of population TMB values that remain plausible given the observed data and the observed variability across resamples</a:t>
+            </a:r>
+          </a:p>
+        </p:txBody>
+      </p:sp>
     </p:spTree>
   </p:cSld>
 </p:sld>
@@ -5643,7 +6975,7 @@
             </a:pPr>
             <a:r>
               <a:rPr/>
-              <a:t>Logistic Regression for Response</a:t>
+              <a:t>Summary</a:t>
             </a:r>
           </a:p>
         </p:txBody>
@@ -5663,58 +6995,82 @@
           <a:bodyPr/>
           <a:lstStyle/>
           <a:p>
+            <a:pPr lvl="0"/>
+            <a:r>
+              <a:rPr/>
+              <a:t>point estimates summarize characteristics of a population using observed sample data</a:t>
+            </a:r>
+          </a:p>
+          <a:p>
+            <a:pPr lvl="0"/>
+            <a:r>
+              <a:rPr/>
+              <a:t>different samples produce different estimates because of sampling variability</a:t>
+            </a:r>
+          </a:p>
+          <a:p>
+            <a:pPr lvl="0"/>
+            <a:r>
+              <a:rPr/>
+              <a:t>bootstrap resampling approximates repeated sampling directly from the observed dataset</a:t>
+            </a:r>
+          </a:p>
+          <a:p>
+            <a:pPr lvl="0"/>
+            <a:r>
+              <a:rPr/>
+              <a:t>bootstrap methods repeatedly:</a:t>
+            </a:r>
+          </a:p>
+          <a:p>
+            <a:pPr lvl="1"/>
+            <a:r>
+              <a:rPr/>
+              <a:t>resample the data with replacement</a:t>
+            </a:r>
+          </a:p>
+          <a:p>
+            <a:pPr lvl="1"/>
+            <a:r>
+              <a:rPr/>
+              <a:t>recompute the estimator</a:t>
+            </a:r>
+          </a:p>
+          <a:p>
+            <a:pPr lvl="1"/>
+            <a:r>
+              <a:rPr/>
+              <a:t>form an empirical sampling distribution</a:t>
+            </a:r>
+          </a:p>
+          <a:p>
             <a:pPr lvl="0" indent="0" marL="0">
               <a:buNone/>
             </a:pPr>
             <a:r>
               <a:rPr/>
-              <a:t>Research Question:</a:t>
-            </a:r>
-          </a:p>
-          <a:p>
-            <a:pPr lvl="0" indent="0" marL="1270000">
-              <a:buNone/>
-            </a:pPr>
-            <a:r>
-              <a:rPr sz="2000"/>
-              <a:t>How does treatment affect the probability of clinical response?</a:t>
-            </a:r>
-          </a:p>
-          <a:p>
-            <a:pPr lvl="0" indent="0" marL="0">
-              <a:buNone/>
-            </a:pPr>
-            <a:r>
-              <a:rPr/>
-              <a:t>Where:</a:t>
-            </a:r>
-          </a:p>
-          <a:p>
-            <a:pPr lvl="0"/>
-            <a:r>
-              <a:rPr/>
-              <a:t>reference group is the high-dose treatment group</a:t>
-            </a:r>
-          </a:p>
-          <a:p>
-            <a:pPr lvl="0"/>
-            <a:r>
-              <a:rPr/>
-              <a:t>model estimates:</a:t>
-            </a:r>
-          </a:p>
-          <a:p>
-            <a:pPr lvl="1"/>
-            <a:r>
-              <a:rPr/>
-              <a:t>baseline log-odds [high dose]</a:t>
-            </a:r>
-          </a:p>
-          <a:p>
-            <a:pPr lvl="1"/>
-            <a:r>
-              <a:rPr/>
-              <a:t>differences in log-odds for low dose and placebo</a:t>
+              <a:t>bootstrap distributions can be used to estimate:</a:t>
+            </a:r>
+          </a:p>
+          <a:p>
+            <a:pPr lvl="0"/>
+            <a:r>
+              <a:rPr/>
+              <a:t>standard errors</a:t>
+            </a:r>
+          </a:p>
+          <a:p>
+            <a:pPr lvl="0"/>
+            <a:r>
+              <a:rPr/>
+              <a:t>confidence intervals</a:t>
+            </a:r>
+          </a:p>
+          <a:p>
+            <a:pPr lvl="0"/>
+            <a:r>
+              <a:rPr/>
+              <a:t>estimator stability</a:t>
             </a:r>
           </a:p>
         </p:txBody>
@@ -5761,7 +7117,7 @@
             </a:pPr>
             <a:r>
               <a:rPr/>
-              <a:t>Logistic Regression for Response</a:t>
+              <a:t>Summary</a:t>
             </a:r>
           </a:p>
         </p:txBody>
@@ -5781,725 +7137,42 @@
           <a:bodyPr/>
           <a:lstStyle/>
           <a:p>
-            <a:pPr lvl="0" indent="0">
-              <a:buNone/>
-            </a:pPr>
-            <a:r>
-              <a:rPr>
-                <a:latin typeface="Courier"/>
-              </a:rPr>
-              <a:t>
-Call:
-glm(formula = response ~ treatment, family = binomial(), data = biomarker_df)
-Coefficients:
-                  Estimate Std. Error z value Pr(&gt;|z|)    
-(Intercept)         0.9280     0.2865   3.239  0.00120 ** 
-treatmentLow dose  -1.1963     0.3872  -3.089  0.00201 ** 
-treatmentPlacebo   -2.0266     0.4135  -4.901 9.52e-07 ***
----
-Signif. codes:  0 '***' 0.001 '**' 0.01 '*' 0.05 '.' 0.1 ' ' 1
-(Dispersion parameter for binomial family taken to be 1)
-    Null deviance: 248.73  on 179  degrees of freedom
-Residual deviance: 221.12  on 177  degrees of freedom
-AIC: 227.12
-Number of Fisher Scoring iterations: 4</a:t>
-            </a:r>
-          </a:p>
-          <a:p>
-            <a:pPr lvl="0" indent="0" marL="0">
-              <a:buNone/>
-            </a:pPr>
-            <a:r>
-              <a:rPr b="1"/>
-              <a:t>Interpretation</a:t>
-            </a:r>
-          </a:p>
-          <a:p>
-            <a:pPr lvl="0" indent="0" marL="0">
-              <a:buNone/>
-            </a:pPr>
-            <a:r>
-              <a:rPr/>
-              <a:t>Intercept [Baseline Probability]</a:t>
-            </a:r>
-          </a:p>
-          <a:p>
-            <a:pPr lvl="0"/>
-            <a:r>
-              <a:rPr/>
-              <a:t>Intercept = 0.928 - log-odds of response in the high-dose group</a:t>
-            </a:r>
-          </a:p>
-          <a:p>
-            <a:pPr lvl="0" indent="0" marL="0">
-              <a:buNone/>
-            </a:pPr>
-            <a:r>
-              <a:rPr/>
-              <a:t>Treatment Effects</a:t>
-            </a:r>
-          </a:p>
-          <a:p>
-            <a:pPr lvl="0"/>
-            <a:r>
-              <a:rPr/>
-              <a:t>treatment coefficients : estimated difference in log-odds of response relative to high dose group</a:t>
-            </a:r>
-          </a:p>
-        </p:txBody>
-      </p:sp>
-    </p:spTree>
-  </p:cSld>
-</p:sld>
-</file>
-
-<file path=ppt/slides/slide25.xml><?xml version="1.0" encoding="utf-8"?>
-<p:sld xmlns:a="http://schemas.openxmlformats.org/drawingml/2006/main" xmlns:r="http://schemas.openxmlformats.org/officeDocument/2006/relationships" xmlns:p="http://schemas.openxmlformats.org/presentationml/2006/main">
-  <p:cSld>
-    <p:spTree>
-      <p:nvGrpSpPr>
-        <p:cNvPr id="1" name=""/>
-        <p:cNvGrpSpPr/>
-        <p:nvPr/>
-      </p:nvGrpSpPr>
-      <p:grpSpPr>
-        <a:xfrm>
-          <a:off x="0" y="0"/>
-          <a:ext cx="0" cy="0"/>
-          <a:chOff x="0" y="0"/>
-          <a:chExt cx="0" cy="0"/>
-        </a:xfrm>
-      </p:grpSpPr>
-      <p:sp>
-        <p:nvSpPr>
-          <p:cNvPr id="2" name="Title 1"/>
-          <p:cNvSpPr>
-            <a:spLocks noGrp="1"/>
-          </p:cNvSpPr>
-          <p:nvPr>
-            <p:ph type="title"/>
-          </p:nvPr>
-        </p:nvSpPr>
-        <p:spPr/>
-        <p:txBody>
-          <a:bodyPr/>
-          <a:lstStyle/>
-          <a:p>
-            <a:pPr lvl="0" indent="0" marL="0">
-              <a:buNone/>
-            </a:pPr>
-            <a:r>
-              <a:rPr/>
-              <a:t>Logistic Regression for Response</a:t>
-            </a:r>
-          </a:p>
-        </p:txBody>
-      </p:sp>
-      <mc:AlternateContent xmlns:mc="http://schemas.openxmlformats.org/markup-compatibility/2006">
-        <mc:Choice xmlns:a14="http://schemas.microsoft.com/office/drawing/2010/main" Requires="a14">
-          <p:sp>
-            <p:nvSpPr>
-              <p:cNvPr id="3" name="Content Placeholder 2"/>
-              <p:cNvSpPr>
-                <a:spLocks noGrp="1"/>
-              </p:cNvSpPr>
-              <p:nvPr>
-                <p:ph idx="1"/>
-              </p:nvPr>
-            </p:nvSpPr>
-            <p:spPr/>
-            <p:txBody>
-              <a:bodyPr/>
-              <a:lstStyle/>
-              <a:p>
-                <a:pPr lvl="0" indent="0" marL="0">
-                  <a:buNone/>
-                </a:pPr>
-                <a:r>
-                  <a:rPr b="1"/>
-                  <a:t>Interpretation</a:t>
-                </a:r>
-              </a:p>
-              <a:p>
-                <a:pPr lvl="0"/>
-                <a:r>
-                  <a:rPr/>
-                  <a:t>model estimates a difference in log-odds</a:t>
-                </a:r>
-              </a:p>
-              <a:p>
-                <a:pPr lvl="0"/>
-                <a:r>
-                  <a:rPr/>
-                  <a:t>exponentiating converts this into an odds ratio</a:t>
-                </a:r>
-              </a:p>
-              <a:p>
-                <a:pPr lvl="0"/>
-                <a:r>
-                  <a:rPr/>
-                  <a:t>odds ratio tells you how many times larger or smaller the odds are in one group compared to a reference group</a:t>
-                </a:r>
-              </a:p>
-              <a:p>
-                <a:pPr lvl="0" indent="0" marL="0">
-                  <a:buNone/>
-                </a:pPr>
-                <a:r>
-                  <a:rPr/>
-                  <a:t>Low Dose vs High Dose</a:t>
-                </a:r>
-              </a:p>
-              <a:p>
-                <a:pPr lvl="0"/>
-                <a:r>
-                  <a:rPr/>
-                  <a:t>estimate = −1.196</a:t>
-                </a:r>
-              </a:p>
-              <a:p>
-                <a:pPr lvl="0"/>
-                <a:r>
-                  <a:rPr/>
-                  <a:t>odds ratio = </a:t>
-                </a:r>
-                <a14:m>
-                  <m:oMath xmlns:m="http://schemas.openxmlformats.org/officeDocument/2006/math">
-                    <m:sSup>
-                      <m:e>
-                        <m:r>
-                          <m:t>e</m:t>
-                        </m:r>
-                      </m:e>
-                      <m:sup>
-                        <m:r>
-                          <m:rPr>
-                            <m:sty m:val="p"/>
-                          </m:rPr>
-                          <m:t>−</m:t>
-                        </m:r>
-                        <m:r>
-                          <m:t>1.196</m:t>
-                        </m:r>
-                      </m:sup>
-                    </m:sSup>
-                  </m:oMath>
-                </a14:m>
-                <a:r>
-                  <a:rPr/>
-                  <a:t> ≈0.30</a:t>
-                </a:r>
-              </a:p>
-              <a:p>
-                <a:pPr lvl="0"/>
-                <a:r>
-                  <a:rPr/>
-                  <a:t>patients on low dose have about 70% lower odds of response compared to high dose</a:t>
-                </a:r>
-              </a:p>
-              <a:p>
-                <a:pPr lvl="0"/>
-                <a:r>
-                  <a:rPr/>
-                  <a:t>p = 0.002 : statistically significant association</a:t>
-                </a:r>
-              </a:p>
-            </p:txBody>
-          </p:sp>
-        </mc:Choice>
-      </mc:AlternateContent>
-    </p:spTree>
-  </p:cSld>
-</p:sld>
-</file>
-
-<file path=ppt/slides/slide26.xml><?xml version="1.0" encoding="utf-8"?>
-<p:sld xmlns:a="http://schemas.openxmlformats.org/drawingml/2006/main" xmlns:r="http://schemas.openxmlformats.org/officeDocument/2006/relationships" xmlns:p="http://schemas.openxmlformats.org/presentationml/2006/main">
-  <p:cSld>
-    <p:spTree>
-      <p:nvGrpSpPr>
-        <p:cNvPr id="1" name=""/>
-        <p:cNvGrpSpPr/>
-        <p:nvPr/>
-      </p:nvGrpSpPr>
-      <p:grpSpPr>
-        <a:xfrm>
-          <a:off x="0" y="0"/>
-          <a:ext cx="0" cy="0"/>
-          <a:chOff x="0" y="0"/>
-          <a:chExt cx="0" cy="0"/>
-        </a:xfrm>
-      </p:grpSpPr>
-      <p:sp>
-        <p:nvSpPr>
-          <p:cNvPr id="2" name="Title 1"/>
-          <p:cNvSpPr>
-            <a:spLocks noGrp="1"/>
-          </p:cNvSpPr>
-          <p:nvPr>
-            <p:ph type="title"/>
-          </p:nvPr>
-        </p:nvSpPr>
-        <p:spPr/>
-        <p:txBody>
-          <a:bodyPr/>
-          <a:lstStyle/>
-          <a:p>
-            <a:pPr lvl="0" indent="0" marL="0">
-              <a:buNone/>
-            </a:pPr>
-            <a:r>
-              <a:rPr/>
-              <a:t>Logistic Regression for Response</a:t>
-            </a:r>
-          </a:p>
-        </p:txBody>
-      </p:sp>
-      <mc:AlternateContent xmlns:mc="http://schemas.openxmlformats.org/markup-compatibility/2006">
-        <mc:Choice xmlns:a14="http://schemas.microsoft.com/office/drawing/2010/main" Requires="a14">
-          <p:sp>
-            <p:nvSpPr>
-              <p:cNvPr id="3" name="Content Placeholder 2"/>
-              <p:cNvSpPr>
-                <a:spLocks noGrp="1"/>
-              </p:cNvSpPr>
-              <p:nvPr>
-                <p:ph idx="1"/>
-              </p:nvPr>
-            </p:nvSpPr>
-            <p:spPr/>
-            <p:txBody>
-              <a:bodyPr/>
-              <a:lstStyle/>
-              <a:p>
-                <a:pPr lvl="0" indent="0" marL="0">
-                  <a:buNone/>
-                </a:pPr>
-                <a:r>
-                  <a:rPr b="1"/>
-                  <a:t>Interpretation</a:t>
-                </a:r>
-              </a:p>
-              <a:p>
-                <a:pPr lvl="0" indent="0" marL="0">
-                  <a:buNone/>
-                </a:pPr>
-                <a:r>
-                  <a:rPr/>
-                  <a:t>Placebo vs High Dose</a:t>
-                </a:r>
-              </a:p>
-              <a:p>
-                <a:pPr lvl="0"/>
-                <a:r>
-                  <a:rPr/>
-                  <a:t>estimate = −2.027</a:t>
-                </a:r>
-              </a:p>
-              <a:p>
-                <a:pPr lvl="0"/>
-                <a:r>
-                  <a:rPr/>
-                  <a:t>odds ratio = </a:t>
-                </a:r>
-                <a14:m>
-                  <m:oMath xmlns:m="http://schemas.openxmlformats.org/officeDocument/2006/math">
-                    <m:sSup>
-                      <m:e>
-                        <m:r>
-                          <m:t>e</m:t>
-                        </m:r>
-                      </m:e>
-                      <m:sup>
-                        <m:r>
-                          <m:rPr>
-                            <m:sty m:val="p"/>
-                          </m:rPr>
-                          <m:t>−</m:t>
-                        </m:r>
-                        <m:r>
-                          <m:t>2.207</m:t>
-                        </m:r>
-                      </m:sup>
-                    </m:sSup>
-                  </m:oMath>
-                </a14:m>
-                <a:r>
-                  <a:rPr/>
-                  <a:t> ≈0.13</a:t>
-                </a:r>
-              </a:p>
-              <a:p>
-                <a:pPr lvl="0"/>
-                <a:r>
-                  <a:rPr/>
-                  <a:t>placebo patients have about 87% lower odds of response compared to high dose</a:t>
-                </a:r>
-              </a:p>
-              <a:p>
-                <a:pPr lvl="0"/>
-                <a:r>
-                  <a:rPr/>
-                  <a:t>p &lt; 0.001 : statistically significant association</a:t>
-                </a:r>
-              </a:p>
-              <a:p>
-                <a:pPr lvl="0" indent="0" marL="0">
-                  <a:buNone/>
-                </a:pPr>
-                <a:r>
-                  <a:rPr/>
-                  <a:t>Note:</a:t>
-                </a:r>
-              </a:p>
-              <a:p>
-                <a:pPr lvl="0"/>
-                <a:r>
-                  <a:rPr/>
-                  <a:t>odds ratio = 1 : equal odds relative to the reference group</a:t>
-                </a:r>
-              </a:p>
-              <a:p>
-                <a:pPr lvl="0"/>
-                <a:r>
-                  <a:rPr/>
-                  <a:t>odds ratio &gt; 1 : higher odds of response than the reference group</a:t>
-                </a:r>
-              </a:p>
-              <a:p>
-                <a:pPr lvl="0"/>
-                <a:r>
-                  <a:rPr/>
-                  <a:t>odds ratio &lt; 1 : lower odds of response than the reference group</a:t>
-                </a:r>
-              </a:p>
-            </p:txBody>
-          </p:sp>
-        </mc:Choice>
-      </mc:AlternateContent>
-    </p:spTree>
-  </p:cSld>
-</p:sld>
-</file>
-
-<file path=ppt/slides/slide27.xml><?xml version="1.0" encoding="utf-8"?>
-<p:sld xmlns:a="http://schemas.openxmlformats.org/drawingml/2006/main" xmlns:r="http://schemas.openxmlformats.org/officeDocument/2006/relationships" xmlns:p="http://schemas.openxmlformats.org/presentationml/2006/main">
-  <p:cSld>
-    <p:spTree>
-      <p:nvGrpSpPr>
-        <p:cNvPr id="1" name=""/>
-        <p:cNvGrpSpPr/>
-        <p:nvPr/>
-      </p:nvGrpSpPr>
-      <p:grpSpPr>
-        <a:xfrm>
-          <a:off x="0" y="0"/>
-          <a:ext cx="0" cy="0"/>
-          <a:chOff x="0" y="0"/>
-          <a:chExt cx="0" cy="0"/>
-        </a:xfrm>
-      </p:grpSpPr>
-      <p:sp>
-        <p:nvSpPr>
-          <p:cNvPr id="2" name="Title 1"/>
-          <p:cNvSpPr>
-            <a:spLocks noGrp="1"/>
-          </p:cNvSpPr>
-          <p:nvPr>
-            <p:ph type="title"/>
-          </p:nvPr>
-        </p:nvSpPr>
-        <p:spPr/>
-        <p:txBody>
-          <a:bodyPr/>
-          <a:lstStyle/>
-          <a:p>
-            <a:pPr lvl="0" indent="0" marL="0">
-              <a:buNone/>
-            </a:pPr>
-            <a:r>
-              <a:rPr/>
-              <a:t>Logistic Regression for Response</a:t>
-            </a:r>
-          </a:p>
-        </p:txBody>
-      </p:sp>
-      <p:sp>
-        <p:nvSpPr>
-          <p:cNvPr id="3" name="Content Placeholder 2"/>
-          <p:cNvSpPr>
-            <a:spLocks noGrp="1"/>
-          </p:cNvSpPr>
-          <p:nvPr>
-            <p:ph idx="1"/>
-          </p:nvPr>
-        </p:nvSpPr>
-        <p:spPr/>
-        <p:txBody>
-          <a:bodyPr/>
-          <a:lstStyle/>
-          <a:p>
-            <a:pPr lvl="0" indent="0" marL="0">
-              <a:buNone/>
-            </a:pPr>
-            <a:r>
-              <a:rPr/>
-              <a:t>Note:</a:t>
-            </a:r>
-          </a:p>
-          <a:p>
-            <a:pPr lvl="0"/>
-            <a:r>
-              <a:rPr/>
-              <a:t>odds ratio = 1 : equal odds relative to the reference group</a:t>
-            </a:r>
-          </a:p>
-          <a:p>
-            <a:pPr lvl="0"/>
-            <a:r>
-              <a:rPr/>
-              <a:t>odds ratio &gt; 1 : higher odds of response than the reference group</a:t>
-            </a:r>
-          </a:p>
-          <a:p>
-            <a:pPr lvl="0"/>
-            <a:r>
-              <a:rPr/>
-              <a:t>odds ratio &lt; 1 : lower odds of response than the reference group</a:t>
-            </a:r>
-          </a:p>
-        </p:txBody>
-      </p:sp>
-    </p:spTree>
-  </p:cSld>
-</p:sld>
-</file>
-
-<file path=ppt/slides/slide28.xml><?xml version="1.0" encoding="utf-8"?>
-<p:sld xmlns:a="http://schemas.openxmlformats.org/drawingml/2006/main" xmlns:r="http://schemas.openxmlformats.org/officeDocument/2006/relationships" xmlns:p="http://schemas.openxmlformats.org/presentationml/2006/main">
-  <p:cSld>
-    <p:spTree>
-      <p:nvGrpSpPr>
-        <p:cNvPr id="1" name=""/>
-        <p:cNvGrpSpPr/>
-        <p:nvPr/>
-      </p:nvGrpSpPr>
-      <p:grpSpPr>
-        <a:xfrm>
-          <a:off x="0" y="0"/>
-          <a:ext cx="0" cy="0"/>
-          <a:chOff x="0" y="0"/>
-          <a:chExt cx="0" cy="0"/>
-        </a:xfrm>
-      </p:grpSpPr>
-      <p:sp>
-        <p:nvSpPr>
-          <p:cNvPr id="2" name="Title 1"/>
-          <p:cNvSpPr>
-            <a:spLocks noGrp="1"/>
-          </p:cNvSpPr>
-          <p:nvPr>
-            <p:ph type="title"/>
-          </p:nvPr>
-        </p:nvSpPr>
-        <p:spPr/>
-        <p:txBody>
-          <a:bodyPr/>
-          <a:lstStyle/>
-          <a:p>
-            <a:pPr lvl="0" indent="0" marL="0">
-              <a:buNone/>
-            </a:pPr>
-            <a:r>
-              <a:rPr/>
-              <a:t>Review: Model-Based Estimation</a:t>
-            </a:r>
-          </a:p>
-        </p:txBody>
-      </p:sp>
-      <p:sp>
-        <p:nvSpPr>
-          <p:cNvPr id="3" name="Content Placeholder 2"/>
-          <p:cNvSpPr>
-            <a:spLocks noGrp="1"/>
-          </p:cNvSpPr>
-          <p:nvPr>
-            <p:ph idx="1"/>
-          </p:nvPr>
-        </p:nvSpPr>
-        <p:spPr/>
-        <p:txBody>
-          <a:bodyPr/>
-          <a:lstStyle/>
-          <a:p>
-            <a:pPr lvl="0" indent="0" marL="0">
-              <a:buNone/>
-            </a:pPr>
-            <a:r>
-              <a:rPr/>
-              <a:t>model-based estimates can:</a:t>
-            </a:r>
-          </a:p>
-          <a:p>
-            <a:pPr lvl="0"/>
-            <a:r>
-              <a:rPr/>
-              <a:t>compare multiple groups at once</a:t>
-            </a:r>
-          </a:p>
-          <a:p>
-            <a:pPr lvl="0"/>
-            <a:r>
-              <a:rPr/>
-              <a:t>adjust for additional predictors</a:t>
-            </a:r>
-          </a:p>
-          <a:p>
-            <a:pPr lvl="0"/>
-            <a:r>
-              <a:rPr/>
-              <a:t>provide fitted values on appropriate scales</a:t>
-            </a:r>
-          </a:p>
-          <a:p>
-            <a:pPr lvl="0"/>
-            <a:r>
-              <a:rPr/>
-              <a:t>estimate interpretable contrasts such as mean differences, odds ratios, and rate ratios</a:t>
-            </a:r>
-          </a:p>
-        </p:txBody>
-      </p:sp>
-    </p:spTree>
-  </p:cSld>
-</p:sld>
-</file>
-
-<file path=ppt/slides/slide29.xml><?xml version="1.0" encoding="utf-8"?>
-<p:sld xmlns:a="http://schemas.openxmlformats.org/drawingml/2006/main" xmlns:r="http://schemas.openxmlformats.org/officeDocument/2006/relationships" xmlns:p="http://schemas.openxmlformats.org/presentationml/2006/main">
-  <p:cSld>
-    <p:spTree>
-      <p:nvGrpSpPr>
-        <p:cNvPr id="1" name=""/>
-        <p:cNvGrpSpPr/>
-        <p:nvPr/>
-      </p:nvGrpSpPr>
-      <p:grpSpPr>
-        <a:xfrm>
-          <a:off x="0" y="0"/>
-          <a:ext cx="0" cy="0"/>
-          <a:chOff x="0" y="0"/>
-          <a:chExt cx="0" cy="0"/>
-        </a:xfrm>
-      </p:grpSpPr>
-      <p:sp>
-        <p:nvSpPr>
-          <p:cNvPr id="2" name="Title 1"/>
-          <p:cNvSpPr>
-            <a:spLocks noGrp="1"/>
-          </p:cNvSpPr>
-          <p:nvPr>
-            <p:ph type="title"/>
-          </p:nvPr>
-        </p:nvSpPr>
-        <p:spPr/>
-        <p:txBody>
-          <a:bodyPr/>
-          <a:lstStyle/>
-          <a:p>
-            <a:pPr lvl="0" indent="0" marL="0">
-              <a:buNone/>
-            </a:pPr>
-            <a:r>
-              <a:rPr/>
-              <a:t>Summary</a:t>
-            </a:r>
-          </a:p>
-        </p:txBody>
-      </p:sp>
-      <mc:AlternateContent xmlns:mc="http://schemas.openxmlformats.org/markup-compatibility/2006">
-        <mc:Choice xmlns:a14="http://schemas.microsoft.com/office/drawing/2010/main" Requires="a14">
-          <p:sp>
-            <p:nvSpPr>
-              <p:cNvPr id="3" name="Content Placeholder 2"/>
-              <p:cNvSpPr>
-                <a:spLocks noGrp="1"/>
-              </p:cNvSpPr>
-              <p:nvPr>
-                <p:ph idx="1"/>
-              </p:nvPr>
-            </p:nvSpPr>
-            <p:spPr/>
-            <p:txBody>
-              <a:bodyPr/>
-              <a:lstStyle/>
-              <a:p>
-                <a:pPr lvl="0"/>
-                <a:r>
-                  <a:rPr/>
-                  <a:t>likelihood evaluates how plausible the observed data are under different parameter values</a:t>
-                </a:r>
-              </a:p>
-              <a:p>
-                <a:pPr lvl="0"/>
-                <a:r>
-                  <a:rPr/>
-                  <a:t>maximum likelihood estimation selects the parameter values that make the observed data most plausible under the model</a:t>
-                </a:r>
-              </a:p>
-              <a:p>
-                <a:pPr lvl="0"/>
-                <a:r>
-                  <a:rPr/>
-                  <a:t>probability models and likelihood to extend estimation from summaries to structured predictor-outcome relationships</a:t>
-                </a:r>
-              </a:p>
-              <a:p>
-                <a:pPr lvl="0"/>
-                <a:r>
-                  <a:rPr/>
-                  <a:t>linear regression models conditional means for continuous outcomes with coefficients representing how the expected population average changes with predictors.</a:t>
-                </a:r>
-              </a:p>
-              <a:p>
-                <a:pPr lvl="0"/>
-                <a:r>
-                  <a:rPr/>
-                  <a:t>logistic regression models log-odds for binary outcomes and yields odds-ratio interpretations after exponentiation</a:t>
-                </a:r>
-              </a:p>
-              <a:p>
-                <a:pPr lvl="0"/>
-                <a:r>
-                  <a:rPr/>
-                  <a:t>exponentiated coefficients give odds ratios </a:t>
-                </a:r>
-                <a14:m>
-                  <m:oMath xmlns:m="http://schemas.openxmlformats.org/officeDocument/2006/math">
-                    <m:r>
-                      <m:rPr>
-                        <m:sty m:val="p"/>
-                      </m:rPr>
-                      <m:t>→</m:t>
-                    </m:r>
-                  </m:oMath>
-                </a14:m>
-                <a:r>
-                  <a:rPr/>
-                  <a:t> quantifying relative changes in outcome likelihood</a:t>
-                </a:r>
-              </a:p>
-              <a:p>
-                <a:pPr lvl="0"/>
-                <a:r>
-                  <a:rPr/>
-                  <a:t>later regression lectures will build on concepts introduced in the current lecture</a:t>
-                </a:r>
-              </a:p>
-            </p:txBody>
-          </p:sp>
-        </mc:Choice>
-      </mc:AlternateContent>
+            <a:pPr lvl="0"/>
+            <a:r>
+              <a:rPr/>
+              <a:t>point estimates summarize characteristics of a population using observed sample datbootstrap confidence intervals summarize the range of population values that remain plausible given the observed data and the variability observed across bootstrap resamples</a:t>
+            </a:r>
+          </a:p>
+          <a:p>
+            <a:pPr lvl="0"/>
+            <a:r>
+              <a:rPr/>
+              <a:t>bootstrap methods are especially useful when:</a:t>
+            </a:r>
+          </a:p>
+          <a:p>
+            <a:pPr lvl="1"/>
+            <a:r>
+              <a:rPr/>
+              <a:t>distributions are skewed</a:t>
+            </a:r>
+          </a:p>
+          <a:p>
+            <a:pPr lvl="1"/>
+            <a:r>
+              <a:rPr/>
+              <a:t>assumptions underlying closed-form methods may be fragile</a:t>
+            </a:r>
+          </a:p>
+          <a:p>
+            <a:pPr lvl="1"/>
+            <a:r>
+              <a:rPr/>
+              <a:t>estimators do not have simple analytic standard error formulas</a:t>
+            </a:r>
+          </a:p>
+        </p:txBody>
+      </p:sp>
     </p:spTree>
   </p:cSld>
 </p:sld>
@@ -6542,7 +7215,7 @@
             </a:pPr>
             <a:r>
               <a:rPr/>
-              <a:t>Transition to Model-Based Estimation</a:t>
+              <a:t>Lecture Overview</a:t>
             </a:r>
           </a:p>
         </p:txBody>
@@ -6562,58 +7235,38 @@
           <a:bodyPr/>
           <a:lstStyle/>
           <a:p>
-            <a:pPr lvl="0" indent="0" marL="0">
-              <a:buNone/>
-            </a:pPr>
-            <a:r>
-              <a:rPr/>
-              <a:t>Previous lectures focused on estimators that describe what is observed in the sample:</a:t>
-            </a:r>
-          </a:p>
-          <a:p>
-            <a:pPr lvl="0"/>
-            <a:r>
-              <a:rPr/>
-              <a:t>sample means → estimate population means</a:t>
-            </a:r>
-          </a:p>
-          <a:p>
-            <a:pPr lvl="0"/>
-            <a:r>
-              <a:rPr/>
-              <a:t>group differences → estimate contrasts between populations</a:t>
-            </a:r>
-          </a:p>
-          <a:p>
-            <a:pPr lvl="0" indent="0" marL="0">
-              <a:buNone/>
-            </a:pPr>
-            <a:r>
-              <a:rPr/>
-              <a:t>Statistical summaries are limited when addressing questions such as:</a:t>
-            </a:r>
-          </a:p>
-          <a:p>
-            <a:pPr lvl="0"/>
-            <a:r>
-              <a:rPr/>
-              <a:t>how outcomes change across multiple predictors</a:t>
-            </a:r>
-          </a:p>
-          <a:p>
-            <a:pPr lvl="0"/>
-            <a:r>
-              <a:rPr/>
-              <a:t>how to handle outcomes with different structures [continuous, binary, counts]</a:t>
-            </a:r>
-          </a:p>
-          <a:p>
-            <a:pPr lvl="0" indent="0" marL="0">
-              <a:buNone/>
-            </a:pPr>
-            <a:r>
-              <a:rPr/>
-              <a:t>Statistical models provide a framework to express how an outcome depends on predictors through unknown parameters that must be estimated</a:t>
+            <a:pPr lvl="0"/>
+            <a:r>
+              <a:rPr/>
+              <a:t>define bootstrap resampling as a method for estimating sampling variability</a:t>
+            </a:r>
+          </a:p>
+          <a:p>
+            <a:pPr lvl="0"/>
+            <a:r>
+              <a:rPr/>
+              <a:t>interpret a bootstrap standard error and bootstrap confidence interval</a:t>
+            </a:r>
+          </a:p>
+          <a:p>
+            <a:pPr lvl="0"/>
+            <a:r>
+              <a:rPr/>
+              <a:t>explain why robust estimators are useful for skewed or outlier-prone biomedical measurements</a:t>
+            </a:r>
+          </a:p>
+          <a:p>
+            <a:pPr lvl="0"/>
+            <a:r>
+              <a:rPr/>
+              <a:t>compare the mean and median as estimators of a typical biomarker value</a:t>
+            </a:r>
+          </a:p>
+          <a:p>
+            <a:pPr lvl="0"/>
+            <a:r>
+              <a:rPr/>
+              <a:t>choose an estimation strategy based on the estimand, data structure, assumptions, and scientific question</a:t>
             </a:r>
           </a:p>
         </p:txBody>
@@ -6660,7 +7313,7 @@
             </a:pPr>
             <a:r>
               <a:rPr/>
-              <a:t>Transition to Model-Based Estimation</a:t>
+              <a:t>Bootstrap: Definition</a:t>
             </a:r>
           </a:p>
         </p:txBody>
@@ -6684,12 +7337,14 @@
               <a:buNone/>
             </a:pPr>
             <a:r>
-              <a:rPr b="1"/>
-              <a:t>Goal</a:t>
-            </a:r>
-            <a:r>
-              <a:rPr/>
-              <a:t>: estimate unknown population quantities using observed data</a:t>
+              <a:rPr>
+                <a:latin typeface="Courier"/>
+              </a:rPr>
+              <a:t>bootstrap</a:t>
+            </a:r>
+            <a:r>
+              <a:rPr/>
+              <a:t>: an approach that approximates the sampling distribution of an estimator by repeatedly resampling from the observed data with replacement</a:t>
             </a:r>
           </a:p>
           <a:p>
@@ -6697,59 +7352,36 @@
               <a:buNone/>
             </a:pPr>
             <a:r>
-              <a:rPr b="1"/>
-              <a:t>Direct estimators</a:t>
-            </a:r>
-          </a:p>
-          <a:p>
-            <a:pPr lvl="0"/>
-            <a:r>
-              <a:rPr/>
-              <a:t>computed from observed data</a:t>
-            </a:r>
-          </a:p>
-          <a:p>
-            <a:pPr lvl="0"/>
-            <a:r>
-              <a:rPr/>
-              <a:t>summarize outcomes within groups</a:t>
-            </a:r>
-          </a:p>
-          <a:p>
-            <a:pPr lvl="0"/>
-            <a:r>
-              <a:rPr/>
-              <a:t>do not account for additional variables</a:t>
-            </a:r>
-          </a:p>
-          <a:p>
-            <a:pPr lvl="0" indent="0" marL="0">
-              <a:buNone/>
-            </a:pPr>
-            <a:r>
-              <a:rPr b="1"/>
-              <a:t>Model-based estimators</a:t>
-            </a:r>
-          </a:p>
-          <a:p>
-            <a:pPr lvl="0"/>
-            <a:r>
-              <a:rPr/>
-              <a:t>specify a relationship between outcome and predictors</a:t>
-            </a:r>
-          </a:p>
-          <a:p>
-            <a:pPr lvl="0"/>
-            <a:r>
-              <a:rPr/>
-              <a:t>estimate unknown parameters that define that relationship</a:t>
-            </a:r>
-          </a:p>
-          <a:p>
-            <a:pPr lvl="0"/>
-            <a:r>
-              <a:rPr/>
-              <a:t>allow adjustment for multiple variables and more complex structures</a:t>
+              <a:rPr/>
+              <a:t>Bootstrap Approach:</a:t>
+            </a:r>
+          </a:p>
+          <a:p>
+            <a:pPr lvl="0"/>
+            <a:r>
+              <a:rPr/>
+              <a:t>treats the observed dataset as a proxy for the population</a:t>
+            </a:r>
+          </a:p>
+          <a:p>
+            <a:pPr lvl="0"/>
+            <a:r>
+              <a:rPr/>
+              <a:t>generates many “new” samples by sampling with replacement</a:t>
+            </a:r>
+          </a:p>
+          <a:p>
+            <a:pPr lvl="0"/>
+            <a:r>
+              <a:rPr/>
+              <a:t>computes the estimator in each resample</a:t>
+            </a:r>
+          </a:p>
+          <a:p>
+            <a:pPr lvl="0"/>
+            <a:r>
+              <a:rPr/>
+              <a:t>uses the resulting distribution to quantify variability</a:t>
             </a:r>
           </a:p>
         </p:txBody>
@@ -6796,7 +7428,7 @@
             </a:pPr>
             <a:r>
               <a:rPr/>
-              <a:t>Model Based Estimation</a:t>
+              <a:t>Bootstrap: Definition</a:t>
             </a:r>
           </a:p>
         </p:txBody>
@@ -6821,7 +7453,28 @@
             </a:pPr>
             <a:r>
               <a:rPr/>
-              <a:t>Model-based estimation:</a:t>
+              <a:t>Goals within statistical estimation include:</a:t>
+            </a:r>
+          </a:p>
+          <a:p>
+            <a:pPr lvl="0"/>
+            <a:r>
+              <a:rPr/>
+              <a:t>how much an estimate varies across samples</a:t>
+            </a:r>
+          </a:p>
+          <a:p>
+            <a:pPr lvl="0"/>
+            <a:r>
+              <a:rPr/>
+              <a:t>how precise the estimate is</a:t>
+            </a:r>
+          </a:p>
+          <a:p>
+            <a:pPr lvl="0"/>
+            <a:r>
+              <a:rPr/>
+              <a:t>what values are plausible for the population</a:t>
             </a:r>
           </a:p>
           <a:p>
@@ -6830,7 +7483,28 @@
             </a:pPr>
             <a:r>
               <a:rPr/>
-              <a:t>approach to estimation that uses a statistical model to describe how the outcome is generated and to estimate unknown parameters</a:t>
+              <a:t>Approaches rely on:</a:t>
+            </a:r>
+          </a:p>
+          <a:p>
+            <a:pPr lvl="0"/>
+            <a:r>
+              <a:rPr/>
+              <a:t>known sampling distributions</a:t>
+            </a:r>
+          </a:p>
+          <a:p>
+            <a:pPr lvl="0"/>
+            <a:r>
+              <a:rPr/>
+              <a:t>analytic standard error formulas</a:t>
+            </a:r>
+          </a:p>
+          <a:p>
+            <a:pPr lvl="0"/>
+            <a:r>
+              <a:rPr/>
+              <a:t>assumptions about the data [i.e.: normality]</a:t>
             </a:r>
           </a:p>
           <a:p>
@@ -6839,60 +7513,21 @@
             </a:pPr>
             <a:r>
               <a:rPr/>
-              <a:t>Key components:</a:t>
-            </a:r>
-          </a:p>
-          <a:p>
-            <a:pPr lvl="0"/>
-            <a:r>
-              <a:rPr b="1"/>
-              <a:t>outcome [Y]</a:t>
-            </a:r>
-            <a:r>
-              <a:rPr/>
-              <a:t>: variable being studied</a:t>
-            </a:r>
-          </a:p>
-          <a:p>
-            <a:pPr lvl="0"/>
-            <a:r>
-              <a:rPr b="1"/>
-              <a:t>predictors [X]</a:t>
-            </a:r>
-            <a:r>
-              <a:rPr/>
-              <a:t>: variables used to explain variation in the outcome</a:t>
-            </a:r>
-          </a:p>
-          <a:p>
-            <a:pPr lvl="0"/>
-            <a:r>
-              <a:rPr b="1"/>
-              <a:t>parameters [β]</a:t>
-            </a:r>
-            <a:r>
-              <a:rPr/>
-              <a:t>: unknown quantities describing the relationship between X and Y</a:t>
-            </a:r>
-          </a:p>
-          <a:p>
-            <a:pPr lvl="0"/>
-            <a:r>
-              <a:rPr b="1"/>
-              <a:t>model</a:t>
-            </a:r>
-            <a:r>
-              <a:rPr/>
-              <a:t>: mathematical expression linking Y to X through β</a:t>
-            </a:r>
-          </a:p>
-          <a:p>
-            <a:pPr lvl="0" indent="0" marL="0">
-              <a:buNone/>
-            </a:pPr>
-            <a:r>
-              <a:rPr/>
-              <a:t>Estimation here means: use observed data to estimate the unknown parameters that define how the outcome depends on the predictors</a:t>
+              <a:t>However in certain cases: assumptions do not align with observed data</a:t>
+            </a:r>
+          </a:p>
+          <a:p>
+            <a:pPr lvl="0"/>
+            <a:r>
+              <a:rPr/>
+              <a:t>closed-form methods for estimating uncertainty rely on assumptions about the data are true in order to estimate sample variability [i.e.: normality and simple variance structure]</a:t>
+            </a:r>
+          </a:p>
+          <a:p>
+            <a:pPr lvl="0"/>
+            <a:r>
+              <a:rPr/>
+              <a:t>bootstrap methods estimate uncertainty by repeatedly resampling the data and observing how the estimate changes</a:t>
             </a:r>
           </a:p>
         </p:txBody>
@@ -6939,7 +7574,7 @@
             </a:pPr>
             <a:r>
               <a:rPr/>
-              <a:t>Likelihood</a:t>
+              <a:t>Overview: Bootstrap Procedure</a:t>
             </a:r>
           </a:p>
         </p:txBody>
@@ -6963,44 +7598,72 @@
               <a:buNone/>
             </a:pPr>
             <a:r>
+              <a:rPr/>
+              <a:t>Given observed data of size n:</a:t>
+            </a:r>
+          </a:p>
+          <a:p>
+            <a:pPr lvl="0" indent="0" marL="0">
+              <a:buNone/>
+            </a:pPr>
+            <a:r>
               <a:rPr b="1"/>
-              <a:t>likelihood</a:t>
-            </a:r>
-            <a:r>
-              <a:rPr/>
-              <a:t> : function of the unknown parameters [i.e.: probability of an event] that describes the probability of the observed data under a specified statistical model</a:t>
-            </a:r>
-          </a:p>
-          <a:p>
-            <a:pPr lvl="0"/>
-            <a:r>
-              <a:rPr/>
-              <a:t>function that expresses how plausible different values of the model parameters are given the observed data</a:t>
-            </a:r>
-          </a:p>
-          <a:p>
-            <a:pPr lvl="0"/>
-            <a:r>
-              <a:rPr/>
-              <a:t>in estimation the goal is to learn about unknown population parameters using observed data</a:t>
-            </a:r>
-          </a:p>
-          <a:p>
-            <a:pPr lvl="1"/>
-            <a:r>
-              <a:rPr/>
-              <a:t>data Y and predictors X are fixed once observed</a:t>
-            </a:r>
-          </a:p>
-          <a:p>
-            <a:pPr lvl="1"/>
-            <a:r>
-              <a:rPr/>
-              <a:t>parameters β are unknown and must be </a:t>
-            </a:r>
+              <a:t>1. Resample with replacement</a:t>
+            </a:r>
+          </a:p>
+          <a:p>
+            <a:pPr lvl="0"/>
+            <a:r>
+              <a:rPr/>
+              <a:t>draw a sample of size n from the original data</a:t>
+            </a:r>
+          </a:p>
+          <a:p>
+            <a:pPr lvl="0" indent="0" marL="0">
+              <a:buNone/>
+            </a:pPr>
             <a:r>
               <a:rPr b="1"/>
-              <a:t>estimated</a:t>
+              <a:t>2. Compute the estimator</a:t>
+            </a:r>
+            <a:r>
+              <a:rPr/>
+              <a:t> - i.e.: mean, median, risk difference</a:t>
+            </a:r>
+          </a:p>
+          <a:p>
+            <a:pPr lvl="0" indent="0" marL="0">
+              <a:buNone/>
+            </a:pPr>
+            <a:r>
+              <a:rPr b="1"/>
+              <a:t>3. Repeat many times</a:t>
+            </a:r>
+            <a:r>
+              <a:rPr/>
+              <a:t> - i.e.: 1,000+ resamples</a:t>
+            </a:r>
+          </a:p>
+          <a:p>
+            <a:pPr lvl="0" indent="0" marL="0">
+              <a:buNone/>
+            </a:pPr>
+            <a:r>
+              <a:rPr b="1"/>
+              <a:t>4. Form the bootstrap distribution</a:t>
+            </a:r>
+            <a:r>
+              <a:rPr/>
+              <a:t> - collection of all computed estimates</a:t>
+            </a:r>
+          </a:p>
+          <a:p>
+            <a:pPr lvl="0" indent="0" marL="0">
+              <a:buNone/>
+            </a:pPr>
+            <a:r>
+              <a:rPr/>
+              <a:t>Resulting distribution approximates the sampling distribution of the estimator</a:t>
             </a:r>
           </a:p>
         </p:txBody>
@@ -7047,234 +7710,96 @@
             </a:pPr>
             <a:r>
               <a:rPr/>
-              <a:t>Likelihood</a:t>
-            </a:r>
-          </a:p>
-        </p:txBody>
-      </p:sp>
-      <mc:AlternateContent xmlns:mc="http://schemas.openxmlformats.org/markup-compatibility/2006">
-        <mc:Choice xmlns:a14="http://schemas.microsoft.com/office/drawing/2010/main" Requires="a14">
-          <p:sp>
-            <p:nvSpPr>
-              <p:cNvPr id="3" name="Content Placeholder 2"/>
-              <p:cNvSpPr>
-                <a:spLocks noGrp="1"/>
-              </p:cNvSpPr>
-              <p:nvPr>
-                <p:ph idx="1"/>
-              </p:nvPr>
-            </p:nvSpPr>
-            <p:spPr/>
-            <p:txBody>
-              <a:bodyPr/>
-              <a:lstStyle/>
-              <a:p>
-                <a:pPr lvl="0" indent="0" marL="0">
-                  <a:buNone/>
-                </a:pPr>
-                <a:r>
-                  <a:rPr/>
-                  <a:t>Likelihood can be expressed as follows:</a:t>
-                </a:r>
-              </a:p>
-              <a:p>
-                <a:pPr lvl="0" indent="0" marL="0">
-                  <a:buNone/>
-                </a:pPr>
-                <a14:m>
-                  <m:oMathPara xmlns:m="http://schemas.openxmlformats.org/officeDocument/2006/math">
-                    <m:oMathParaPr>
-                      <m:jc m:val="center"/>
-                    </m:oMathParaPr>
-                    <m:oMath>
-                      <m:r>
-                        <m:t>L</m:t>
-                      </m:r>
-                      <m:d>
-                        <m:dPr>
-                          <m:begChr m:val="("/>
-                          <m:sepChr m:val=""/>
-                          <m:endChr m:val=")"/>
-                          <m:grow/>
-                        </m:dPr>
-                        <m:e>
-                          <m:r>
-                            <m:t>β</m:t>
-                          </m:r>
-                        </m:e>
-                      </m:d>
-                      <m:r>
-                        <m:rPr>
-                          <m:sty m:val="p"/>
-                        </m:rPr>
-                        <m:t>=</m:t>
-                      </m:r>
-                      <m:r>
-                        <m:t>P</m:t>
-                      </m:r>
-                      <m:d>
-                        <m:dPr>
-                          <m:begChr m:val="("/>
-                          <m:sepChr m:val=""/>
-                          <m:endChr m:val=")"/>
-                          <m:grow/>
-                        </m:dPr>
-                        <m:e>
-                          <m:r>
-                            <m:t>Y</m:t>
-                          </m:r>
-                          <m:r>
-                            <m:rPr>
-                              <m:sty m:val="p"/>
-                            </m:rPr>
-                            <m:t>∣</m:t>
-                          </m:r>
-                          <m:r>
-                            <m:t>X</m:t>
-                          </m:r>
-                          <m:r>
-                            <m:rPr>
-                              <m:sty m:val="p"/>
-                            </m:rPr>
-                            <m:t>,</m:t>
-                          </m:r>
-                          <m:r>
-                            <m:t>β</m:t>
-                          </m:r>
-                        </m:e>
-                      </m:d>
-                    </m:oMath>
-                  </m:oMathPara>
-                </a14:m>
-              </a:p>
-              <a:p>
-                <a:pPr lvl="0" indent="0" marL="0">
-                  <a:buNone/>
-                </a:pPr>
-                <a:r>
-                  <a:rPr/>
-                  <a:t>formula states that the likelihood evaluates how plausible the observed outcomes are under a model with parameters </a:t>
-                </a:r>
-                <a14:m>
-                  <m:oMath xmlns:m="http://schemas.openxmlformats.org/officeDocument/2006/math">
-                    <m:r>
-                      <m:t>β</m:t>
-                    </m:r>
-                  </m:oMath>
-                </a14:m>
-                <a:r>
-                  <a:rPr/>
-                  <a:t> given the observed data</a:t>
-                </a:r>
-              </a:p>
-              <a:p>
-                <a:pPr lvl="0"/>
-                <a14:m>
-                  <m:oMath xmlns:m="http://schemas.openxmlformats.org/officeDocument/2006/math">
-                    <m:r>
-                      <m:t>L</m:t>
-                    </m:r>
-                    <m:d>
-                      <m:dPr>
-                        <m:begChr m:val="("/>
-                        <m:sepChr m:val=""/>
-                        <m:endChr m:val=")"/>
-                        <m:grow/>
-                      </m:dPr>
-                      <m:e>
-                        <m:r>
-                          <m:t>β</m:t>
-                        </m:r>
-                      </m:e>
-                    </m:d>
-                  </m:oMath>
-                </a14:m>
-                <a:r>
-                  <a:rPr/>
-                  <a:t> : likelihood, viewed as a function of the unknown parameters</a:t>
-                </a:r>
-              </a:p>
-              <a:p>
-                <a:pPr lvl="0"/>
-                <a14:m>
-                  <m:oMath xmlns:m="http://schemas.openxmlformats.org/officeDocument/2006/math">
-                    <m:r>
-                      <m:t>Y</m:t>
-                    </m:r>
-                  </m:oMath>
-                </a14:m>
-                <a:r>
-                  <a:rPr/>
-                  <a:t> : set of observed outcomes</a:t>
-                </a:r>
-              </a:p>
-              <a:p>
-                <a:pPr lvl="0"/>
-                <a14:m>
-                  <m:oMath xmlns:m="http://schemas.openxmlformats.org/officeDocument/2006/math">
-                    <m:r>
-                      <m:t>X</m:t>
-                    </m:r>
-                  </m:oMath>
-                </a14:m>
-                <a:r>
-                  <a:rPr/>
-                  <a:t> : set of observed predictors or covariates</a:t>
-                </a:r>
-              </a:p>
-              <a:p>
-                <a:pPr lvl="0"/>
-                <a14:m>
-                  <m:oMath xmlns:m="http://schemas.openxmlformats.org/officeDocument/2006/math">
-                    <m:r>
-                      <m:t>β</m:t>
-                    </m:r>
-                  </m:oMath>
-                </a14:m>
-                <a:r>
-                  <a:rPr/>
-                  <a:t> : collection of unknown model parameters</a:t>
-                </a:r>
-              </a:p>
-              <a:p>
-                <a:pPr lvl="0" indent="0" marL="0">
-                  <a:buNone/>
-                </a:pPr>
-                <a:r>
-                  <a:rPr/>
-                  <a:t>Likelihood estimate quality:</a:t>
-                </a:r>
-              </a:p>
-              <a:p>
-                <a:pPr lvl="0"/>
-                <a:r>
-                  <a:rPr>
-                    <a:latin typeface="Courier"/>
-                  </a:rPr>
-                  <a:t>good estimate</a:t>
-                </a:r>
-                <a:r>
-                  <a:rPr/>
-                  <a:t> : observed data likely under the assumed model</a:t>
-                </a:r>
-              </a:p>
-              <a:p>
-                <a:pPr lvl="0"/>
-                <a:r>
-                  <a:rPr>
-                    <a:latin typeface="Courier"/>
-                  </a:rPr>
-                  <a:t>poor estimate</a:t>
-                </a:r>
-                <a:r>
-                  <a:rPr/>
-                  <a:t> : parameter values under which the observed data would be unlikely</a:t>
-                </a:r>
-              </a:p>
-            </p:txBody>
-          </p:sp>
-        </mc:Choice>
-      </mc:AlternateContent>
+              <a:t>Overview: Bootstrap Procedure</a:t>
+            </a:r>
+          </a:p>
+        </p:txBody>
+      </p:sp>
+      <p:sp>
+        <p:nvSpPr>
+          <p:cNvPr id="3" name="Content Placeholder 2"/>
+          <p:cNvSpPr>
+            <a:spLocks noGrp="1"/>
+          </p:cNvSpPr>
+          <p:nvPr>
+            <p:ph idx="1"/>
+          </p:nvPr>
+        </p:nvSpPr>
+        <p:spPr/>
+        <p:txBody>
+          <a:bodyPr/>
+          <a:lstStyle/>
+          <a:p>
+            <a:pPr lvl="0" indent="0" marL="0">
+              <a:buNone/>
+            </a:pPr>
+            <a:r>
+              <a:rPr/>
+              <a:t>From the bootstrap distribution, we can estimate:</a:t>
+            </a:r>
+          </a:p>
+          <a:p>
+            <a:pPr lvl="0" indent="-342900" marL="342900">
+              <a:buAutoNum type="arabicPeriod"/>
+            </a:pPr>
+            <a:r>
+              <a:rPr b="1"/>
+              <a:t>Standard error</a:t>
+            </a:r>
+            <a:r>
+              <a:rPr/>
+              <a:t>: measures variability across resamples</a:t>
+            </a:r>
+          </a:p>
+          <a:p>
+            <a:pPr lvl="0" indent="-342900" marL="342900">
+              <a:buAutoNum type="arabicPeriod"/>
+            </a:pPr>
+            <a:r>
+              <a:rPr b="1"/>
+              <a:t>Confidence intervals</a:t>
+            </a:r>
+            <a:r>
+              <a:rPr/>
+              <a:t>: provides a plausible range for the population parameter</a:t>
+            </a:r>
+          </a:p>
+          <a:p>
+            <a:pPr lvl="0" indent="-342900" marL="342900">
+              <a:buAutoNum type="arabicPeriod"/>
+            </a:pPr>
+            <a:r>
+              <a:rPr b="1"/>
+              <a:t>Shape of the sampling distribution</a:t>
+            </a:r>
+            <a:r>
+              <a:rPr/>
+              <a:t> :</a:t>
+            </a:r>
+          </a:p>
+          <a:p>
+            <a:pPr lvl="0"/>
+            <a:r>
+              <a:rPr/>
+              <a:t>symmetry vs skewness</a:t>
+            </a:r>
+          </a:p>
+          <a:p>
+            <a:pPr lvl="0"/>
+            <a:r>
+              <a:rPr/>
+              <a:t>sensitivity to outliers</a:t>
+            </a:r>
+          </a:p>
+          <a:p>
+            <a:pPr lvl="0"/>
+            <a:r>
+              <a:rPr/>
+              <a:t>stability of the estimator</a:t>
+            </a:r>
+          </a:p>
+        </p:txBody>
+      </p:sp>
     </p:spTree>
   </p:cSld>
 </p:sld>
@@ -7317,217 +7842,129 @@
             </a:pPr>
             <a:r>
               <a:rPr/>
-              <a:t>Maximum Likelihood Estimation</a:t>
-            </a:r>
-          </a:p>
-        </p:txBody>
-      </p:sp>
-      <mc:AlternateContent xmlns:mc="http://schemas.openxmlformats.org/markup-compatibility/2006">
-        <mc:Choice xmlns:a14="http://schemas.microsoft.com/office/drawing/2010/main" Requires="a14">
-          <p:sp>
-            <p:nvSpPr>
-              <p:cNvPr id="3" name="Content Placeholder 2"/>
-              <p:cNvSpPr>
-                <a:spLocks noGrp="1"/>
-              </p:cNvSpPr>
-              <p:nvPr>
-                <p:ph idx="1"/>
-              </p:nvPr>
-            </p:nvSpPr>
-            <p:spPr/>
-            <p:txBody>
-              <a:bodyPr/>
-              <a:lstStyle/>
-              <a:p>
-                <a:pPr lvl="0" indent="0" marL="0">
-                  <a:buNone/>
-                </a:pPr>
-                <a:r>
-                  <a:rPr b="1"/>
-                  <a:t>maximum likelihood estimation (MLE)</a:t>
-                </a:r>
-                <a:r>
-                  <a:rPr/>
-                  <a:t> : method for estimating unknown model parameters by selecting the values that maximize the likelihood function</a:t>
-                </a:r>
-              </a:p>
-              <a:p>
-                <a:pPr lvl="0"/>
-                <a:r>
-                  <a:rPr/>
-                  <a:t>chooses the parameter values under which the observed data are most plausible</a:t>
-                </a:r>
-              </a:p>
-              <a:p>
-                <a:pPr lvl="0" indent="0" marL="0">
-                  <a:buNone/>
-                </a:pPr>
-                <a:r>
-                  <a:rPr/>
-                  <a:t>MLE Formula:</a:t>
-                </a:r>
-              </a:p>
-              <a:p>
-                <a:pPr lvl="0" indent="0" marL="0">
-                  <a:buNone/>
-                </a:pPr>
-                <a14:m>
-                  <m:oMathPara xmlns:m="http://schemas.openxmlformats.org/officeDocument/2006/math">
-                    <m:oMathParaPr>
-                      <m:jc m:val="center"/>
-                    </m:oMathParaPr>
-                    <m:oMath>
-                      <m:acc>
-                        <m:accPr>
-                          <m:chr m:val="̂"/>
-                        </m:accPr>
-                        <m:e>
-                          <m:r>
-                            <m:t>β</m:t>
-                          </m:r>
-                        </m:e>
-                      </m:acc>
-                      <m:r>
-                        <m:rPr>
-                          <m:sty m:val="p"/>
-                        </m:rPr>
-                        <m:t>=</m:t>
-                      </m:r>
-                      <m:r>
-                        <m:t>a</m:t>
-                      </m:r>
-                      <m:r>
-                        <m:t>r</m:t>
-                      </m:r>
-                      <m:r>
-                        <m:t>g</m:t>
-                      </m:r>
-                      <m:r>
-                        <m:t>m</m:t>
-                      </m:r>
-                      <m:r>
-                        <m:t>a</m:t>
-                      </m:r>
-                      <m:sSub>
-                        <m:e>
-                          <m:r>
-                            <m:t>x</m:t>
-                          </m:r>
-                        </m:e>
-                        <m:sub>
-                          <m:r>
-                            <m:t>β</m:t>
-                          </m:r>
-                        </m:sub>
-                      </m:sSub>
-                      <m:r>
-                        <m:t>L</m:t>
-                      </m:r>
-                      <m:d>
-                        <m:dPr>
-                          <m:begChr m:val="("/>
-                          <m:sepChr m:val=""/>
-                          <m:endChr m:val=")"/>
-                          <m:grow/>
-                        </m:dPr>
-                        <m:e>
-                          <m:r>
-                            <m:t>β</m:t>
-                          </m:r>
-                        </m:e>
-                      </m:d>
-                    </m:oMath>
-                  </m:oMathPara>
-                </a14:m>
-              </a:p>
-              <a:p>
-                <a:pPr lvl="0"/>
-                <a14:m>
-                  <m:oMath xmlns:m="http://schemas.openxmlformats.org/officeDocument/2006/math">
-                    <m:acc>
-                      <m:accPr>
-                        <m:chr m:val="̂"/>
-                      </m:accPr>
-                      <m:e>
-                        <m:r>
-                          <m:t>β</m:t>
-                        </m:r>
-                      </m:e>
-                    </m:acc>
-                  </m:oMath>
-                </a14:m>
-                <a:r>
-                  <a:rPr/>
-                  <a:t> : estimated parameter values</a:t>
-                </a:r>
-                <a:br/>
-              </a:p>
-              <a:p>
-                <a:pPr lvl="0"/>
-                <a14:m>
-                  <m:oMath xmlns:m="http://schemas.openxmlformats.org/officeDocument/2006/math">
-                    <m:r>
-                      <m:t>L</m:t>
-                    </m:r>
-                    <m:d>
-                      <m:dPr>
-                        <m:begChr m:val="("/>
-                        <m:sepChr m:val=""/>
-                        <m:endChr m:val=")"/>
-                        <m:grow/>
-                      </m:dPr>
-                      <m:e>
-                        <m:r>
-                          <m:t>β</m:t>
-                        </m:r>
-                      </m:e>
-                    </m:d>
-                  </m:oMath>
-                </a14:m>
-                <a:r>
-                  <a:rPr/>
-                  <a:t> : likelihood function</a:t>
-                </a:r>
-                <a:br/>
-              </a:p>
-              <a:p>
-                <a:pPr lvl="0"/>
-                <a14:m>
-                  <m:oMath xmlns:m="http://schemas.openxmlformats.org/officeDocument/2006/math">
-                    <m:r>
-                      <m:rPr>
-                        <m:sty m:val="p"/>
-                      </m:rPr>
-                      <m:t>arg</m:t>
-                    </m:r>
-                    <m:r>
-                      <m:rPr>
-                        <m:sty m:val="p"/>
-                      </m:rPr>
-                      <m:t>max</m:t>
-                    </m:r>
-                  </m:oMath>
-                </a14:m>
-                <a:r>
-                  <a:rPr/>
-                  <a:t> : values of </a:t>
-                </a:r>
-                <a14:m>
-                  <m:oMath xmlns:m="http://schemas.openxmlformats.org/officeDocument/2006/math">
-                    <m:r>
-                      <m:t>β</m:t>
-                    </m:r>
-                  </m:oMath>
-                </a14:m>
-                <a:r>
-                  <a:rPr/>
-                  <a:t> that maximize the likelihood</a:t>
-                </a:r>
-              </a:p>
-            </p:txBody>
-          </p:sp>
-        </mc:Choice>
-      </mc:AlternateContent>
+              <a:t>Example: Estimating Typical Tumor Mutation Burden</a:t>
+            </a:r>
+          </a:p>
+        </p:txBody>
+      </p:sp>
+      <p:sp>
+        <p:nvSpPr>
+          <p:cNvPr id="3" name="Content Placeholder 2"/>
+          <p:cNvSpPr>
+            <a:spLocks noGrp="1"/>
+          </p:cNvSpPr>
+          <p:nvPr>
+            <p:ph idx="1"/>
+          </p:nvPr>
+        </p:nvSpPr>
+        <p:spPr/>
+        <p:txBody>
+          <a:bodyPr/>
+          <a:lstStyle/>
+          <a:p>
+            <a:pPr lvl="0" indent="0" marL="0">
+              <a:buNone/>
+            </a:pPr>
+            <a:r>
+              <a:rPr b="1"/>
+              <a:t>Background</a:t>
+            </a:r>
+          </a:p>
+          <a:p>
+            <a:pPr lvl="0" indent="0" marL="0">
+              <a:buNone/>
+            </a:pPr>
+            <a:r>
+              <a:rPr/>
+              <a:t>Investigators are studying tumor genomic profiles from patients with solid tumors.</a:t>
+            </a:r>
+          </a:p>
+          <a:p>
+            <a:pPr lvl="0" indent="0" marL="0">
+              <a:buNone/>
+            </a:pPr>
+            <a:r>
+              <a:rPr/>
+              <a:t>The quantitative genomic measure of interest is tumor mutation burden, or TMB.</a:t>
+            </a:r>
+          </a:p>
+          <a:p>
+            <a:pPr lvl="0" indent="0" marL="0">
+              <a:buNone/>
+            </a:pPr>
+            <a:r>
+              <a:rPr/>
+              <a:t>Tumor mutation burden is the number of somatic mutations observed per megabase of sequenced tumor DNA.</a:t>
+            </a:r>
+          </a:p>
+          <a:p>
+            <a:pPr lvl="0" indent="0" marL="0">
+              <a:buNone/>
+            </a:pPr>
+            <a:r>
+              <a:rPr/>
+              <a:t>TMB provides a summary of how many mutations are present in a tumor genome and is commonly used to describe variation in tumor genomic profiles across patients.</a:t>
+            </a:r>
+          </a:p>
+          <a:p>
+            <a:pPr lvl="0" indent="0" marL="0">
+              <a:buNone/>
+            </a:pPr>
+            <a:r>
+              <a:rPr/>
+              <a:t>In this study, TMB is measured from tumor sequencing data to summarize the mutational profile of the patient cohort.</a:t>
+            </a:r>
+          </a:p>
+          <a:p>
+            <a:pPr lvl="0" indent="0" marL="0">
+              <a:buNone/>
+            </a:pPr>
+            <a:r>
+              <a:rPr/>
+              <a:t>Because TMB values are often right-skewed:</a:t>
+            </a:r>
+          </a:p>
+          <a:p>
+            <a:pPr lvl="0"/>
+            <a:r>
+              <a:rPr/>
+              <a:t>many tumors have low-to-moderate mutation burden</a:t>
+            </a:r>
+          </a:p>
+          <a:p>
+            <a:pPr lvl="0"/>
+            <a:r>
+              <a:rPr/>
+              <a:t>fewer tumors have very high mutation burden</a:t>
+            </a:r>
+          </a:p>
+          <a:p>
+            <a:pPr lvl="0"/>
+            <a:r>
+              <a:rPr/>
+              <a:t>extreme values can pull the mean upward</a:t>
+            </a:r>
+          </a:p>
+          <a:p>
+            <a:pPr lvl="0" indent="0" marL="0">
+              <a:buNone/>
+            </a:pPr>
+            <a:r>
+              <a:rPr/>
+              <a:t>Investigators want to estimate:</a:t>
+            </a:r>
+          </a:p>
+          <a:p>
+            <a:pPr lvl="0" indent="0" marL="1270000">
+              <a:buNone/>
+            </a:pPr>
+            <a:r>
+              <a:rPr sz="2000"/>
+              <a:t>What is a typical tumor mutation burden among patients in this sequencing cohort?</a:t>
+            </a:r>
+          </a:p>
+        </p:txBody>
+      </p:sp>
     </p:spTree>
   </p:cSld>
 </p:sld>
@@ -7570,150 +8007,137 @@
             </a:pPr>
             <a:r>
               <a:rPr/>
-              <a:t>Maximum Likelihood Estimation</a:t>
-            </a:r>
-          </a:p>
-        </p:txBody>
-      </p:sp>
-      <mc:AlternateContent xmlns:mc="http://schemas.openxmlformats.org/markup-compatibility/2006">
-        <mc:Choice xmlns:a14="http://schemas.microsoft.com/office/drawing/2010/main" Requires="a14">
-          <p:sp>
-            <p:nvSpPr>
-              <p:cNvPr id="3" name="Content Placeholder 2"/>
-              <p:cNvSpPr>
-                <a:spLocks noGrp="1"/>
-              </p:cNvSpPr>
-              <p:nvPr>
-                <p:ph idx="1"/>
-              </p:nvPr>
-            </p:nvSpPr>
-            <p:spPr/>
-            <p:txBody>
-              <a:bodyPr/>
-              <a:lstStyle/>
-              <a:p>
-                <a:pPr lvl="0" indent="0" marL="0">
-                  <a:buNone/>
-                </a:pPr>
-                <a:r>
-                  <a:rPr b="1"/>
-                  <a:t>MLE involves</a:t>
-                </a:r>
-                <a:r>
-                  <a:rPr/>
-                  <a:t>:</a:t>
-                </a:r>
-              </a:p>
-              <a:p>
-                <a:pPr lvl="0"/>
-                <a:r>
-                  <a:rPr/>
-                  <a:t>evaluating many possible parameter values</a:t>
-                </a:r>
-              </a:p>
-              <a:p>
-                <a:pPr lvl="0"/>
-                <a:r>
-                  <a:rPr/>
-                  <a:t>selecting the value that best aligns the model with the observed data</a:t>
-                </a:r>
-              </a:p>
-              <a:p>
-                <a:pPr lvl="0"/>
-                <a:r>
-                  <a:rPr/>
-                  <a:t>resulting estimate is the one under which the observed dataset is most consistent with the model</a:t>
-                </a:r>
-              </a:p>
-              <a:p>
-                <a:pPr lvl="0" indent="0" marL="0">
-                  <a:buNone/>
-                </a:pPr>
-                <a:r>
-                  <a:rPr b="1"/>
-                  <a:t>Linking Estimation, Likelihood, and MLE</a:t>
-                </a:r>
-              </a:p>
-              <a:p>
-                <a:pPr lvl="0"/>
-                <a:r>
-                  <a:rPr>
-                    <a:latin typeface="Courier"/>
-                  </a:rPr>
-                  <a:t>estimation</a:t>
-                </a:r>
-                <a:r>
-                  <a:rPr/>
-                  <a:t> : learn about unknown population parameters using observed data</a:t>
-                </a:r>
-              </a:p>
-              <a:p>
-                <a:pPr lvl="0"/>
-                <a:r>
-                  <a:rPr>
-                    <a:latin typeface="Courier"/>
-                  </a:rPr>
-                  <a:t>likelihood</a:t>
-                </a:r>
-                <a:r>
-                  <a:rPr/>
-                  <a:t> : approach for evaluating how well different parameter values explain the observed data</a:t>
-                </a:r>
-              </a:p>
-              <a:p>
-                <a:pPr lvl="0"/>
-                <a:r>
-                  <a:rPr>
-                    <a:latin typeface="Courier"/>
-                  </a:rPr>
-                  <a:t>MLE</a:t>
-                </a:r>
-                <a:r>
-                  <a:rPr/>
-                  <a:t> : method that selects the parameter values that maximize the likelihood function </a:t>
-                </a:r>
-                <a14:m>
-                  <m:oMath xmlns:m="http://schemas.openxmlformats.org/officeDocument/2006/math">
-                    <m:r>
-                      <m:rPr>
-                        <m:sty m:val="p"/>
-                      </m:rPr>
-                      <m:t>→</m:t>
-                    </m:r>
-                  </m:oMath>
-                </a14:m>
-                <a:r>
-                  <a:rPr/>
-                  <a:t> yields the estimate most consistent with the observed data</a:t>
-                </a:r>
-              </a:p>
-              <a:p>
-                <a:pPr lvl="0" indent="0" marL="0">
-                  <a:buNone/>
-                </a:pPr>
-                <a:r>
-                  <a:rPr/>
-                  <a:t>MLE provides a general framework for estimation across models such as:</a:t>
-                </a:r>
-              </a:p>
-              <a:p>
-                <a:pPr lvl="0"/>
-                <a:r>
-                  <a:rPr/>
-                  <a:t>linear regression</a:t>
-                </a:r>
-              </a:p>
-              <a:p>
-                <a:pPr lvl="0"/>
-                <a:r>
-                  <a:rPr/>
-                  <a:t>logistic regression</a:t>
-                </a:r>
-              </a:p>
-            </p:txBody>
-          </p:sp>
-        </mc:Choice>
-      </mc:AlternateContent>
+              <a:t>Simulated Tumor Mutation Burden Dataset</a:t>
+            </a:r>
+          </a:p>
+        </p:txBody>
+      </p:sp>
+      <p:sp>
+        <p:nvSpPr>
+          <p:cNvPr id="3" name="Content Placeholder 2"/>
+          <p:cNvSpPr>
+            <a:spLocks noGrp="1"/>
+          </p:cNvSpPr>
+          <p:nvPr>
+            <p:ph idx="1"/>
+          </p:nvPr>
+        </p:nvSpPr>
+        <p:spPr/>
+        <p:txBody>
+          <a:bodyPr/>
+          <a:lstStyle/>
+          <a:p>
+            <a:pPr lvl="0" indent="0">
+              <a:buNone/>
+            </a:pPr>
+            <a:r>
+              <a:rPr>
+                <a:latin typeface="Courier"/>
+              </a:rPr>
+              <a:t># A tibble: 5 × 6
+  patient_id tumor_type tumor_stage   age   tmb high_tmb_status
+       &lt;int&gt; &lt;chr&gt;      &lt;chr&gt;       &lt;dbl&gt; &lt;dbl&gt;           &lt;int&gt;
+1          1 Colorectal III            58  2.7                1
+2          2 Lung       III            76 11.5                0
+3          3 Melanoma   III            76  5.47               0
+4          4 Colorectal II             53 11.0                0
+5          5 Breast     II             54  4.79               0</a:t>
+            </a:r>
+          </a:p>
+          <a:p>
+            <a:pPr lvl="0" indent="0" marL="0">
+              <a:buNone/>
+            </a:pPr>
+            <a:r>
+              <a:rPr b="1"/>
+              <a:t>Dataset Overview</a:t>
+            </a:r>
+          </a:p>
+          <a:p>
+            <a:pPr lvl="0" indent="0" marL="0">
+              <a:buNone/>
+            </a:pPr>
+            <a:r>
+              <a:rPr/>
+              <a:t>each row represents one tumor sample from one patient</a:t>
+            </a:r>
+          </a:p>
+          <a:p>
+            <a:pPr lvl="0"/>
+            <a:r>
+              <a:rPr>
+                <a:latin typeface="Courier"/>
+              </a:rPr>
+              <a:t>tmb</a:t>
+            </a:r>
+            <a:r>
+              <a:rPr/>
+              <a:t> : tumor mutation burden measured as mutations per megabase</a:t>
+            </a:r>
+          </a:p>
+          <a:p>
+            <a:pPr lvl="0"/>
+            <a:r>
+              <a:rPr>
+                <a:latin typeface="Courier"/>
+              </a:rPr>
+              <a:t>tumor_type</a:t>
+            </a:r>
+            <a:r>
+              <a:rPr/>
+              <a:t> : cancer type represented in the sequencing cohort</a:t>
+            </a:r>
+          </a:p>
+          <a:p>
+            <a:pPr lvl="0"/>
+            <a:r>
+              <a:rPr>
+                <a:latin typeface="Courier"/>
+              </a:rPr>
+              <a:t>tumor_stage</a:t>
+            </a:r>
+            <a:r>
+              <a:rPr/>
+              <a:t> : clinical stage at sampling</a:t>
+            </a:r>
+          </a:p>
+          <a:p>
+            <a:pPr lvl="0"/>
+            <a:r>
+              <a:rPr>
+                <a:latin typeface="Courier"/>
+              </a:rPr>
+              <a:t>age</a:t>
+            </a:r>
+            <a:r>
+              <a:rPr/>
+              <a:t> : patient age at sequencing</a:t>
+            </a:r>
+          </a:p>
+          <a:p>
+            <a:pPr lvl="0"/>
+            <a:r>
+              <a:rPr>
+                <a:latin typeface="Courier"/>
+              </a:rPr>
+              <a:t>high_tmb_status</a:t>
+            </a:r>
+            <a:r>
+              <a:rPr/>
+              <a:t> : binary indicator for whether TMB is at least 10 mutations per megabase</a:t>
+            </a:r>
+          </a:p>
+          <a:p>
+            <a:pPr lvl="0" indent="0" marL="0">
+              <a:buNone/>
+            </a:pPr>
+            <a:r>
+              <a:rPr/>
+              <a:t>:::</a:t>
+            </a:r>
+          </a:p>
+        </p:txBody>
+      </p:sp>
     </p:spTree>
   </p:cSld>
 </p:sld>

--- a/test_2_082025_pptx.pptx
+++ b/test_2_082025_pptx.pptx
@@ -29,6 +29,7 @@
     <p:sldId id="277" r:id="rId23"/>
     <p:sldId id="278" r:id="rId24"/>
     <p:sldId id="279" r:id="rId25"/>
+    <p:sldId id="280" r:id="rId26"/>
   </p:sldIdLst>
   <p:sldSz cx="9144000" cy="5143500" type="screen16x9"/>
   <p:notesSz cx="6858000" cy="9144000"/>
@@ -3217,6 +3218,179 @@
             </a:pPr>
             <a:r>
               <a:rPr/>
+              <a:t>Simulated Tumor Mutation Burden Dataset</a:t>
+            </a:r>
+          </a:p>
+        </p:txBody>
+      </p:sp>
+      <p:sp>
+        <p:nvSpPr>
+          <p:cNvPr id="3" name="Content Placeholder 2"/>
+          <p:cNvSpPr>
+            <a:spLocks noGrp="1"/>
+          </p:cNvSpPr>
+          <p:nvPr>
+            <p:ph idx="1"/>
+          </p:nvPr>
+        </p:nvSpPr>
+        <p:spPr/>
+        <p:txBody>
+          <a:bodyPr/>
+          <a:lstStyle/>
+          <a:p>
+            <a:pPr lvl="0" indent="0">
+              <a:buNone/>
+            </a:pPr>
+            <a:r>
+              <a:rPr>
+                <a:latin typeface="Courier"/>
+              </a:rPr>
+              <a:t># A tibble: 5 × 6
+  patient_id tumor_type tumor_stage   age   tmb high_tmb_status
+       &lt;int&gt; &lt;chr&gt;      &lt;chr&gt;       &lt;dbl&gt; &lt;dbl&gt;           &lt;int&gt;
+1          1 Colorectal III            58  2.7                1
+2          2 Lung       III            76 11.5                0
+3          3 Melanoma   III            76  5.47               0
+4          4 Colorectal II             53 11.0                0
+5          5 Breast     II             54  4.79               0</a:t>
+            </a:r>
+          </a:p>
+          <a:p>
+            <a:pPr lvl="0" indent="0" marL="0">
+              <a:buNone/>
+            </a:pPr>
+            <a:r>
+              <a:rPr b="1"/>
+              <a:t>Dataset Overview</a:t>
+            </a:r>
+          </a:p>
+          <a:p>
+            <a:pPr lvl="0" indent="0" marL="0">
+              <a:buNone/>
+            </a:pPr>
+            <a:r>
+              <a:rPr/>
+              <a:t>each row represents one tumor sample from one patient</a:t>
+            </a:r>
+          </a:p>
+          <a:p>
+            <a:pPr lvl="0"/>
+            <a:r>
+              <a:rPr>
+                <a:latin typeface="Courier"/>
+              </a:rPr>
+              <a:t>tmb</a:t>
+            </a:r>
+            <a:r>
+              <a:rPr/>
+              <a:t> : tumor mutation burden measured as mutations per megabase</a:t>
+            </a:r>
+          </a:p>
+          <a:p>
+            <a:pPr lvl="0"/>
+            <a:r>
+              <a:rPr>
+                <a:latin typeface="Courier"/>
+              </a:rPr>
+              <a:t>tumor_type</a:t>
+            </a:r>
+            <a:r>
+              <a:rPr/>
+              <a:t> : cancer type represented in the sequencing cohort</a:t>
+            </a:r>
+          </a:p>
+          <a:p>
+            <a:pPr lvl="0"/>
+            <a:r>
+              <a:rPr>
+                <a:latin typeface="Courier"/>
+              </a:rPr>
+              <a:t>tumor_stage</a:t>
+            </a:r>
+            <a:r>
+              <a:rPr/>
+              <a:t> : clinical stage at sampling</a:t>
+            </a:r>
+          </a:p>
+          <a:p>
+            <a:pPr lvl="0"/>
+            <a:r>
+              <a:rPr>
+                <a:latin typeface="Courier"/>
+              </a:rPr>
+              <a:t>age</a:t>
+            </a:r>
+            <a:r>
+              <a:rPr/>
+              <a:t> : patient age at sequencing</a:t>
+            </a:r>
+          </a:p>
+          <a:p>
+            <a:pPr lvl="0"/>
+            <a:r>
+              <a:rPr>
+                <a:latin typeface="Courier"/>
+              </a:rPr>
+              <a:t>high_tmb_status</a:t>
+            </a:r>
+            <a:r>
+              <a:rPr/>
+              <a:t> : binary indicator for whether TMB is at least 10 mutations per megabase</a:t>
+            </a:r>
+          </a:p>
+          <a:p>
+            <a:pPr lvl="0" indent="0" marL="0">
+              <a:buNone/>
+            </a:pPr>
+            <a:r>
+              <a:rPr/>
+              <a:t>:::</a:t>
+            </a:r>
+          </a:p>
+        </p:txBody>
+      </p:sp>
+    </p:spTree>
+  </p:cSld>
+</p:sld>
+</file>
+
+<file path=ppt/slides/slide11.xml><?xml version="1.0" encoding="utf-8"?>
+<p:sld xmlns:a="http://schemas.openxmlformats.org/drawingml/2006/main" xmlns:r="http://schemas.openxmlformats.org/officeDocument/2006/relationships" xmlns:p="http://schemas.openxmlformats.org/presentationml/2006/main">
+  <p:cSld>
+    <p:spTree>
+      <p:nvGrpSpPr>
+        <p:cNvPr id="1" name=""/>
+        <p:cNvGrpSpPr/>
+        <p:nvPr/>
+      </p:nvGrpSpPr>
+      <p:grpSpPr>
+        <a:xfrm>
+          <a:off x="0" y="0"/>
+          <a:ext cx="0" cy="0"/>
+          <a:chOff x="0" y="0"/>
+          <a:chExt cx="0" cy="0"/>
+        </a:xfrm>
+      </p:grpSpPr>
+      <p:sp>
+        <p:nvSpPr>
+          <p:cNvPr id="2" name="Title 1"/>
+          <p:cNvSpPr>
+            <a:spLocks noGrp="1"/>
+          </p:cNvSpPr>
+          <p:nvPr>
+            <p:ph type="title"/>
+          </p:nvPr>
+        </p:nvSpPr>
+        <p:spPr/>
+        <p:txBody>
+          <a:bodyPr/>
+          <a:lstStyle/>
+          <a:p>
+            <a:pPr lvl="0" indent="0" marL="0">
+              <a:buNone/>
+            </a:pPr>
+            <a:r>
+              <a:rPr/>
               <a:t>Scientific Question and Estimands</a:t>
             </a:r>
           </a:p>
@@ -3423,104 +3597,6 @@
 </p:sld>
 </file>
 
-<file path=ppt/slides/slide11.xml><?xml version="1.0" encoding="utf-8"?>
-<p:sld xmlns:a="http://schemas.openxmlformats.org/drawingml/2006/main" xmlns:r="http://schemas.openxmlformats.org/officeDocument/2006/relationships" xmlns:p="http://schemas.openxmlformats.org/presentationml/2006/main">
-  <p:cSld>
-    <p:spTree>
-      <p:nvGrpSpPr>
-        <p:cNvPr id="1" name=""/>
-        <p:cNvGrpSpPr/>
-        <p:nvPr/>
-      </p:nvGrpSpPr>
-      <p:grpSpPr>
-        <a:xfrm>
-          <a:off x="0" y="0"/>
-          <a:ext cx="0" cy="0"/>
-          <a:chOff x="0" y="0"/>
-          <a:chExt cx="0" cy="0"/>
-        </a:xfrm>
-      </p:grpSpPr>
-      <p:sp>
-        <p:nvSpPr>
-          <p:cNvPr id="2" name="Title 1"/>
-          <p:cNvSpPr>
-            <a:spLocks noGrp="1"/>
-          </p:cNvSpPr>
-          <p:nvPr>
-            <p:ph type="title"/>
-          </p:nvPr>
-        </p:nvSpPr>
-        <p:spPr/>
-        <p:txBody>
-          <a:bodyPr/>
-          <a:lstStyle/>
-          <a:p>
-            <a:pPr lvl="0" indent="0" marL="0">
-              <a:buNone/>
-            </a:pPr>
-            <a:r>
-              <a:rPr/>
-              <a:t>Visualize the TMB Distribution</a:t>
-            </a:r>
-          </a:p>
-        </p:txBody>
-      </p:sp>
-      <p:sp>
-        <p:nvSpPr>
-          <p:cNvPr id="3" name="Content Placeholder 2"/>
-          <p:cNvSpPr>
-            <a:spLocks noGrp="1"/>
-          </p:cNvSpPr>
-          <p:nvPr>
-            <p:ph idx="1"/>
-          </p:nvPr>
-        </p:nvSpPr>
-        <p:spPr/>
-        <p:txBody>
-          <a:bodyPr/>
-          <a:lstStyle/>
-          <a:p>
-            <a:pPr lvl="0" indent="0" marL="0">
-              <a:buNone/>
-            </a:pPr>
-          </a:p>
-          <a:p>
-            <a:pPr lvl="0" indent="0" marL="0">
-              <a:buNone/>
-            </a:pPr>
-            <a:r>
-              <a:rPr b="1"/>
-              <a:t>Interpretation of the Distribution</a:t>
-            </a:r>
-          </a:p>
-          <a:p>
-            <a:pPr lvl="0"/>
-            <a:r>
-              <a:rPr/>
-              <a:t>histogram shows the distribution of tumor mutation burden across sequenced tumors</a:t>
-            </a:r>
-          </a:p>
-          <a:p>
-            <a:pPr lvl="0"/>
-            <a:r>
-              <a:rPr/>
-              <a:t>distribution is right-skewed positivelyskewed</a:t>
-            </a:r>
-          </a:p>
-          <a:p>
-            <a:pPr lvl="0"/>
-            <a:r>
-              <a:rPr/>
-              <a:t>due to skewness the mean is likely larger than the median</a:t>
-            </a:r>
-          </a:p>
-        </p:txBody>
-      </p:sp>
-    </p:spTree>
-  </p:cSld>
-</p:sld>
-</file>
-
 <file path=ppt/slides/slide12.xml><?xml version="1.0" encoding="utf-8"?>
 <p:sld xmlns:a="http://schemas.openxmlformats.org/drawingml/2006/main" xmlns:r="http://schemas.openxmlformats.org/officeDocument/2006/relationships" xmlns:p="http://schemas.openxmlformats.org/presentationml/2006/main">
   <p:cSld>
@@ -3592,33 +3668,24 @@
             </a:r>
           </a:p>
           <a:p>
-            <a:pPr lvl="0" indent="0" marL="0">
-              <a:buNone/>
-            </a:pPr>
-            <a:r>
-              <a:rPr/>
-              <a:t>Note: mean may generate an overestimation of the typical tumor mutation burden in this sample because of extreme values</a:t>
-            </a:r>
-          </a:p>
-          <a:p>
-            <a:pPr lvl="0"/>
-            <a:r>
-              <a:rPr/>
-              <a:t>most tumors contain relatively low-to-moderate TMB values</a:t>
-            </a:r>
-          </a:p>
-          <a:p>
-            <a:pPr lvl="0"/>
-            <a:r>
-              <a:rPr/>
-              <a:t>smaller number of tumors contain substantially elevated mutation burden</a:t>
-            </a:r>
-          </a:p>
-          <a:p>
-            <a:pPr lvl="0"/>
-            <a:r>
-              <a:rPr/>
-              <a:t>long right tail indicates genomic heterogeneity across tumors</a:t>
+            <a:pPr lvl="0"/>
+            <a:r>
+              <a:rPr/>
+              <a:t>histogram shows the distribution of tumor mutation burden across sequenced tumors</a:t>
+            </a:r>
+          </a:p>
+          <a:p>
+            <a:pPr lvl="0"/>
+            <a:r>
+              <a:rPr/>
+              <a:t>distribution is right-skewed positivelyskewed</a:t>
+            </a:r>
+          </a:p>
+          <a:p>
+            <a:pPr lvl="0"/>
+            <a:r>
+              <a:rPr/>
+              <a:t>due to skewness the mean is likely larger than the median</a:t>
             </a:r>
           </a:p>
         </p:txBody>
@@ -3665,7 +3732,7 @@
             </a:pPr>
             <a:r>
               <a:rPr/>
-              <a:t>Bootstrap Appraoch</a:t>
+              <a:t>Visualize the TMB Distribution</a:t>
             </a:r>
           </a:p>
         </p:txBody>
@@ -3688,24 +3755,14 @@
             <a:pPr lvl="0" indent="0" marL="0">
               <a:buNone/>
             </a:pPr>
-            <a:r>
-              <a:rPr>
-                <a:latin typeface="Courier"/>
-              </a:rPr>
-              <a:t>bootstrap resampling</a:t>
-            </a:r>
-            <a:r>
-              <a:rPr/>
-              <a:t>: approximates repeated sampling using the observed data</a:t>
-            </a:r>
           </a:p>
           <a:p>
             <a:pPr lvl="0" indent="0" marL="0">
               <a:buNone/>
             </a:pPr>
             <a:r>
-              <a:rPr/>
-              <a:t>Each bootstrap iteration executes the following:</a:t>
+              <a:rPr b="1"/>
+              <a:t>Interpretation of the Distribution</a:t>
             </a:r>
           </a:p>
           <a:p>
@@ -3713,76 +3770,29 @@
               <a:buNone/>
             </a:pPr>
             <a:r>
-              <a:rPr b="1"/>
-              <a:t>1. resample TMB values</a:t>
-            </a:r>
-            <a:r>
-              <a:rPr/>
-              <a:t> with replacement</a:t>
-            </a:r>
-          </a:p>
-          <a:p>
-            <a:pPr lvl="0"/>
-            <a:r>
-              <a:rPr/>
-              <a:t>after a value is selected, it is returned to the dataset and can be selected again</a:t>
-            </a:r>
-          </a:p>
-          <a:p>
-            <a:pPr lvl="0"/>
-            <a:r>
-              <a:rPr/>
-              <a:t>allowing the bootstrap sample to:</a:t>
-            </a:r>
-          </a:p>
-          <a:p>
-            <a:pPr lvl="1"/>
-            <a:r>
-              <a:rPr/>
-              <a:t>maintain same size as the original dataset</a:t>
-            </a:r>
-          </a:p>
-          <a:p>
-            <a:pPr lvl="1"/>
-            <a:r>
-              <a:rPr/>
-              <a:t>note that each resample may include some participants more than once and may omit some participants</a:t>
-            </a:r>
-          </a:p>
-          <a:p>
-            <a:pPr lvl="0" indent="0" marL="0">
-              <a:buNone/>
-            </a:pPr>
-            <a:r>
-              <a:rPr b="1"/>
-              <a:t>2. compute the estimator on that resampled dataset</a:t>
-            </a:r>
-          </a:p>
-          <a:p>
-            <a:pPr lvl="0" indent="0" marL="0">
-              <a:buNone/>
-            </a:pPr>
-            <a:r>
-              <a:rPr b="1"/>
-              <a:t>3. store the result</a:t>
-            </a:r>
-          </a:p>
-          <a:p>
-            <a:pPr lvl="0" indent="0" marL="0">
-              <a:buNone/>
-            </a:pPr>
-            <a:r>
-              <a:rPr b="1"/>
-              <a:t>4. repeat many times</a:t>
-            </a:r>
-          </a:p>
-          <a:p>
-            <a:pPr lvl="0" indent="0" marL="0">
-              <a:buNone/>
-            </a:pPr>
-            <a:r>
-              <a:rPr/>
-              <a:t>After many iterations the collection of estimates approximates the sampling distribution of the estimator</a:t>
+              <a:rPr/>
+              <a:t>Note: mean may generate an overestimation of the typical tumor mutation burden in this sample because of extreme values</a:t>
+            </a:r>
+          </a:p>
+          <a:p>
+            <a:pPr lvl="0"/>
+            <a:r>
+              <a:rPr/>
+              <a:t>most tumors contain relatively low-to-moderate TMB values</a:t>
+            </a:r>
+          </a:p>
+          <a:p>
+            <a:pPr lvl="0"/>
+            <a:r>
+              <a:rPr/>
+              <a:t>smaller number of tumors contain substantially elevated mutation burden</a:t>
+            </a:r>
+          </a:p>
+          <a:p>
+            <a:pPr lvl="0"/>
+            <a:r>
+              <a:rPr/>
+              <a:t>long right tail indicates genomic heterogeneity across tumors</a:t>
             </a:r>
           </a:p>
         </p:txBody>
@@ -3829,7 +3839,7 @@
             </a:pPr>
             <a:r>
               <a:rPr/>
-              <a:t>Extract the Variable</a:t>
+              <a:t>Bootstrap Appraoch</a:t>
             </a:r>
           </a:p>
         </p:txBody>
@@ -3849,102 +3859,104 @@
           <a:bodyPr/>
           <a:lstStyle/>
           <a:p>
-            <a:pPr lvl="0" indent="0">
-              <a:buNone/>
-            </a:pPr>
-            <a:r>
-              <a:rPr>
-                <a:solidFill>
-                  <a:srgbClr val="003B4F"/>
-                </a:solidFill>
-                <a:latin typeface="Courier"/>
-              </a:rPr>
-              <a:t>tmb_values &lt;- tmb_df</a:t>
-            </a:r>
-            <a:r>
-              <a:rPr>
-                <a:solidFill>
-                  <a:srgbClr val="5E5E5E"/>
-                </a:solidFill>
-                <a:latin typeface="Courier"/>
-              </a:rPr>
-              <a:t>$</a:t>
-            </a:r>
-            <a:r>
-              <a:rPr>
-                <a:solidFill>
-                  <a:srgbClr val="003B4F"/>
-                </a:solidFill>
-                <a:latin typeface="Courier"/>
-              </a:rPr>
-              <a:t>tmb</a:t>
-            </a:r>
-            <a:br/>
-            <a:br/>
-            <a:r>
-              <a:rPr>
-                <a:solidFill>
-                  <a:srgbClr val="4758AB"/>
-                </a:solidFill>
-                <a:latin typeface="Courier"/>
-              </a:rPr>
-              <a:t>head</a:t>
-            </a:r>
-            <a:r>
-              <a:rPr>
-                <a:solidFill>
-                  <a:srgbClr val="003B4F"/>
-                </a:solidFill>
-                <a:latin typeface="Courier"/>
-              </a:rPr>
-              <a:t>(tmb_values)</a:t>
-            </a:r>
-          </a:p>
-          <a:p>
-            <a:pPr lvl="0" indent="0">
-              <a:buNone/>
-            </a:pPr>
-            <a:r>
-              <a:rPr>
-                <a:latin typeface="Courier"/>
-              </a:rPr>
-              <a:t>[1]  2.70 11.49  5.47 10.97  4.79  2.61</a:t>
-            </a:r>
-          </a:p>
-          <a:p>
             <a:pPr lvl="0" indent="0" marL="0">
               <a:buNone/>
             </a:pPr>
             <a:r>
+              <a:rPr>
+                <a:latin typeface="Courier"/>
+              </a:rPr>
+              <a:t>bootstrap resampling</a:t>
+            </a:r>
+            <a:r>
+              <a:rPr/>
+              <a:t>: approximates repeated sampling using the observed data</a:t>
+            </a:r>
+          </a:p>
+          <a:p>
+            <a:pPr lvl="0" indent="0" marL="0">
+              <a:buNone/>
+            </a:pPr>
+            <a:r>
+              <a:rPr/>
+              <a:t>Each bootstrap iteration executes the following:</a:t>
+            </a:r>
+          </a:p>
+          <a:p>
+            <a:pPr lvl="0" indent="0" marL="0">
+              <a:buNone/>
+            </a:pPr>
+            <a:r>
               <a:rPr b="1"/>
-              <a:t>Notes</a:t>
-            </a:r>
-          </a:p>
-          <a:p>
-            <a:pPr lvl="0"/>
-            <a:r>
-              <a:rPr>
-                <a:latin typeface="Courier"/>
-              </a:rPr>
-              <a:t>tmb_df$tmb</a:t>
-            </a:r>
-            <a:r>
-              <a:rPr/>
-              <a:t> extracts the tumor mutation burden column</a:t>
-            </a:r>
-          </a:p>
-          <a:p>
-            <a:pPr lvl="0"/>
-            <a:r>
-              <a:rPr/>
-              <a:t>bootstrap resampling operates on the observed TMB measurements</a:t>
-            </a:r>
-          </a:p>
-          <a:p>
-            <a:pPr lvl="0"/>
-            <a:r>
-              <a:rPr/>
-              <a:t>vector contains one TMB value per tumor sample</a:t>
+              <a:t>1. resample TMB values</a:t>
+            </a:r>
+            <a:r>
+              <a:rPr/>
+              <a:t> with replacement</a:t>
+            </a:r>
+          </a:p>
+          <a:p>
+            <a:pPr lvl="0"/>
+            <a:r>
+              <a:rPr/>
+              <a:t>after a value is selected, it is returned to the dataset and can be selected again</a:t>
+            </a:r>
+          </a:p>
+          <a:p>
+            <a:pPr lvl="0"/>
+            <a:r>
+              <a:rPr/>
+              <a:t>allowing the bootstrap sample to:</a:t>
+            </a:r>
+          </a:p>
+          <a:p>
+            <a:pPr lvl="1"/>
+            <a:r>
+              <a:rPr/>
+              <a:t>maintain same size as the original dataset</a:t>
+            </a:r>
+          </a:p>
+          <a:p>
+            <a:pPr lvl="1"/>
+            <a:r>
+              <a:rPr/>
+              <a:t>note that each resample may include some participants more than once and may omit some participants</a:t>
+            </a:r>
+          </a:p>
+          <a:p>
+            <a:pPr lvl="0" indent="0" marL="0">
+              <a:buNone/>
+            </a:pPr>
+            <a:r>
+              <a:rPr b="1"/>
+              <a:t>2. compute the estimator on that resampled dataset</a:t>
+            </a:r>
+          </a:p>
+          <a:p>
+            <a:pPr lvl="0" indent="0" marL="0">
+              <a:buNone/>
+            </a:pPr>
+            <a:r>
+              <a:rPr b="1"/>
+              <a:t>3. store the result</a:t>
+            </a:r>
+          </a:p>
+          <a:p>
+            <a:pPr lvl="0" indent="0" marL="0">
+              <a:buNone/>
+            </a:pPr>
+            <a:r>
+              <a:rPr b="1"/>
+              <a:t>4. repeat many times</a:t>
+            </a:r>
+          </a:p>
+          <a:p>
+            <a:pPr lvl="0" indent="0" marL="0">
+              <a:buNone/>
+            </a:pPr>
+            <a:r>
+              <a:rPr/>
+              <a:t>After many iterations the collection of estimates approximates the sampling distribution of the estimator</a:t>
             </a:r>
           </a:p>
         </p:txBody>
@@ -3991,7 +4003,7 @@
             </a:pPr>
             <a:r>
               <a:rPr/>
-              <a:t>Generate One Bootstrap Sample</a:t>
+              <a:t>Extract the Variable</a:t>
             </a:r>
           </a:p>
         </p:txBody>
@@ -4017,198 +4029,39 @@
             <a:r>
               <a:rPr>
                 <a:solidFill>
-                  <a:srgbClr val="4758AB"/>
-                </a:solidFill>
-                <a:latin typeface="Courier"/>
-              </a:rPr>
-              <a:t>set.seed</a:t>
-            </a:r>
-            <a:r>
-              <a:rPr>
-                <a:solidFill>
-                  <a:srgbClr val="003B4F"/>
-                </a:solidFill>
-                <a:latin typeface="Courier"/>
-              </a:rPr>
-              <a:t>(</a:t>
-            </a:r>
-            <a:r>
-              <a:rPr>
-                <a:solidFill>
-                  <a:srgbClr val="AD0000"/>
-                </a:solidFill>
-                <a:latin typeface="Courier"/>
-              </a:rPr>
-              <a:t>100</a:t>
-            </a:r>
-            <a:r>
-              <a:rPr>
-                <a:solidFill>
-                  <a:srgbClr val="003B4F"/>
-                </a:solidFill>
-                <a:latin typeface="Courier"/>
-              </a:rPr>
-              <a:t>)</a:t>
+                  <a:srgbClr val="003B4F"/>
+                </a:solidFill>
+                <a:latin typeface="Courier"/>
+              </a:rPr>
+              <a:t>tmb_values &lt;- tmb_df</a:t>
+            </a:r>
+            <a:r>
+              <a:rPr>
+                <a:solidFill>
+                  <a:srgbClr val="5E5E5E"/>
+                </a:solidFill>
+                <a:latin typeface="Courier"/>
+              </a:rPr>
+              <a:t>$</a:t>
+            </a:r>
+            <a:r>
+              <a:rPr>
+                <a:solidFill>
+                  <a:srgbClr val="003B4F"/>
+                </a:solidFill>
+                <a:latin typeface="Courier"/>
+              </a:rPr>
+              <a:t>tmb</a:t>
             </a:r>
             <a:br/>
             <a:br/>
             <a:r>
               <a:rPr>
                 <a:solidFill>
-                  <a:srgbClr val="003B4F"/>
-                </a:solidFill>
-                <a:latin typeface="Courier"/>
-              </a:rPr>
-              <a:t>bootstrap_sample &lt;- </a:t>
-            </a:r>
-            <a:r>
-              <a:rPr>
-                <a:solidFill>
                   <a:srgbClr val="4758AB"/>
                 </a:solidFill>
                 <a:latin typeface="Courier"/>
               </a:rPr>
-              <a:t>sample</a:t>
-            </a:r>
-            <a:r>
-              <a:rPr>
-                <a:solidFill>
-                  <a:srgbClr val="003B4F"/>
-                </a:solidFill>
-                <a:latin typeface="Courier"/>
-              </a:rPr>
-              <a:t>(</a:t>
-            </a:r>
-            <a:br/>
-            <a:r>
-              <a:rPr>
-                <a:solidFill>
-                  <a:srgbClr val="003B4F"/>
-                </a:solidFill>
-                <a:latin typeface="Courier"/>
-              </a:rPr>
-              <a:t>  </a:t>
-            </a:r>
-            <a:r>
-              <a:rPr>
-                <a:solidFill>
-                  <a:srgbClr val="657422"/>
-                </a:solidFill>
-                <a:latin typeface="Courier"/>
-              </a:rPr>
-              <a:t>x =</a:t>
-            </a:r>
-            <a:r>
-              <a:rPr>
-                <a:solidFill>
-                  <a:srgbClr val="003B4F"/>
-                </a:solidFill>
-                <a:latin typeface="Courier"/>
-              </a:rPr>
-              <a:t> tmb_values,</a:t>
-            </a:r>
-            <a:br/>
-            <a:r>
-              <a:rPr>
-                <a:solidFill>
-                  <a:srgbClr val="003B4F"/>
-                </a:solidFill>
-                <a:latin typeface="Courier"/>
-              </a:rPr>
-              <a:t>  </a:t>
-            </a:r>
-            <a:r>
-              <a:rPr>
-                <a:solidFill>
-                  <a:srgbClr val="657422"/>
-                </a:solidFill>
-                <a:latin typeface="Courier"/>
-              </a:rPr>
-              <a:t>size =</a:t>
-            </a:r>
-            <a:r>
-              <a:rPr>
-                <a:solidFill>
-                  <a:srgbClr val="003B4F"/>
-                </a:solidFill>
-                <a:latin typeface="Courier"/>
-              </a:rPr>
-              <a:t> </a:t>
-            </a:r>
-            <a:r>
-              <a:rPr>
-                <a:solidFill>
-                  <a:srgbClr val="4758AB"/>
-                </a:solidFill>
-                <a:latin typeface="Courier"/>
-              </a:rPr>
-              <a:t>length</a:t>
-            </a:r>
-            <a:r>
-              <a:rPr>
-                <a:solidFill>
-                  <a:srgbClr val="003B4F"/>
-                </a:solidFill>
-                <a:latin typeface="Courier"/>
-              </a:rPr>
-              <a:t>(tmb_values),</a:t>
-            </a:r>
-            <a:br/>
-            <a:r>
-              <a:rPr>
-                <a:solidFill>
-                  <a:srgbClr val="003B4F"/>
-                </a:solidFill>
-                <a:latin typeface="Courier"/>
-              </a:rPr>
-              <a:t>  </a:t>
-            </a:r>
-            <a:r>
-              <a:rPr>
-                <a:solidFill>
-                  <a:srgbClr val="657422"/>
-                </a:solidFill>
-                <a:latin typeface="Courier"/>
-              </a:rPr>
-              <a:t>replace =</a:t>
-            </a:r>
-            <a:r>
-              <a:rPr>
-                <a:solidFill>
-                  <a:srgbClr val="003B4F"/>
-                </a:solidFill>
-                <a:latin typeface="Courier"/>
-              </a:rPr>
-              <a:t> </a:t>
-            </a:r>
-            <a:r>
-              <a:rPr>
-                <a:solidFill>
-                  <a:srgbClr val="8F5902"/>
-                </a:solidFill>
-                <a:latin typeface="Courier"/>
-              </a:rPr>
-              <a:t>TRUE</a:t>
-            </a:r>
-            <a:br/>
-            <a:r>
-              <a:rPr>
-                <a:solidFill>
-                  <a:srgbClr val="003B4F"/>
-                </a:solidFill>
-                <a:latin typeface="Courier"/>
-              </a:rPr>
-              <a:t>)</a:t>
-            </a:r>
-            <a:br/>
-            <a:br/>
-            <a:r>
-              <a:rPr>
-                <a:solidFill>
-                  <a:srgbClr val="4758AB"/>
-                </a:solidFill>
-                <a:latin typeface="Courier"/>
-              </a:rPr>
               <a:t>head</a:t>
             </a:r>
             <a:r>
@@ -4218,7 +4071,7 @@
                 </a:solidFill>
                 <a:latin typeface="Courier"/>
               </a:rPr>
-              <a:t>(bootstrap_sample)</a:t>
+              <a:t>(tmb_values)</a:t>
             </a:r>
           </a:p>
           <a:p>
@@ -4229,7 +4082,7 @@
               <a:rPr>
                 <a:latin typeface="Courier"/>
               </a:rPr>
-              <a:t>[1]  7.07 10.67  6.62  2.05  1.89 11.13</a:t>
+              <a:t>[1]  2.70 11.49  5.47 10.97  4.79  2.61</a:t>
             </a:r>
           </a:p>
           <a:p>
@@ -4247,59 +4100,25 @@
               <a:rPr>
                 <a:latin typeface="Courier"/>
               </a:rPr>
-              <a:t>sample()</a:t>
-            </a:r>
-            <a:r>
-              <a:rPr/>
-              <a:t> draws observations from the original TMB values</a:t>
-            </a:r>
-          </a:p>
-          <a:p>
-            <a:pPr lvl="0"/>
-            <a:r>
-              <a:rPr>
-                <a:latin typeface="Courier"/>
-              </a:rPr>
-              <a:t>x = tmb_values</a:t>
-            </a:r>
-          </a:p>
-          <a:p>
-            <a:pPr lvl="1"/>
-            <a:r>
-              <a:rPr/>
-              <a:t>variable that stores values being resampled</a:t>
-            </a:r>
-          </a:p>
-          <a:p>
-            <a:pPr lvl="0"/>
-            <a:r>
-              <a:rPr>
-                <a:latin typeface="Courier"/>
-              </a:rPr>
-              <a:t>size = length(tmb_values)</a:t>
-            </a:r>
-          </a:p>
-          <a:p>
-            <a:pPr lvl="1"/>
-            <a:r>
-              <a:rPr/>
-              <a:t>bootstrap sample has the same size as the original dataset</a:t>
-            </a:r>
-          </a:p>
-          <a:p>
-            <a:pPr lvl="0"/>
-            <a:r>
-              <a:rPr>
-                <a:latin typeface="Courier"/>
-              </a:rPr>
-              <a:t>replace = TRUE</a:t>
-            </a:r>
-          </a:p>
-          <a:p>
-            <a:pPr lvl="1"/>
-            <a:r>
-              <a:rPr/>
-              <a:t>observations can appear more than once</a:t>
+              <a:t>tmb_df$tmb</a:t>
+            </a:r>
+            <a:r>
+              <a:rPr/>
+              <a:t> extracts the tumor mutation burden column</a:t>
+            </a:r>
+          </a:p>
+          <a:p>
+            <a:pPr lvl="0"/>
+            <a:r>
+              <a:rPr/>
+              <a:t>bootstrap resampling operates on the observed TMB measurements</a:t>
+            </a:r>
+          </a:p>
+          <a:p>
+            <a:pPr lvl="0"/>
+            <a:r>
+              <a:rPr/>
+              <a:t>vector contains one TMB value per tumor sample</a:t>
             </a:r>
           </a:p>
         </p:txBody>
@@ -4346,7 +4165,7 @@
             </a:pPr>
             <a:r>
               <a:rPr/>
-              <a:t>Compute an Estimator</a:t>
+              <a:t>Generate One Bootstrap Sample</a:t>
             </a:r>
           </a:p>
         </p:txBody>
@@ -4376,7 +4195,195 @@
                 </a:solidFill>
                 <a:latin typeface="Courier"/>
               </a:rPr>
-              <a:t>mean</a:t>
+              <a:t>set.seed</a:t>
+            </a:r>
+            <a:r>
+              <a:rPr>
+                <a:solidFill>
+                  <a:srgbClr val="003B4F"/>
+                </a:solidFill>
+                <a:latin typeface="Courier"/>
+              </a:rPr>
+              <a:t>(</a:t>
+            </a:r>
+            <a:r>
+              <a:rPr>
+                <a:solidFill>
+                  <a:srgbClr val="AD0000"/>
+                </a:solidFill>
+                <a:latin typeface="Courier"/>
+              </a:rPr>
+              <a:t>100</a:t>
+            </a:r>
+            <a:r>
+              <a:rPr>
+                <a:solidFill>
+                  <a:srgbClr val="003B4F"/>
+                </a:solidFill>
+                <a:latin typeface="Courier"/>
+              </a:rPr>
+              <a:t>)</a:t>
+            </a:r>
+            <a:br/>
+            <a:br/>
+            <a:r>
+              <a:rPr>
+                <a:solidFill>
+                  <a:srgbClr val="003B4F"/>
+                </a:solidFill>
+                <a:latin typeface="Courier"/>
+              </a:rPr>
+              <a:t>bootstrap_sample &lt;- </a:t>
+            </a:r>
+            <a:r>
+              <a:rPr>
+                <a:solidFill>
+                  <a:srgbClr val="4758AB"/>
+                </a:solidFill>
+                <a:latin typeface="Courier"/>
+              </a:rPr>
+              <a:t>sample</a:t>
+            </a:r>
+            <a:r>
+              <a:rPr>
+                <a:solidFill>
+                  <a:srgbClr val="003B4F"/>
+                </a:solidFill>
+                <a:latin typeface="Courier"/>
+              </a:rPr>
+              <a:t>(</a:t>
+            </a:r>
+            <a:br/>
+            <a:r>
+              <a:rPr>
+                <a:solidFill>
+                  <a:srgbClr val="003B4F"/>
+                </a:solidFill>
+                <a:latin typeface="Courier"/>
+              </a:rPr>
+              <a:t>  </a:t>
+            </a:r>
+            <a:r>
+              <a:rPr>
+                <a:solidFill>
+                  <a:srgbClr val="657422"/>
+                </a:solidFill>
+                <a:latin typeface="Courier"/>
+              </a:rPr>
+              <a:t>x =</a:t>
+            </a:r>
+            <a:r>
+              <a:rPr>
+                <a:solidFill>
+                  <a:srgbClr val="003B4F"/>
+                </a:solidFill>
+                <a:latin typeface="Courier"/>
+              </a:rPr>
+              <a:t> tmb_values,</a:t>
+            </a:r>
+            <a:br/>
+            <a:r>
+              <a:rPr>
+                <a:solidFill>
+                  <a:srgbClr val="003B4F"/>
+                </a:solidFill>
+                <a:latin typeface="Courier"/>
+              </a:rPr>
+              <a:t>  </a:t>
+            </a:r>
+            <a:r>
+              <a:rPr>
+                <a:solidFill>
+                  <a:srgbClr val="657422"/>
+                </a:solidFill>
+                <a:latin typeface="Courier"/>
+              </a:rPr>
+              <a:t>size =</a:t>
+            </a:r>
+            <a:r>
+              <a:rPr>
+                <a:solidFill>
+                  <a:srgbClr val="003B4F"/>
+                </a:solidFill>
+                <a:latin typeface="Courier"/>
+              </a:rPr>
+              <a:t> </a:t>
+            </a:r>
+            <a:r>
+              <a:rPr>
+                <a:solidFill>
+                  <a:srgbClr val="4758AB"/>
+                </a:solidFill>
+                <a:latin typeface="Courier"/>
+              </a:rPr>
+              <a:t>length</a:t>
+            </a:r>
+            <a:r>
+              <a:rPr>
+                <a:solidFill>
+                  <a:srgbClr val="003B4F"/>
+                </a:solidFill>
+                <a:latin typeface="Courier"/>
+              </a:rPr>
+              <a:t>(tmb_values),</a:t>
+            </a:r>
+            <a:br/>
+            <a:r>
+              <a:rPr>
+                <a:solidFill>
+                  <a:srgbClr val="003B4F"/>
+                </a:solidFill>
+                <a:latin typeface="Courier"/>
+              </a:rPr>
+              <a:t>  </a:t>
+            </a:r>
+            <a:r>
+              <a:rPr>
+                <a:solidFill>
+                  <a:srgbClr val="657422"/>
+                </a:solidFill>
+                <a:latin typeface="Courier"/>
+              </a:rPr>
+              <a:t>replace =</a:t>
+            </a:r>
+            <a:r>
+              <a:rPr>
+                <a:solidFill>
+                  <a:srgbClr val="003B4F"/>
+                </a:solidFill>
+                <a:latin typeface="Courier"/>
+              </a:rPr>
+              <a:t> </a:t>
+            </a:r>
+            <a:r>
+              <a:rPr>
+                <a:solidFill>
+                  <a:srgbClr val="8F5902"/>
+                </a:solidFill>
+                <a:latin typeface="Courier"/>
+              </a:rPr>
+              <a:t>TRUE</a:t>
+            </a:r>
+            <a:br/>
+            <a:r>
+              <a:rPr>
+                <a:solidFill>
+                  <a:srgbClr val="003B4F"/>
+                </a:solidFill>
+                <a:latin typeface="Courier"/>
+              </a:rPr>
+              <a:t>)</a:t>
+            </a:r>
+            <a:br/>
+            <a:br/>
+            <a:r>
+              <a:rPr>
+                <a:solidFill>
+                  <a:srgbClr val="4758AB"/>
+                </a:solidFill>
+                <a:latin typeface="Courier"/>
+              </a:rPr>
+              <a:t>head</a:t>
             </a:r>
             <a:r>
               <a:rPr>
@@ -4396,48 +4403,7 @@
               <a:rPr>
                 <a:latin typeface="Courier"/>
               </a:rPr>
-              <a:t>[1] 7.538273</a:t>
-            </a:r>
-          </a:p>
-          <a:p>
-            <a:pPr lvl="0" indent="0">
-              <a:buNone/>
-            </a:pPr>
-            <a:r>
-              <a:rPr>
-                <a:solidFill>
-                  <a:srgbClr val="4758AB"/>
-                </a:solidFill>
-                <a:latin typeface="Courier"/>
-              </a:rPr>
-              <a:t>median</a:t>
-            </a:r>
-            <a:r>
-              <a:rPr>
-                <a:solidFill>
-                  <a:srgbClr val="003B4F"/>
-                </a:solidFill>
-                <a:latin typeface="Courier"/>
-              </a:rPr>
-              <a:t>(bootstrap_sample)</a:t>
-            </a:r>
-          </a:p>
-          <a:p>
-            <a:pPr lvl="0" indent="0">
-              <a:buNone/>
-            </a:pPr>
-            <a:r>
-              <a:rPr>
-                <a:latin typeface="Courier"/>
-              </a:rPr>
-              <a:t>[1] 7.005</a:t>
-            </a:r>
-          </a:p>
-          <a:p>
-            <a:pPr lvl="0"/>
-            <a:r>
-              <a:rPr/>
-              <a:t>represents estimators [sample mean and median TMB] from a single bootstrap sample</a:t>
+              <a:t>[1]  7.07 10.67  6.62  2.05  1.89 11.13</a:t>
             </a:r>
           </a:p>
           <a:p>
@@ -4445,29 +4411,69 @@
               <a:buNone/>
             </a:pPr>
             <a:r>
-              <a:rPr/>
-              <a:t>After generating the resample:</a:t>
-            </a:r>
-          </a:p>
-          <a:p>
-            <a:pPr lvl="0"/>
-            <a:r>
-              <a:rPr/>
-              <a:t>compute the estimator of interest</a:t>
-            </a:r>
-          </a:p>
-          <a:p>
-            <a:pPr lvl="0"/>
-            <a:r>
-              <a:rPr/>
-              <a:t>store the result</a:t>
-            </a:r>
-          </a:p>
-          <a:p>
-            <a:pPr lvl="0"/>
-            <a:r>
-              <a:rPr/>
-              <a:t>repeat many times</a:t>
+              <a:rPr b="1"/>
+              <a:t>Notes</a:t>
+            </a:r>
+          </a:p>
+          <a:p>
+            <a:pPr lvl="0"/>
+            <a:r>
+              <a:rPr>
+                <a:latin typeface="Courier"/>
+              </a:rPr>
+              <a:t>sample()</a:t>
+            </a:r>
+            <a:r>
+              <a:rPr/>
+              <a:t> draws observations from the original TMB values</a:t>
+            </a:r>
+          </a:p>
+          <a:p>
+            <a:pPr lvl="0"/>
+            <a:r>
+              <a:rPr>
+                <a:latin typeface="Courier"/>
+              </a:rPr>
+              <a:t>x = tmb_values</a:t>
+            </a:r>
+          </a:p>
+          <a:p>
+            <a:pPr lvl="1"/>
+            <a:r>
+              <a:rPr/>
+              <a:t>variable that stores values being resampled</a:t>
+            </a:r>
+          </a:p>
+          <a:p>
+            <a:pPr lvl="0"/>
+            <a:r>
+              <a:rPr>
+                <a:latin typeface="Courier"/>
+              </a:rPr>
+              <a:t>size = length(tmb_values)</a:t>
+            </a:r>
+          </a:p>
+          <a:p>
+            <a:pPr lvl="1"/>
+            <a:r>
+              <a:rPr/>
+              <a:t>bootstrap sample has the same size as the original dataset</a:t>
+            </a:r>
+          </a:p>
+          <a:p>
+            <a:pPr lvl="0"/>
+            <a:r>
+              <a:rPr>
+                <a:latin typeface="Courier"/>
+              </a:rPr>
+              <a:t>replace = TRUE</a:t>
+            </a:r>
+          </a:p>
+          <a:p>
+            <a:pPr lvl="1"/>
+            <a:r>
+              <a:rPr/>
+              <a:t>observations can appear more than once</a:t>
             </a:r>
           </a:p>
         </p:txBody>
@@ -4514,7 +4520,7 @@
             </a:pPr>
             <a:r>
               <a:rPr/>
-              <a:t>Bootstrap for the Mean TMB</a:t>
+              <a:t>Compute an Estimator</a:t>
             </a:r>
           </a:p>
         </p:txBody>
@@ -4544,46 +4550,33 @@
                 </a:solidFill>
                 <a:latin typeface="Courier"/>
               </a:rPr>
-              <a:t>set.seed</a:t>
-            </a:r>
-            <a:r>
-              <a:rPr>
-                <a:solidFill>
-                  <a:srgbClr val="003B4F"/>
-                </a:solidFill>
-                <a:latin typeface="Courier"/>
-              </a:rPr>
-              <a:t>(</a:t>
-            </a:r>
-            <a:r>
-              <a:rPr>
-                <a:solidFill>
-                  <a:srgbClr val="AD0000"/>
-                </a:solidFill>
-                <a:latin typeface="Courier"/>
-              </a:rPr>
-              <a:t>222</a:t>
-            </a:r>
-            <a:r>
-              <a:rPr>
-                <a:solidFill>
-                  <a:srgbClr val="003B4F"/>
-                </a:solidFill>
-                <a:latin typeface="Courier"/>
-              </a:rPr>
-              <a:t>)</a:t>
-            </a:r>
-            <a:br/>
-            <a:br/>
-            <a:r>
-              <a:rPr>
-                <a:solidFill>
-                  <a:srgbClr val="003B4F"/>
-                </a:solidFill>
-                <a:latin typeface="Courier"/>
-              </a:rPr>
-              <a:t>boot_means &lt;- </a:t>
-            </a:r>
+              <a:t>mean</a:t>
+            </a:r>
+            <a:r>
+              <a:rPr>
+                <a:solidFill>
+                  <a:srgbClr val="003B4F"/>
+                </a:solidFill>
+                <a:latin typeface="Courier"/>
+              </a:rPr>
+              <a:t>(bootstrap_sample)</a:t>
+            </a:r>
+          </a:p>
+          <a:p>
+            <a:pPr lvl="0" indent="0">
+              <a:buNone/>
+            </a:pPr>
+            <a:r>
+              <a:rPr>
+                <a:latin typeface="Courier"/>
+              </a:rPr>
+              <a:t>[1] 7.538273</a:t>
+            </a:r>
+          </a:p>
+          <a:p>
+            <a:pPr lvl="0" indent="0">
+              <a:buNone/>
+            </a:pPr>
             <a:r>
               <a:rPr>
                 <a:solidFill>
@@ -4591,244 +4584,16 @@
                 </a:solidFill>
                 <a:latin typeface="Courier"/>
               </a:rPr>
-              <a:t>replicate</a:t>
-            </a:r>
-            <a:r>
-              <a:rPr>
-                <a:solidFill>
-                  <a:srgbClr val="003B4F"/>
-                </a:solidFill>
-                <a:latin typeface="Courier"/>
-              </a:rPr>
-              <a:t>(</a:t>
-            </a:r>
-            <a:r>
-              <a:rPr>
-                <a:solidFill>
-                  <a:srgbClr val="AD0000"/>
-                </a:solidFill>
-                <a:latin typeface="Courier"/>
-              </a:rPr>
-              <a:t>2000</a:t>
-            </a:r>
-            <a:r>
-              <a:rPr>
-                <a:solidFill>
-                  <a:srgbClr val="003B4F"/>
-                </a:solidFill>
-                <a:latin typeface="Courier"/>
-              </a:rPr>
-              <a:t>, {</a:t>
-            </a:r>
-            <a:br/>
-            <a:br/>
-            <a:r>
-              <a:rPr>
-                <a:solidFill>
-                  <a:srgbClr val="003B4F"/>
-                </a:solidFill>
-                <a:latin typeface="Courier"/>
-              </a:rPr>
-              <a:t>  x_star &lt;- </a:t>
-            </a:r>
-            <a:r>
-              <a:rPr>
-                <a:solidFill>
-                  <a:srgbClr val="4758AB"/>
-                </a:solidFill>
-                <a:latin typeface="Courier"/>
-              </a:rPr>
-              <a:t>sample</a:t>
-            </a:r>
-            <a:r>
-              <a:rPr>
-                <a:solidFill>
-                  <a:srgbClr val="003B4F"/>
-                </a:solidFill>
-                <a:latin typeface="Courier"/>
-              </a:rPr>
-              <a:t>(</a:t>
-            </a:r>
-            <a:br/>
-            <a:r>
-              <a:rPr>
-                <a:solidFill>
-                  <a:srgbClr val="003B4F"/>
-                </a:solidFill>
-                <a:latin typeface="Courier"/>
-              </a:rPr>
-              <a:t>    tmb_df</a:t>
-            </a:r>
-            <a:r>
-              <a:rPr>
-                <a:solidFill>
-                  <a:srgbClr val="5E5E5E"/>
-                </a:solidFill>
-                <a:latin typeface="Courier"/>
-              </a:rPr>
-              <a:t>$</a:t>
-            </a:r>
-            <a:r>
-              <a:rPr>
-                <a:solidFill>
-                  <a:srgbClr val="003B4F"/>
-                </a:solidFill>
-                <a:latin typeface="Courier"/>
-              </a:rPr>
-              <a:t>tmb,</a:t>
-            </a:r>
-            <a:br/>
-            <a:r>
-              <a:rPr>
-                <a:solidFill>
-                  <a:srgbClr val="003B4F"/>
-                </a:solidFill>
-                <a:latin typeface="Courier"/>
-              </a:rPr>
-              <a:t>    </a:t>
-            </a:r>
-            <a:r>
-              <a:rPr>
-                <a:solidFill>
-                  <a:srgbClr val="657422"/>
-                </a:solidFill>
-                <a:latin typeface="Courier"/>
-              </a:rPr>
-              <a:t>size =</a:t>
-            </a:r>
-            <a:r>
-              <a:rPr>
-                <a:solidFill>
-                  <a:srgbClr val="003B4F"/>
-                </a:solidFill>
-                <a:latin typeface="Courier"/>
-              </a:rPr>
-              <a:t> </a:t>
-            </a:r>
-            <a:r>
-              <a:rPr>
-                <a:solidFill>
-                  <a:srgbClr val="4758AB"/>
-                </a:solidFill>
-                <a:latin typeface="Courier"/>
-              </a:rPr>
-              <a:t>nrow</a:t>
-            </a:r>
-            <a:r>
-              <a:rPr>
-                <a:solidFill>
-                  <a:srgbClr val="003B4F"/>
-                </a:solidFill>
-                <a:latin typeface="Courier"/>
-              </a:rPr>
-              <a:t>(tmb_df),</a:t>
-            </a:r>
-            <a:br/>
-            <a:r>
-              <a:rPr>
-                <a:solidFill>
-                  <a:srgbClr val="003B4F"/>
-                </a:solidFill>
-                <a:latin typeface="Courier"/>
-              </a:rPr>
-              <a:t>    </a:t>
-            </a:r>
-            <a:r>
-              <a:rPr>
-                <a:solidFill>
-                  <a:srgbClr val="657422"/>
-                </a:solidFill>
-                <a:latin typeface="Courier"/>
-              </a:rPr>
-              <a:t>replace =</a:t>
-            </a:r>
-            <a:r>
-              <a:rPr>
-                <a:solidFill>
-                  <a:srgbClr val="003B4F"/>
-                </a:solidFill>
-                <a:latin typeface="Courier"/>
-              </a:rPr>
-              <a:t> </a:t>
-            </a:r>
-            <a:r>
-              <a:rPr>
-                <a:solidFill>
-                  <a:srgbClr val="8F5902"/>
-                </a:solidFill>
-                <a:latin typeface="Courier"/>
-              </a:rPr>
-              <a:t>TRUE</a:t>
-            </a:r>
-            <a:br/>
-            <a:r>
-              <a:rPr>
-                <a:solidFill>
-                  <a:srgbClr val="003B4F"/>
-                </a:solidFill>
-                <a:latin typeface="Courier"/>
-              </a:rPr>
-              <a:t>  )</a:t>
-            </a:r>
-            <a:br/>
-            <a:br/>
-            <a:r>
-              <a:rPr>
-                <a:solidFill>
-                  <a:srgbClr val="003B4F"/>
-                </a:solidFill>
-                <a:latin typeface="Courier"/>
-              </a:rPr>
-              <a:t>  </a:t>
-            </a:r>
-            <a:r>
-              <a:rPr>
-                <a:solidFill>
-                  <a:srgbClr val="4758AB"/>
-                </a:solidFill>
-                <a:latin typeface="Courier"/>
-              </a:rPr>
-              <a:t>mean</a:t>
-            </a:r>
-            <a:r>
-              <a:rPr>
-                <a:solidFill>
-                  <a:srgbClr val="003B4F"/>
-                </a:solidFill>
-                <a:latin typeface="Courier"/>
-              </a:rPr>
-              <a:t>(x_star)</a:t>
-            </a:r>
-            <a:br/>
-            <a:br/>
-            <a:r>
-              <a:rPr>
-                <a:solidFill>
-                  <a:srgbClr val="003B4F"/>
-                </a:solidFill>
-                <a:latin typeface="Courier"/>
-              </a:rPr>
-              <a:t>})</a:t>
-            </a:r>
-            <a:br/>
-            <a:br/>
-            <a:r>
-              <a:rPr>
-                <a:solidFill>
-                  <a:srgbClr val="4758AB"/>
-                </a:solidFill>
-                <a:latin typeface="Courier"/>
-              </a:rPr>
-              <a:t>head</a:t>
-            </a:r>
-            <a:r>
-              <a:rPr>
-                <a:solidFill>
-                  <a:srgbClr val="003B4F"/>
-                </a:solidFill>
-                <a:latin typeface="Courier"/>
-              </a:rPr>
-              <a:t>(boot_means)</a:t>
+              <a:t>median</a:t>
+            </a:r>
+            <a:r>
+              <a:rPr>
+                <a:solidFill>
+                  <a:srgbClr val="003B4F"/>
+                </a:solidFill>
+                <a:latin typeface="Courier"/>
+              </a:rPr>
+              <a:t>(bootstrap_sample)</a:t>
             </a:r>
           </a:p>
           <a:p>
@@ -4839,7 +4604,14 @@
               <a:rPr>
                 <a:latin typeface="Courier"/>
               </a:rPr>
-              <a:t>[1] 7.447818 7.735682 7.742182 7.226182 7.382591 8.189727</a:t>
+              <a:t>[1] 7.005</a:t>
+            </a:r>
+          </a:p>
+          <a:p>
+            <a:pPr lvl="0"/>
+            <a:r>
+              <a:rPr/>
+              <a:t>represents estimators [sample mean and median TMB] from a single bootstrap sample</a:t>
             </a:r>
           </a:p>
           <a:p>
@@ -4847,80 +4619,29 @@
               <a:buNone/>
             </a:pPr>
             <a:r>
-              <a:rPr b="1"/>
-              <a:t>Notes</a:t>
-            </a:r>
-          </a:p>
-          <a:p>
-            <a:pPr lvl="0"/>
-            <a:r>
-              <a:rPr>
-                <a:latin typeface="Courier"/>
-              </a:rPr>
-              <a:t>replicate(2000, { ... })</a:t>
-            </a:r>
-            <a:r>
-              <a:rPr/>
-              <a:t> : repeats the bootstrap procedure 2000 times</a:t>
-            </a:r>
-          </a:p>
-          <a:p>
-            <a:pPr lvl="0" indent="0" marL="0">
-              <a:buNone/>
-            </a:pPr>
-            <a:r>
-              <a:rPr/>
-              <a:t>Within each iteration:</a:t>
-            </a:r>
-          </a:p>
-          <a:p>
-            <a:pPr lvl="0"/>
-            <a:r>
-              <a:rPr/>
-              <a:t>generate a bootstrap resample of TMB values</a:t>
-            </a:r>
-          </a:p>
-          <a:p>
-            <a:pPr lvl="0"/>
-            <a:r>
-              <a:rPr/>
-              <a:t>compute the sample mean TMB</a:t>
-            </a:r>
-          </a:p>
-          <a:p>
-            <a:pPr lvl="0"/>
-            <a:r>
-              <a:rPr/>
-              <a:t>return the computed value</a:t>
-            </a:r>
-          </a:p>
-          <a:p>
-            <a:pPr lvl="0" indent="0" marL="0">
-              <a:buNone/>
-            </a:pPr>
-            <a:r>
-              <a:rPr/>
-              <a:t>Result:</a:t>
-            </a:r>
-          </a:p>
-          <a:p>
-            <a:pPr lvl="0"/>
-            <a:r>
-              <a:rPr>
-                <a:latin typeface="Courier"/>
-              </a:rPr>
-              <a:t>boot_means</a:t>
-            </a:r>
-            <a:r>
-              <a:rPr/>
-              <a:t> contains 2000 bootstrap estimates</a:t>
-            </a:r>
-          </a:p>
-          <a:p>
-            <a:pPr lvl="0"/>
-            <a:r>
-              <a:rPr/>
-              <a:t>collection approximates the sampling distribution of the mean TMB</a:t>
+              <a:rPr/>
+              <a:t>After generating the resample:</a:t>
+            </a:r>
+          </a:p>
+          <a:p>
+            <a:pPr lvl="0"/>
+            <a:r>
+              <a:rPr/>
+              <a:t>compute the estimator of interest</a:t>
+            </a:r>
+          </a:p>
+          <a:p>
+            <a:pPr lvl="0"/>
+            <a:r>
+              <a:rPr/>
+              <a:t>store the result</a:t>
+            </a:r>
+          </a:p>
+          <a:p>
+            <a:pPr lvl="0"/>
+            <a:r>
+              <a:rPr/>
+              <a:t>repeat many times</a:t>
             </a:r>
           </a:p>
         </p:txBody>
@@ -4967,7 +4688,7 @@
             </a:pPr>
             <a:r>
               <a:rPr/>
-              <a:t>Convert Estimates into a Distribution</a:t>
+              <a:t>Bootstrap for the Mean TMB</a:t>
             </a:r>
           </a:p>
         </p:txBody>
@@ -4987,38 +4708,364 @@
           <a:bodyPr/>
           <a:lstStyle/>
           <a:p>
+            <a:pPr lvl="0" indent="0">
+              <a:buNone/>
+            </a:pPr>
+            <a:r>
+              <a:rPr>
+                <a:solidFill>
+                  <a:srgbClr val="4758AB"/>
+                </a:solidFill>
+                <a:latin typeface="Courier"/>
+              </a:rPr>
+              <a:t>set.seed</a:t>
+            </a:r>
+            <a:r>
+              <a:rPr>
+                <a:solidFill>
+                  <a:srgbClr val="003B4F"/>
+                </a:solidFill>
+                <a:latin typeface="Courier"/>
+              </a:rPr>
+              <a:t>(</a:t>
+            </a:r>
+            <a:r>
+              <a:rPr>
+                <a:solidFill>
+                  <a:srgbClr val="AD0000"/>
+                </a:solidFill>
+                <a:latin typeface="Courier"/>
+              </a:rPr>
+              <a:t>222</a:t>
+            </a:r>
+            <a:r>
+              <a:rPr>
+                <a:solidFill>
+                  <a:srgbClr val="003B4F"/>
+                </a:solidFill>
+                <a:latin typeface="Courier"/>
+              </a:rPr>
+              <a:t>)</a:t>
+            </a:r>
+            <a:br/>
+            <a:br/>
+            <a:r>
+              <a:rPr>
+                <a:solidFill>
+                  <a:srgbClr val="003B4F"/>
+                </a:solidFill>
+                <a:latin typeface="Courier"/>
+              </a:rPr>
+              <a:t>boot_means &lt;- </a:t>
+            </a:r>
+            <a:r>
+              <a:rPr>
+                <a:solidFill>
+                  <a:srgbClr val="4758AB"/>
+                </a:solidFill>
+                <a:latin typeface="Courier"/>
+              </a:rPr>
+              <a:t>replicate</a:t>
+            </a:r>
+            <a:r>
+              <a:rPr>
+                <a:solidFill>
+                  <a:srgbClr val="003B4F"/>
+                </a:solidFill>
+                <a:latin typeface="Courier"/>
+              </a:rPr>
+              <a:t>(</a:t>
+            </a:r>
+            <a:r>
+              <a:rPr>
+                <a:solidFill>
+                  <a:srgbClr val="AD0000"/>
+                </a:solidFill>
+                <a:latin typeface="Courier"/>
+              </a:rPr>
+              <a:t>2000</a:t>
+            </a:r>
+            <a:r>
+              <a:rPr>
+                <a:solidFill>
+                  <a:srgbClr val="003B4F"/>
+                </a:solidFill>
+                <a:latin typeface="Courier"/>
+              </a:rPr>
+              <a:t>, {</a:t>
+            </a:r>
+            <a:br/>
+            <a:br/>
+            <a:r>
+              <a:rPr>
+                <a:solidFill>
+                  <a:srgbClr val="003B4F"/>
+                </a:solidFill>
+                <a:latin typeface="Courier"/>
+              </a:rPr>
+              <a:t>  x_star &lt;- </a:t>
+            </a:r>
+            <a:r>
+              <a:rPr>
+                <a:solidFill>
+                  <a:srgbClr val="4758AB"/>
+                </a:solidFill>
+                <a:latin typeface="Courier"/>
+              </a:rPr>
+              <a:t>sample</a:t>
+            </a:r>
+            <a:r>
+              <a:rPr>
+                <a:solidFill>
+                  <a:srgbClr val="003B4F"/>
+                </a:solidFill>
+                <a:latin typeface="Courier"/>
+              </a:rPr>
+              <a:t>(</a:t>
+            </a:r>
+            <a:br/>
+            <a:r>
+              <a:rPr>
+                <a:solidFill>
+                  <a:srgbClr val="003B4F"/>
+                </a:solidFill>
+                <a:latin typeface="Courier"/>
+              </a:rPr>
+              <a:t>    tmb_df</a:t>
+            </a:r>
+            <a:r>
+              <a:rPr>
+                <a:solidFill>
+                  <a:srgbClr val="5E5E5E"/>
+                </a:solidFill>
+                <a:latin typeface="Courier"/>
+              </a:rPr>
+              <a:t>$</a:t>
+            </a:r>
+            <a:r>
+              <a:rPr>
+                <a:solidFill>
+                  <a:srgbClr val="003B4F"/>
+                </a:solidFill>
+                <a:latin typeface="Courier"/>
+              </a:rPr>
+              <a:t>tmb,</a:t>
+            </a:r>
+            <a:br/>
+            <a:r>
+              <a:rPr>
+                <a:solidFill>
+                  <a:srgbClr val="003B4F"/>
+                </a:solidFill>
+                <a:latin typeface="Courier"/>
+              </a:rPr>
+              <a:t>    </a:t>
+            </a:r>
+            <a:r>
+              <a:rPr>
+                <a:solidFill>
+                  <a:srgbClr val="657422"/>
+                </a:solidFill>
+                <a:latin typeface="Courier"/>
+              </a:rPr>
+              <a:t>size =</a:t>
+            </a:r>
+            <a:r>
+              <a:rPr>
+                <a:solidFill>
+                  <a:srgbClr val="003B4F"/>
+                </a:solidFill>
+                <a:latin typeface="Courier"/>
+              </a:rPr>
+              <a:t> </a:t>
+            </a:r>
+            <a:r>
+              <a:rPr>
+                <a:solidFill>
+                  <a:srgbClr val="4758AB"/>
+                </a:solidFill>
+                <a:latin typeface="Courier"/>
+              </a:rPr>
+              <a:t>nrow</a:t>
+            </a:r>
+            <a:r>
+              <a:rPr>
+                <a:solidFill>
+                  <a:srgbClr val="003B4F"/>
+                </a:solidFill>
+                <a:latin typeface="Courier"/>
+              </a:rPr>
+              <a:t>(tmb_df),</a:t>
+            </a:r>
+            <a:br/>
+            <a:r>
+              <a:rPr>
+                <a:solidFill>
+                  <a:srgbClr val="003B4F"/>
+                </a:solidFill>
+                <a:latin typeface="Courier"/>
+              </a:rPr>
+              <a:t>    </a:t>
+            </a:r>
+            <a:r>
+              <a:rPr>
+                <a:solidFill>
+                  <a:srgbClr val="657422"/>
+                </a:solidFill>
+                <a:latin typeface="Courier"/>
+              </a:rPr>
+              <a:t>replace =</a:t>
+            </a:r>
+            <a:r>
+              <a:rPr>
+                <a:solidFill>
+                  <a:srgbClr val="003B4F"/>
+                </a:solidFill>
+                <a:latin typeface="Courier"/>
+              </a:rPr>
+              <a:t> </a:t>
+            </a:r>
+            <a:r>
+              <a:rPr>
+                <a:solidFill>
+                  <a:srgbClr val="8F5902"/>
+                </a:solidFill>
+                <a:latin typeface="Courier"/>
+              </a:rPr>
+              <a:t>TRUE</a:t>
+            </a:r>
+            <a:br/>
+            <a:r>
+              <a:rPr>
+                <a:solidFill>
+                  <a:srgbClr val="003B4F"/>
+                </a:solidFill>
+                <a:latin typeface="Courier"/>
+              </a:rPr>
+              <a:t>  )</a:t>
+            </a:r>
+            <a:br/>
+            <a:br/>
+            <a:r>
+              <a:rPr>
+                <a:solidFill>
+                  <a:srgbClr val="003B4F"/>
+                </a:solidFill>
+                <a:latin typeface="Courier"/>
+              </a:rPr>
+              <a:t>  </a:t>
+            </a:r>
+            <a:r>
+              <a:rPr>
+                <a:solidFill>
+                  <a:srgbClr val="4758AB"/>
+                </a:solidFill>
+                <a:latin typeface="Courier"/>
+              </a:rPr>
+              <a:t>mean</a:t>
+            </a:r>
+            <a:r>
+              <a:rPr>
+                <a:solidFill>
+                  <a:srgbClr val="003B4F"/>
+                </a:solidFill>
+                <a:latin typeface="Courier"/>
+              </a:rPr>
+              <a:t>(x_star)</a:t>
+            </a:r>
+            <a:br/>
+            <a:br/>
+            <a:r>
+              <a:rPr>
+                <a:solidFill>
+                  <a:srgbClr val="003B4F"/>
+                </a:solidFill>
+                <a:latin typeface="Courier"/>
+              </a:rPr>
+              <a:t>})</a:t>
+            </a:r>
+            <a:br/>
+            <a:br/>
+            <a:r>
+              <a:rPr>
+                <a:solidFill>
+                  <a:srgbClr val="4758AB"/>
+                </a:solidFill>
+                <a:latin typeface="Courier"/>
+              </a:rPr>
+              <a:t>head</a:t>
+            </a:r>
+            <a:r>
+              <a:rPr>
+                <a:solidFill>
+                  <a:srgbClr val="003B4F"/>
+                </a:solidFill>
+                <a:latin typeface="Courier"/>
+              </a:rPr>
+              <a:t>(boot_means)</a:t>
+            </a:r>
+          </a:p>
+          <a:p>
+            <a:pPr lvl="0" indent="0">
+              <a:buNone/>
+            </a:pPr>
+            <a:r>
+              <a:rPr>
+                <a:latin typeface="Courier"/>
+              </a:rPr>
+              <a:t>[1] 7.447818 7.735682 7.742182 7.226182 7.382591 8.189727</a:t>
+            </a:r>
+          </a:p>
+          <a:p>
             <a:pPr lvl="0" indent="0" marL="0">
               <a:buNone/>
             </a:pPr>
+            <a:r>
+              <a:rPr b="1"/>
+              <a:t>Notes</a:t>
+            </a:r>
+          </a:p>
+          <a:p>
+            <a:pPr lvl="0"/>
+            <a:r>
+              <a:rPr>
+                <a:latin typeface="Courier"/>
+              </a:rPr>
+              <a:t>replicate(2000, { ... })</a:t>
+            </a:r>
+            <a:r>
+              <a:rPr/>
+              <a:t> : repeats the bootstrap procedure 2000 times</a:t>
+            </a:r>
           </a:p>
           <a:p>
             <a:pPr lvl="0" indent="0" marL="0">
               <a:buNone/>
             </a:pPr>
             <a:r>
-              <a:rPr b="1"/>
-              <a:t>Interpretation</a:t>
-            </a:r>
-          </a:p>
-          <a:p>
-            <a:pPr lvl="0"/>
-            <a:r>
-              <a:rPr/>
-              <a:t>each bar represents bootstrap-estimated mean TMB values</a:t>
-            </a:r>
-          </a:p>
-          <a:p>
-            <a:pPr lvl="0"/>
-            <a:r>
-              <a:rPr/>
-              <a:t>histogram approximates the sampling distribution of the mean</a:t>
-            </a:r>
-          </a:p>
-          <a:p>
-            <a:pPr lvl="0"/>
-            <a:r>
-              <a:rPr/>
-              <a:t>spread reflects sampling variability</a:t>
+              <a:rPr/>
+              <a:t>Within each iteration:</a:t>
+            </a:r>
+          </a:p>
+          <a:p>
+            <a:pPr lvl="0"/>
+            <a:r>
+              <a:rPr/>
+              <a:t>generate a bootstrap resample of TMB values</a:t>
+            </a:r>
+          </a:p>
+          <a:p>
+            <a:pPr lvl="0"/>
+            <a:r>
+              <a:rPr/>
+              <a:t>compute the sample mean TMB</a:t>
+            </a:r>
+          </a:p>
+          <a:p>
+            <a:pPr lvl="0"/>
+            <a:r>
+              <a:rPr/>
+              <a:t>return the computed value</a:t>
             </a:r>
           </a:p>
           <a:p>
@@ -5027,30 +5074,27 @@
             </a:pPr>
             <a:r>
               <a:rPr/>
-              <a:t>Narrow distribution:</a:t>
-            </a:r>
-          </a:p>
-          <a:p>
-            <a:pPr lvl="0"/>
-            <a:r>
-              <a:rPr/>
-              <a:t>mean TMB is relatively stable across resamples</a:t>
-            </a:r>
-          </a:p>
-          <a:p>
-            <a:pPr lvl="0" indent="0" marL="0">
-              <a:buNone/>
-            </a:pPr>
-            <a:r>
-              <a:rPr/>
-              <a:t>Wide distribution:</a:t>
-            </a:r>
-          </a:p>
-          <a:p>
-            <a:pPr lvl="0"/>
-            <a:r>
-              <a:rPr/>
-              <a:t>mean TMB varies more across resampled datasets</a:t>
+              <a:t>Result:</a:t>
+            </a:r>
+          </a:p>
+          <a:p>
+            <a:pPr lvl="0"/>
+            <a:r>
+              <a:rPr>
+                <a:latin typeface="Courier"/>
+              </a:rPr>
+              <a:t>boot_means</a:t>
+            </a:r>
+            <a:r>
+              <a:rPr/>
+              <a:t> contains 2000 bootstrap estimates</a:t>
+            </a:r>
+          </a:p>
+          <a:p>
+            <a:pPr lvl="0"/>
+            <a:r>
+              <a:rPr/>
+              <a:t>collection approximates the sampling distribution of the mean TMB</a:t>
             </a:r>
           </a:p>
         </p:txBody>
@@ -5097,7 +5141,7 @@
             </a:pPr>
             <a:r>
               <a:rPr/>
-              <a:t>Bootstrap for the Median TMB</a:t>
+              <a:t>Convert Estimates into a Distribution</a:t>
             </a:r>
           </a:p>
         </p:txBody>
@@ -5117,342 +5161,70 @@
           <a:bodyPr/>
           <a:lstStyle/>
           <a:p>
-            <a:pPr lvl="0" indent="0">
-              <a:buNone/>
-            </a:pPr>
-            <a:r>
-              <a:rPr>
-                <a:solidFill>
-                  <a:srgbClr val="4758AB"/>
-                </a:solidFill>
-                <a:latin typeface="Courier"/>
-              </a:rPr>
-              <a:t>set.seed</a:t>
-            </a:r>
-            <a:r>
-              <a:rPr>
-                <a:solidFill>
-                  <a:srgbClr val="003B4F"/>
-                </a:solidFill>
-                <a:latin typeface="Courier"/>
-              </a:rPr>
-              <a:t>(</a:t>
-            </a:r>
-            <a:r>
-              <a:rPr>
-                <a:solidFill>
-                  <a:srgbClr val="AD0000"/>
-                </a:solidFill>
-                <a:latin typeface="Courier"/>
-              </a:rPr>
-              <a:t>333</a:t>
-            </a:r>
-            <a:r>
-              <a:rPr>
-                <a:solidFill>
-                  <a:srgbClr val="003B4F"/>
-                </a:solidFill>
-                <a:latin typeface="Courier"/>
-              </a:rPr>
-              <a:t>)</a:t>
-            </a:r>
-            <a:br/>
-            <a:br/>
-            <a:r>
-              <a:rPr>
-                <a:solidFill>
-                  <a:srgbClr val="003B4F"/>
-                </a:solidFill>
-                <a:latin typeface="Courier"/>
-              </a:rPr>
-              <a:t>boot_medians &lt;- </a:t>
-            </a:r>
-            <a:r>
-              <a:rPr>
-                <a:solidFill>
-                  <a:srgbClr val="4758AB"/>
-                </a:solidFill>
-                <a:latin typeface="Courier"/>
-              </a:rPr>
-              <a:t>replicate</a:t>
-            </a:r>
-            <a:r>
-              <a:rPr>
-                <a:solidFill>
-                  <a:srgbClr val="003B4F"/>
-                </a:solidFill>
-                <a:latin typeface="Courier"/>
-              </a:rPr>
-              <a:t>(</a:t>
-            </a:r>
-            <a:r>
-              <a:rPr>
-                <a:solidFill>
-                  <a:srgbClr val="AD0000"/>
-                </a:solidFill>
-                <a:latin typeface="Courier"/>
-              </a:rPr>
-              <a:t>2000</a:t>
-            </a:r>
-            <a:r>
-              <a:rPr>
-                <a:solidFill>
-                  <a:srgbClr val="003B4F"/>
-                </a:solidFill>
-                <a:latin typeface="Courier"/>
-              </a:rPr>
-              <a:t>, {</a:t>
-            </a:r>
-            <a:br/>
-            <a:br/>
-            <a:r>
-              <a:rPr>
-                <a:solidFill>
-                  <a:srgbClr val="003B4F"/>
-                </a:solidFill>
-                <a:latin typeface="Courier"/>
-              </a:rPr>
-              <a:t>  x_star &lt;- </a:t>
-            </a:r>
-            <a:r>
-              <a:rPr>
-                <a:solidFill>
-                  <a:srgbClr val="4758AB"/>
-                </a:solidFill>
-                <a:latin typeface="Courier"/>
-              </a:rPr>
-              <a:t>sample</a:t>
-            </a:r>
-            <a:r>
-              <a:rPr>
-                <a:solidFill>
-                  <a:srgbClr val="003B4F"/>
-                </a:solidFill>
-                <a:latin typeface="Courier"/>
-              </a:rPr>
-              <a:t>(</a:t>
-            </a:r>
-            <a:br/>
-            <a:r>
-              <a:rPr>
-                <a:solidFill>
-                  <a:srgbClr val="003B4F"/>
-                </a:solidFill>
-                <a:latin typeface="Courier"/>
-              </a:rPr>
-              <a:t>    tmb_df</a:t>
-            </a:r>
-            <a:r>
-              <a:rPr>
-                <a:solidFill>
-                  <a:srgbClr val="5E5E5E"/>
-                </a:solidFill>
-                <a:latin typeface="Courier"/>
-              </a:rPr>
-              <a:t>$</a:t>
-            </a:r>
-            <a:r>
-              <a:rPr>
-                <a:solidFill>
-                  <a:srgbClr val="003B4F"/>
-                </a:solidFill>
-                <a:latin typeface="Courier"/>
-              </a:rPr>
-              <a:t>tmb,</a:t>
-            </a:r>
-            <a:br/>
-            <a:r>
-              <a:rPr>
-                <a:solidFill>
-                  <a:srgbClr val="003B4F"/>
-                </a:solidFill>
-                <a:latin typeface="Courier"/>
-              </a:rPr>
-              <a:t>    </a:t>
-            </a:r>
-            <a:r>
-              <a:rPr>
-                <a:solidFill>
-                  <a:srgbClr val="657422"/>
-                </a:solidFill>
-                <a:latin typeface="Courier"/>
-              </a:rPr>
-              <a:t>size =</a:t>
-            </a:r>
-            <a:r>
-              <a:rPr>
-                <a:solidFill>
-                  <a:srgbClr val="003B4F"/>
-                </a:solidFill>
-                <a:latin typeface="Courier"/>
-              </a:rPr>
-              <a:t> </a:t>
-            </a:r>
-            <a:r>
-              <a:rPr>
-                <a:solidFill>
-                  <a:srgbClr val="4758AB"/>
-                </a:solidFill>
-                <a:latin typeface="Courier"/>
-              </a:rPr>
-              <a:t>nrow</a:t>
-            </a:r>
-            <a:r>
-              <a:rPr>
-                <a:solidFill>
-                  <a:srgbClr val="003B4F"/>
-                </a:solidFill>
-                <a:latin typeface="Courier"/>
-              </a:rPr>
-              <a:t>(tmb_df),</a:t>
-            </a:r>
-            <a:br/>
-            <a:r>
-              <a:rPr>
-                <a:solidFill>
-                  <a:srgbClr val="003B4F"/>
-                </a:solidFill>
-                <a:latin typeface="Courier"/>
-              </a:rPr>
-              <a:t>    </a:t>
-            </a:r>
-            <a:r>
-              <a:rPr>
-                <a:solidFill>
-                  <a:srgbClr val="657422"/>
-                </a:solidFill>
-                <a:latin typeface="Courier"/>
-              </a:rPr>
-              <a:t>replace =</a:t>
-            </a:r>
-            <a:r>
-              <a:rPr>
-                <a:solidFill>
-                  <a:srgbClr val="003B4F"/>
-                </a:solidFill>
-                <a:latin typeface="Courier"/>
-              </a:rPr>
-              <a:t> </a:t>
-            </a:r>
-            <a:r>
-              <a:rPr>
-                <a:solidFill>
-                  <a:srgbClr val="8F5902"/>
-                </a:solidFill>
-                <a:latin typeface="Courier"/>
-              </a:rPr>
-              <a:t>TRUE</a:t>
-            </a:r>
-            <a:br/>
-            <a:r>
-              <a:rPr>
-                <a:solidFill>
-                  <a:srgbClr val="003B4F"/>
-                </a:solidFill>
-                <a:latin typeface="Courier"/>
-              </a:rPr>
-              <a:t>  )</a:t>
-            </a:r>
-            <a:br/>
-            <a:br/>
-            <a:r>
-              <a:rPr>
-                <a:solidFill>
-                  <a:srgbClr val="003B4F"/>
-                </a:solidFill>
-                <a:latin typeface="Courier"/>
-              </a:rPr>
-              <a:t>  </a:t>
-            </a:r>
-            <a:r>
-              <a:rPr>
-                <a:solidFill>
-                  <a:srgbClr val="4758AB"/>
-                </a:solidFill>
-                <a:latin typeface="Courier"/>
-              </a:rPr>
-              <a:t>median</a:t>
-            </a:r>
-            <a:r>
-              <a:rPr>
-                <a:solidFill>
-                  <a:srgbClr val="003B4F"/>
-                </a:solidFill>
-                <a:latin typeface="Courier"/>
-              </a:rPr>
-              <a:t>(x_star)</a:t>
-            </a:r>
-            <a:br/>
-            <a:br/>
-            <a:r>
-              <a:rPr>
-                <a:solidFill>
-                  <a:srgbClr val="003B4F"/>
-                </a:solidFill>
-                <a:latin typeface="Courier"/>
-              </a:rPr>
-              <a:t>})</a:t>
-            </a:r>
-            <a:br/>
-            <a:br/>
-            <a:r>
-              <a:rPr>
-                <a:solidFill>
-                  <a:srgbClr val="4758AB"/>
-                </a:solidFill>
-                <a:latin typeface="Courier"/>
-              </a:rPr>
-              <a:t>head</a:t>
-            </a:r>
-            <a:r>
-              <a:rPr>
-                <a:solidFill>
-                  <a:srgbClr val="003B4F"/>
-                </a:solidFill>
-                <a:latin typeface="Courier"/>
-              </a:rPr>
-              <a:t>(boot_medians)</a:t>
-            </a:r>
-          </a:p>
-          <a:p>
-            <a:pPr lvl="0" indent="0">
-              <a:buNone/>
-            </a:pPr>
-            <a:r>
-              <a:rPr>
-                <a:latin typeface="Courier"/>
-              </a:rPr>
-              <a:t>[1] 6.515 6.985 7.150 5.970 7.070 6.730</a:t>
-            </a:r>
-          </a:p>
-          <a:p>
             <a:pPr lvl="0" indent="0" marL="0">
               <a:buNone/>
             </a:pPr>
+          </a:p>
+          <a:p>
+            <a:pPr lvl="0" indent="0" marL="0">
+              <a:buNone/>
+            </a:pPr>
             <a:r>
               <a:rPr b="1"/>
-              <a:t>Notes</a:t>
-            </a:r>
-          </a:p>
-          <a:p>
-            <a:pPr lvl="0"/>
-            <a:r>
-              <a:rPr/>
-              <a:t>code repeats the same bootstrap procedure for median</a:t>
-            </a:r>
-          </a:p>
-          <a:p>
-            <a:pPr lvl="0"/>
-            <a:r>
-              <a:rPr/>
-              <a:t>boot_medians contains 2000 bootstrap median TMB estimates</a:t>
-            </a:r>
-          </a:p>
-          <a:p>
-            <a:pPr lvl="0"/>
-            <a:r>
-              <a:rPr/>
-              <a:t>distribution approximates the sampling distribution of the median TMB</a:t>
+              <a:t>Interpretation</a:t>
+            </a:r>
+          </a:p>
+          <a:p>
+            <a:pPr lvl="0"/>
+            <a:r>
+              <a:rPr/>
+              <a:t>each bar represents bootstrap-estimated mean TMB values</a:t>
+            </a:r>
+          </a:p>
+          <a:p>
+            <a:pPr lvl="0"/>
+            <a:r>
+              <a:rPr/>
+              <a:t>histogram approximates the sampling distribution of the mean</a:t>
+            </a:r>
+          </a:p>
+          <a:p>
+            <a:pPr lvl="0"/>
+            <a:r>
+              <a:rPr/>
+              <a:t>spread reflects sampling variability</a:t>
+            </a:r>
+          </a:p>
+          <a:p>
+            <a:pPr lvl="0" indent="0" marL="0">
+              <a:buNone/>
+            </a:pPr>
+            <a:r>
+              <a:rPr/>
+              <a:t>Narrow distribution:</a:t>
+            </a:r>
+          </a:p>
+          <a:p>
+            <a:pPr lvl="0"/>
+            <a:r>
+              <a:rPr/>
+              <a:t>mean TMB is relatively stable across resamples</a:t>
+            </a:r>
+          </a:p>
+          <a:p>
+            <a:pPr lvl="0" indent="0" marL="0">
+              <a:buNone/>
+            </a:pPr>
+            <a:r>
+              <a:rPr/>
+              <a:t>Wide distribution:</a:t>
+            </a:r>
+          </a:p>
+          <a:p>
+            <a:pPr lvl="0"/>
+            <a:r>
+              <a:rPr/>
+              <a:t>mean TMB varies more across resampled datasets</a:t>
             </a:r>
           </a:p>
         </p:txBody>
@@ -5598,7 +5370,7 @@
             </a:pPr>
             <a:r>
               <a:rPr/>
-              <a:t>Convert Estimates into a Distribution</a:t>
+              <a:t>Bootstrap for the Median TMB</a:t>
             </a:r>
           </a:p>
         </p:txBody>
@@ -5618,52 +5390,342 @@
           <a:bodyPr/>
           <a:lstStyle/>
           <a:p>
+            <a:pPr lvl="0" indent="0">
+              <a:buNone/>
+            </a:pPr>
+            <a:r>
+              <a:rPr>
+                <a:solidFill>
+                  <a:srgbClr val="4758AB"/>
+                </a:solidFill>
+                <a:latin typeface="Courier"/>
+              </a:rPr>
+              <a:t>set.seed</a:t>
+            </a:r>
+            <a:r>
+              <a:rPr>
+                <a:solidFill>
+                  <a:srgbClr val="003B4F"/>
+                </a:solidFill>
+                <a:latin typeface="Courier"/>
+              </a:rPr>
+              <a:t>(</a:t>
+            </a:r>
+            <a:r>
+              <a:rPr>
+                <a:solidFill>
+                  <a:srgbClr val="AD0000"/>
+                </a:solidFill>
+                <a:latin typeface="Courier"/>
+              </a:rPr>
+              <a:t>333</a:t>
+            </a:r>
+            <a:r>
+              <a:rPr>
+                <a:solidFill>
+                  <a:srgbClr val="003B4F"/>
+                </a:solidFill>
+                <a:latin typeface="Courier"/>
+              </a:rPr>
+              <a:t>)</a:t>
+            </a:r>
+            <a:br/>
+            <a:br/>
+            <a:r>
+              <a:rPr>
+                <a:solidFill>
+                  <a:srgbClr val="003B4F"/>
+                </a:solidFill>
+                <a:latin typeface="Courier"/>
+              </a:rPr>
+              <a:t>boot_medians &lt;- </a:t>
+            </a:r>
+            <a:r>
+              <a:rPr>
+                <a:solidFill>
+                  <a:srgbClr val="4758AB"/>
+                </a:solidFill>
+                <a:latin typeface="Courier"/>
+              </a:rPr>
+              <a:t>replicate</a:t>
+            </a:r>
+            <a:r>
+              <a:rPr>
+                <a:solidFill>
+                  <a:srgbClr val="003B4F"/>
+                </a:solidFill>
+                <a:latin typeface="Courier"/>
+              </a:rPr>
+              <a:t>(</a:t>
+            </a:r>
+            <a:r>
+              <a:rPr>
+                <a:solidFill>
+                  <a:srgbClr val="AD0000"/>
+                </a:solidFill>
+                <a:latin typeface="Courier"/>
+              </a:rPr>
+              <a:t>2000</a:t>
+            </a:r>
+            <a:r>
+              <a:rPr>
+                <a:solidFill>
+                  <a:srgbClr val="003B4F"/>
+                </a:solidFill>
+                <a:latin typeface="Courier"/>
+              </a:rPr>
+              <a:t>, {</a:t>
+            </a:r>
+            <a:br/>
+            <a:br/>
+            <a:r>
+              <a:rPr>
+                <a:solidFill>
+                  <a:srgbClr val="003B4F"/>
+                </a:solidFill>
+                <a:latin typeface="Courier"/>
+              </a:rPr>
+              <a:t>  x_star &lt;- </a:t>
+            </a:r>
+            <a:r>
+              <a:rPr>
+                <a:solidFill>
+                  <a:srgbClr val="4758AB"/>
+                </a:solidFill>
+                <a:latin typeface="Courier"/>
+              </a:rPr>
+              <a:t>sample</a:t>
+            </a:r>
+            <a:r>
+              <a:rPr>
+                <a:solidFill>
+                  <a:srgbClr val="003B4F"/>
+                </a:solidFill>
+                <a:latin typeface="Courier"/>
+              </a:rPr>
+              <a:t>(</a:t>
+            </a:r>
+            <a:br/>
+            <a:r>
+              <a:rPr>
+                <a:solidFill>
+                  <a:srgbClr val="003B4F"/>
+                </a:solidFill>
+                <a:latin typeface="Courier"/>
+              </a:rPr>
+              <a:t>    tmb_df</a:t>
+            </a:r>
+            <a:r>
+              <a:rPr>
+                <a:solidFill>
+                  <a:srgbClr val="5E5E5E"/>
+                </a:solidFill>
+                <a:latin typeface="Courier"/>
+              </a:rPr>
+              <a:t>$</a:t>
+            </a:r>
+            <a:r>
+              <a:rPr>
+                <a:solidFill>
+                  <a:srgbClr val="003B4F"/>
+                </a:solidFill>
+                <a:latin typeface="Courier"/>
+              </a:rPr>
+              <a:t>tmb,</a:t>
+            </a:r>
+            <a:br/>
+            <a:r>
+              <a:rPr>
+                <a:solidFill>
+                  <a:srgbClr val="003B4F"/>
+                </a:solidFill>
+                <a:latin typeface="Courier"/>
+              </a:rPr>
+              <a:t>    </a:t>
+            </a:r>
+            <a:r>
+              <a:rPr>
+                <a:solidFill>
+                  <a:srgbClr val="657422"/>
+                </a:solidFill>
+                <a:latin typeface="Courier"/>
+              </a:rPr>
+              <a:t>size =</a:t>
+            </a:r>
+            <a:r>
+              <a:rPr>
+                <a:solidFill>
+                  <a:srgbClr val="003B4F"/>
+                </a:solidFill>
+                <a:latin typeface="Courier"/>
+              </a:rPr>
+              <a:t> </a:t>
+            </a:r>
+            <a:r>
+              <a:rPr>
+                <a:solidFill>
+                  <a:srgbClr val="4758AB"/>
+                </a:solidFill>
+                <a:latin typeface="Courier"/>
+              </a:rPr>
+              <a:t>nrow</a:t>
+            </a:r>
+            <a:r>
+              <a:rPr>
+                <a:solidFill>
+                  <a:srgbClr val="003B4F"/>
+                </a:solidFill>
+                <a:latin typeface="Courier"/>
+              </a:rPr>
+              <a:t>(tmb_df),</a:t>
+            </a:r>
+            <a:br/>
+            <a:r>
+              <a:rPr>
+                <a:solidFill>
+                  <a:srgbClr val="003B4F"/>
+                </a:solidFill>
+                <a:latin typeface="Courier"/>
+              </a:rPr>
+              <a:t>    </a:t>
+            </a:r>
+            <a:r>
+              <a:rPr>
+                <a:solidFill>
+                  <a:srgbClr val="657422"/>
+                </a:solidFill>
+                <a:latin typeface="Courier"/>
+              </a:rPr>
+              <a:t>replace =</a:t>
+            </a:r>
+            <a:r>
+              <a:rPr>
+                <a:solidFill>
+                  <a:srgbClr val="003B4F"/>
+                </a:solidFill>
+                <a:latin typeface="Courier"/>
+              </a:rPr>
+              <a:t> </a:t>
+            </a:r>
+            <a:r>
+              <a:rPr>
+                <a:solidFill>
+                  <a:srgbClr val="8F5902"/>
+                </a:solidFill>
+                <a:latin typeface="Courier"/>
+              </a:rPr>
+              <a:t>TRUE</a:t>
+            </a:r>
+            <a:br/>
+            <a:r>
+              <a:rPr>
+                <a:solidFill>
+                  <a:srgbClr val="003B4F"/>
+                </a:solidFill>
+                <a:latin typeface="Courier"/>
+              </a:rPr>
+              <a:t>  )</a:t>
+            </a:r>
+            <a:br/>
+            <a:br/>
+            <a:r>
+              <a:rPr>
+                <a:solidFill>
+                  <a:srgbClr val="003B4F"/>
+                </a:solidFill>
+                <a:latin typeface="Courier"/>
+              </a:rPr>
+              <a:t>  </a:t>
+            </a:r>
+            <a:r>
+              <a:rPr>
+                <a:solidFill>
+                  <a:srgbClr val="4758AB"/>
+                </a:solidFill>
+                <a:latin typeface="Courier"/>
+              </a:rPr>
+              <a:t>median</a:t>
+            </a:r>
+            <a:r>
+              <a:rPr>
+                <a:solidFill>
+                  <a:srgbClr val="003B4F"/>
+                </a:solidFill>
+                <a:latin typeface="Courier"/>
+              </a:rPr>
+              <a:t>(x_star)</a:t>
+            </a:r>
+            <a:br/>
+            <a:br/>
+            <a:r>
+              <a:rPr>
+                <a:solidFill>
+                  <a:srgbClr val="003B4F"/>
+                </a:solidFill>
+                <a:latin typeface="Courier"/>
+              </a:rPr>
+              <a:t>})</a:t>
+            </a:r>
+            <a:br/>
+            <a:br/>
+            <a:r>
+              <a:rPr>
+                <a:solidFill>
+                  <a:srgbClr val="4758AB"/>
+                </a:solidFill>
+                <a:latin typeface="Courier"/>
+              </a:rPr>
+              <a:t>head</a:t>
+            </a:r>
+            <a:r>
+              <a:rPr>
+                <a:solidFill>
+                  <a:srgbClr val="003B4F"/>
+                </a:solidFill>
+                <a:latin typeface="Courier"/>
+              </a:rPr>
+              <a:t>(boot_medians)</a:t>
+            </a:r>
+          </a:p>
+          <a:p>
+            <a:pPr lvl="0" indent="0">
+              <a:buNone/>
+            </a:pPr>
+            <a:r>
+              <a:rPr>
+                <a:latin typeface="Courier"/>
+              </a:rPr>
+              <a:t>[1] 6.515 6.985 7.150 5.970 7.070 6.730</a:t>
+            </a:r>
+          </a:p>
+          <a:p>
             <a:pPr lvl="0" indent="0" marL="0">
               <a:buNone/>
             </a:pPr>
-          </a:p>
-          <a:p>
-            <a:pPr lvl="0" indent="0" marL="0">
-              <a:buNone/>
-            </a:pPr>
             <a:r>
               <a:rPr b="1"/>
-              <a:t>Interpretation</a:t>
-            </a:r>
-          </a:p>
-          <a:p>
-            <a:pPr lvl="0"/>
-            <a:r>
-              <a:rPr/>
-              <a:t>each bar represents bootstrap-estimated median TMB values</a:t>
-            </a:r>
-          </a:p>
-          <a:p>
-            <a:pPr lvl="0"/>
-            <a:r>
-              <a:rPr/>
-              <a:t>histogram approximates the sampling distribution of the median</a:t>
-            </a:r>
-          </a:p>
-          <a:p>
-            <a:pPr lvl="0"/>
-            <a:r>
-              <a:rPr/>
-              <a:t>spread reflects how much the median changes across resamples</a:t>
-            </a:r>
-          </a:p>
-          <a:p>
-            <a:pPr lvl="0"/>
-            <a:r>
-              <a:rPr/>
-              <a:t>median is less affected by extreme high TMB values</a:t>
-            </a:r>
-          </a:p>
-          <a:p>
-            <a:pPr lvl="0"/>
-            <a:r>
-              <a:rPr/>
-              <a:t>bootstrap helps quantify uncertainty for this robust estimator</a:t>
+              <a:t>Notes</a:t>
+            </a:r>
+          </a:p>
+          <a:p>
+            <a:pPr lvl="0"/>
+            <a:r>
+              <a:rPr/>
+              <a:t>code repeats the same bootstrap procedure for median</a:t>
+            </a:r>
+          </a:p>
+          <a:p>
+            <a:pPr lvl="0"/>
+            <a:r>
+              <a:rPr/>
+              <a:t>boot_medians contains 2000 bootstrap median TMB estimates</a:t>
+            </a:r>
+          </a:p>
+          <a:p>
+            <a:pPr lvl="0"/>
+            <a:r>
+              <a:rPr/>
+              <a:t>distribution approximates the sampling distribution of the median TMB</a:t>
             </a:r>
           </a:p>
         </p:txBody>
@@ -5674,6 +5736,118 @@
 </file>
 
 <file path=ppt/slides/slide21.xml><?xml version="1.0" encoding="utf-8"?>
+<p:sld xmlns:a="http://schemas.openxmlformats.org/drawingml/2006/main" xmlns:r="http://schemas.openxmlformats.org/officeDocument/2006/relationships" xmlns:p="http://schemas.openxmlformats.org/presentationml/2006/main">
+  <p:cSld>
+    <p:spTree>
+      <p:nvGrpSpPr>
+        <p:cNvPr id="1" name=""/>
+        <p:cNvGrpSpPr/>
+        <p:nvPr/>
+      </p:nvGrpSpPr>
+      <p:grpSpPr>
+        <a:xfrm>
+          <a:off x="0" y="0"/>
+          <a:ext cx="0" cy="0"/>
+          <a:chOff x="0" y="0"/>
+          <a:chExt cx="0" cy="0"/>
+        </a:xfrm>
+      </p:grpSpPr>
+      <p:sp>
+        <p:nvSpPr>
+          <p:cNvPr id="2" name="Title 1"/>
+          <p:cNvSpPr>
+            <a:spLocks noGrp="1"/>
+          </p:cNvSpPr>
+          <p:nvPr>
+            <p:ph type="title"/>
+          </p:nvPr>
+        </p:nvSpPr>
+        <p:spPr/>
+        <p:txBody>
+          <a:bodyPr/>
+          <a:lstStyle/>
+          <a:p>
+            <a:pPr lvl="0" indent="0" marL="0">
+              <a:buNone/>
+            </a:pPr>
+            <a:r>
+              <a:rPr/>
+              <a:t>Convert Estimates into a Distribution</a:t>
+            </a:r>
+          </a:p>
+        </p:txBody>
+      </p:sp>
+      <p:sp>
+        <p:nvSpPr>
+          <p:cNvPr id="3" name="Content Placeholder 2"/>
+          <p:cNvSpPr>
+            <a:spLocks noGrp="1"/>
+          </p:cNvSpPr>
+          <p:nvPr>
+            <p:ph idx="1"/>
+          </p:nvPr>
+        </p:nvSpPr>
+        <p:spPr/>
+        <p:txBody>
+          <a:bodyPr/>
+          <a:lstStyle/>
+          <a:p>
+            <a:pPr lvl="0" indent="0" marL="0">
+              <a:buNone/>
+            </a:pPr>
+          </a:p>
+          <a:p>
+            <a:pPr lvl="0" indent="0" marL="0">
+              <a:buNone/>
+            </a:pPr>
+            <a:r>
+              <a:rPr b="1"/>
+              <a:t>Interpretation</a:t>
+            </a:r>
+          </a:p>
+          <a:p>
+            <a:pPr lvl="0"/>
+            <a:r>
+              <a:rPr/>
+              <a:t>each bar represents bootstrap-estimated median TMB values</a:t>
+            </a:r>
+          </a:p>
+          <a:p>
+            <a:pPr lvl="0"/>
+            <a:r>
+              <a:rPr/>
+              <a:t>histogram approximates the sampling distribution of the median</a:t>
+            </a:r>
+          </a:p>
+          <a:p>
+            <a:pPr lvl="0"/>
+            <a:r>
+              <a:rPr/>
+              <a:t>spread reflects how much the median changes across resamples</a:t>
+            </a:r>
+          </a:p>
+          <a:p>
+            <a:pPr lvl="0"/>
+            <a:r>
+              <a:rPr/>
+              <a:t>median is less affected by extreme high TMB values</a:t>
+            </a:r>
+          </a:p>
+          <a:p>
+            <a:pPr lvl="0"/>
+            <a:r>
+              <a:rPr/>
+              <a:t>bootstrap helps quantify uncertainty for this robust estimator</a:t>
+            </a:r>
+          </a:p>
+        </p:txBody>
+      </p:sp>
+    </p:spTree>
+  </p:cSld>
+</p:sld>
+</file>
+
+<file path=ppt/slides/slide22.xml><?xml version="1.0" encoding="utf-8"?>
 <p:sld xmlns:a="http://schemas.openxmlformats.org/drawingml/2006/main" xmlns:r="http://schemas.openxmlformats.org/officeDocument/2006/relationships" xmlns:p="http://schemas.openxmlformats.org/presentationml/2006/main">
   <p:cSld>
     <p:spTree>
@@ -6259,685 +6433,6 @@
 </p:sld>
 </file>
 
-<file path=ppt/slides/slide22.xml><?xml version="1.0" encoding="utf-8"?>
-<p:sld xmlns:a="http://schemas.openxmlformats.org/drawingml/2006/main" xmlns:r="http://schemas.openxmlformats.org/officeDocument/2006/relationships" xmlns:p="http://schemas.openxmlformats.org/presentationml/2006/main">
-  <p:cSld>
-    <p:spTree>
-      <p:nvGrpSpPr>
-        <p:cNvPr id="1" name=""/>
-        <p:cNvGrpSpPr/>
-        <p:nvPr/>
-      </p:nvGrpSpPr>
-      <p:grpSpPr>
-        <a:xfrm>
-          <a:off x="0" y="0"/>
-          <a:ext cx="0" cy="0"/>
-          <a:chOff x="0" y="0"/>
-          <a:chExt cx="0" cy="0"/>
-        </a:xfrm>
-      </p:grpSpPr>
-      <p:sp>
-        <p:nvSpPr>
-          <p:cNvPr id="2" name="Title 1"/>
-          <p:cNvSpPr>
-            <a:spLocks noGrp="1"/>
-          </p:cNvSpPr>
-          <p:nvPr>
-            <p:ph type="title"/>
-          </p:nvPr>
-        </p:nvSpPr>
-        <p:spPr/>
-        <p:txBody>
-          <a:bodyPr/>
-          <a:lstStyle/>
-          <a:p>
-            <a:pPr lvl="0" indent="0" marL="0">
-              <a:buNone/>
-            </a:pPr>
-            <a:r>
-              <a:rPr/>
-              <a:t>Bootstrap Confidence Interval</a:t>
-            </a:r>
-          </a:p>
-        </p:txBody>
-      </p:sp>
-      <p:sp>
-        <p:nvSpPr>
-          <p:cNvPr id="3" name="Content Placeholder 2"/>
-          <p:cNvSpPr>
-            <a:spLocks noGrp="1"/>
-          </p:cNvSpPr>
-          <p:nvPr>
-            <p:ph idx="1"/>
-          </p:nvPr>
-        </p:nvSpPr>
-        <p:spPr/>
-        <p:txBody>
-          <a:bodyPr/>
-          <a:lstStyle/>
-          <a:p>
-            <a:pPr lvl="0" indent="0">
-              <a:buNone/>
-            </a:pPr>
-            <a:r>
-              <a:rPr>
-                <a:solidFill>
-                  <a:srgbClr val="003B4F"/>
-                </a:solidFill>
-                <a:latin typeface="Courier"/>
-              </a:rPr>
-              <a:t>mean_ci &lt;- </a:t>
-            </a:r>
-            <a:r>
-              <a:rPr>
-                <a:solidFill>
-                  <a:srgbClr val="4758AB"/>
-                </a:solidFill>
-                <a:latin typeface="Courier"/>
-              </a:rPr>
-              <a:t>quantile</a:t>
-            </a:r>
-            <a:r>
-              <a:rPr>
-                <a:solidFill>
-                  <a:srgbClr val="003B4F"/>
-                </a:solidFill>
-                <a:latin typeface="Courier"/>
-              </a:rPr>
-              <a:t>(</a:t>
-            </a:r>
-            <a:br/>
-            <a:r>
-              <a:rPr>
-                <a:solidFill>
-                  <a:srgbClr val="003B4F"/>
-                </a:solidFill>
-                <a:latin typeface="Courier"/>
-              </a:rPr>
-              <a:t>  boot_means,</a:t>
-            </a:r>
-            <a:br/>
-            <a:r>
-              <a:rPr>
-                <a:solidFill>
-                  <a:srgbClr val="003B4F"/>
-                </a:solidFill>
-                <a:latin typeface="Courier"/>
-              </a:rPr>
-              <a:t>  </a:t>
-            </a:r>
-            <a:r>
-              <a:rPr>
-                <a:solidFill>
-                  <a:srgbClr val="657422"/>
-                </a:solidFill>
-                <a:latin typeface="Courier"/>
-              </a:rPr>
-              <a:t>probs =</a:t>
-            </a:r>
-            <a:r>
-              <a:rPr>
-                <a:solidFill>
-                  <a:srgbClr val="003B4F"/>
-                </a:solidFill>
-                <a:latin typeface="Courier"/>
-              </a:rPr>
-              <a:t> </a:t>
-            </a:r>
-            <a:r>
-              <a:rPr>
-                <a:solidFill>
-                  <a:srgbClr val="4758AB"/>
-                </a:solidFill>
-                <a:latin typeface="Courier"/>
-              </a:rPr>
-              <a:t>c</a:t>
-            </a:r>
-            <a:r>
-              <a:rPr>
-                <a:solidFill>
-                  <a:srgbClr val="003B4F"/>
-                </a:solidFill>
-                <a:latin typeface="Courier"/>
-              </a:rPr>
-              <a:t>(</a:t>
-            </a:r>
-            <a:r>
-              <a:rPr>
-                <a:solidFill>
-                  <a:srgbClr val="AD0000"/>
-                </a:solidFill>
-                <a:latin typeface="Courier"/>
-              </a:rPr>
-              <a:t>0.025</a:t>
-            </a:r>
-            <a:r>
-              <a:rPr>
-                <a:solidFill>
-                  <a:srgbClr val="003B4F"/>
-                </a:solidFill>
-                <a:latin typeface="Courier"/>
-              </a:rPr>
-              <a:t>, </a:t>
-            </a:r>
-            <a:r>
-              <a:rPr>
-                <a:solidFill>
-                  <a:srgbClr val="AD0000"/>
-                </a:solidFill>
-                <a:latin typeface="Courier"/>
-              </a:rPr>
-              <a:t>0.975</a:t>
-            </a:r>
-            <a:r>
-              <a:rPr>
-                <a:solidFill>
-                  <a:srgbClr val="003B4F"/>
-                </a:solidFill>
-                <a:latin typeface="Courier"/>
-              </a:rPr>
-              <a:t>)</a:t>
-            </a:r>
-            <a:br/>
-            <a:r>
-              <a:rPr>
-                <a:solidFill>
-                  <a:srgbClr val="003B4F"/>
-                </a:solidFill>
-                <a:latin typeface="Courier"/>
-              </a:rPr>
-              <a:t>)</a:t>
-            </a:r>
-            <a:br/>
-            <a:br/>
-            <a:r>
-              <a:rPr>
-                <a:solidFill>
-                  <a:srgbClr val="003B4F"/>
-                </a:solidFill>
-                <a:latin typeface="Courier"/>
-              </a:rPr>
-              <a:t>median_ci &lt;- </a:t>
-            </a:r>
-            <a:r>
-              <a:rPr>
-                <a:solidFill>
-                  <a:srgbClr val="4758AB"/>
-                </a:solidFill>
-                <a:latin typeface="Courier"/>
-              </a:rPr>
-              <a:t>quantile</a:t>
-            </a:r>
-            <a:r>
-              <a:rPr>
-                <a:solidFill>
-                  <a:srgbClr val="003B4F"/>
-                </a:solidFill>
-                <a:latin typeface="Courier"/>
-              </a:rPr>
-              <a:t>(</a:t>
-            </a:r>
-            <a:br/>
-            <a:r>
-              <a:rPr>
-                <a:solidFill>
-                  <a:srgbClr val="003B4F"/>
-                </a:solidFill>
-                <a:latin typeface="Courier"/>
-              </a:rPr>
-              <a:t>  boot_medians,</a:t>
-            </a:r>
-            <a:br/>
-            <a:r>
-              <a:rPr>
-                <a:solidFill>
-                  <a:srgbClr val="003B4F"/>
-                </a:solidFill>
-                <a:latin typeface="Courier"/>
-              </a:rPr>
-              <a:t>  </a:t>
-            </a:r>
-            <a:r>
-              <a:rPr>
-                <a:solidFill>
-                  <a:srgbClr val="657422"/>
-                </a:solidFill>
-                <a:latin typeface="Courier"/>
-              </a:rPr>
-              <a:t>probs =</a:t>
-            </a:r>
-            <a:r>
-              <a:rPr>
-                <a:solidFill>
-                  <a:srgbClr val="003B4F"/>
-                </a:solidFill>
-                <a:latin typeface="Courier"/>
-              </a:rPr>
-              <a:t> </a:t>
-            </a:r>
-            <a:r>
-              <a:rPr>
-                <a:solidFill>
-                  <a:srgbClr val="4758AB"/>
-                </a:solidFill>
-                <a:latin typeface="Courier"/>
-              </a:rPr>
-              <a:t>c</a:t>
-            </a:r>
-            <a:r>
-              <a:rPr>
-                <a:solidFill>
-                  <a:srgbClr val="003B4F"/>
-                </a:solidFill>
-                <a:latin typeface="Courier"/>
-              </a:rPr>
-              <a:t>(</a:t>
-            </a:r>
-            <a:r>
-              <a:rPr>
-                <a:solidFill>
-                  <a:srgbClr val="AD0000"/>
-                </a:solidFill>
-                <a:latin typeface="Courier"/>
-              </a:rPr>
-              <a:t>0.025</a:t>
-            </a:r>
-            <a:r>
-              <a:rPr>
-                <a:solidFill>
-                  <a:srgbClr val="003B4F"/>
-                </a:solidFill>
-                <a:latin typeface="Courier"/>
-              </a:rPr>
-              <a:t>, </a:t>
-            </a:r>
-            <a:r>
-              <a:rPr>
-                <a:solidFill>
-                  <a:srgbClr val="AD0000"/>
-                </a:solidFill>
-                <a:latin typeface="Courier"/>
-              </a:rPr>
-              <a:t>0.975</a:t>
-            </a:r>
-            <a:r>
-              <a:rPr>
-                <a:solidFill>
-                  <a:srgbClr val="003B4F"/>
-                </a:solidFill>
-                <a:latin typeface="Courier"/>
-              </a:rPr>
-              <a:t>)</a:t>
-            </a:r>
-            <a:br/>
-            <a:r>
-              <a:rPr>
-                <a:solidFill>
-                  <a:srgbClr val="003B4F"/>
-                </a:solidFill>
-                <a:latin typeface="Courier"/>
-              </a:rPr>
-              <a:t>)</a:t>
-            </a:r>
-            <a:br/>
-            <a:br/>
-            <a:r>
-              <a:rPr>
-                <a:solidFill>
-                  <a:srgbClr val="4758AB"/>
-                </a:solidFill>
-                <a:latin typeface="Courier"/>
-              </a:rPr>
-              <a:t>tibble</a:t>
-            </a:r>
-            <a:r>
-              <a:rPr>
-                <a:solidFill>
-                  <a:srgbClr val="003B4F"/>
-                </a:solidFill>
-                <a:latin typeface="Courier"/>
-              </a:rPr>
-              <a:t>(</a:t>
-            </a:r>
-            <a:br/>
-            <a:r>
-              <a:rPr>
-                <a:solidFill>
-                  <a:srgbClr val="003B4F"/>
-                </a:solidFill>
-                <a:latin typeface="Courier"/>
-              </a:rPr>
-              <a:t>  </a:t>
-            </a:r>
-            <a:r>
-              <a:rPr>
-                <a:solidFill>
-                  <a:srgbClr val="657422"/>
-                </a:solidFill>
-                <a:latin typeface="Courier"/>
-              </a:rPr>
-              <a:t>estimator =</a:t>
-            </a:r>
-            <a:r>
-              <a:rPr>
-                <a:solidFill>
-                  <a:srgbClr val="003B4F"/>
-                </a:solidFill>
-                <a:latin typeface="Courier"/>
-              </a:rPr>
-              <a:t> </a:t>
-            </a:r>
-            <a:r>
-              <a:rPr>
-                <a:solidFill>
-                  <a:srgbClr val="4758AB"/>
-                </a:solidFill>
-                <a:latin typeface="Courier"/>
-              </a:rPr>
-              <a:t>c</a:t>
-            </a:r>
-            <a:r>
-              <a:rPr>
-                <a:solidFill>
-                  <a:srgbClr val="003B4F"/>
-                </a:solidFill>
-                <a:latin typeface="Courier"/>
-              </a:rPr>
-              <a:t>(</a:t>
-            </a:r>
-            <a:r>
-              <a:rPr>
-                <a:solidFill>
-                  <a:srgbClr val="20794D"/>
-                </a:solidFill>
-                <a:latin typeface="Courier"/>
-              </a:rPr>
-              <a:t>"Mean TMB"</a:t>
-            </a:r>
-            <a:r>
-              <a:rPr>
-                <a:solidFill>
-                  <a:srgbClr val="003B4F"/>
-                </a:solidFill>
-                <a:latin typeface="Courier"/>
-              </a:rPr>
-              <a:t>, </a:t>
-            </a:r>
-            <a:r>
-              <a:rPr>
-                <a:solidFill>
-                  <a:srgbClr val="20794D"/>
-                </a:solidFill>
-                <a:latin typeface="Courier"/>
-              </a:rPr>
-              <a:t>"Median TMB"</a:t>
-            </a:r>
-            <a:r>
-              <a:rPr>
-                <a:solidFill>
-                  <a:srgbClr val="003B4F"/>
-                </a:solidFill>
-                <a:latin typeface="Courier"/>
-              </a:rPr>
-              <a:t>),</a:t>
-            </a:r>
-            <a:br/>
-            <a:r>
-              <a:rPr>
-                <a:solidFill>
-                  <a:srgbClr val="003B4F"/>
-                </a:solidFill>
-                <a:latin typeface="Courier"/>
-              </a:rPr>
-              <a:t>  </a:t>
-            </a:r>
-            <a:r>
-              <a:rPr>
-                <a:solidFill>
-                  <a:srgbClr val="657422"/>
-                </a:solidFill>
-                <a:latin typeface="Courier"/>
-              </a:rPr>
-              <a:t>lower_95_ci =</a:t>
-            </a:r>
-            <a:r>
-              <a:rPr>
-                <a:solidFill>
-                  <a:srgbClr val="003B4F"/>
-                </a:solidFill>
-                <a:latin typeface="Courier"/>
-              </a:rPr>
-              <a:t> </a:t>
-            </a:r>
-            <a:r>
-              <a:rPr>
-                <a:solidFill>
-                  <a:srgbClr val="4758AB"/>
-                </a:solidFill>
-                <a:latin typeface="Courier"/>
-              </a:rPr>
-              <a:t>c</a:t>
-            </a:r>
-            <a:r>
-              <a:rPr>
-                <a:solidFill>
-                  <a:srgbClr val="003B4F"/>
-                </a:solidFill>
-                <a:latin typeface="Courier"/>
-              </a:rPr>
-              <a:t>(mean_ci[</a:t>
-            </a:r>
-            <a:r>
-              <a:rPr>
-                <a:solidFill>
-                  <a:srgbClr val="AD0000"/>
-                </a:solidFill>
-                <a:latin typeface="Courier"/>
-              </a:rPr>
-              <a:t>1</a:t>
-            </a:r>
-            <a:r>
-              <a:rPr>
-                <a:solidFill>
-                  <a:srgbClr val="003B4F"/>
-                </a:solidFill>
-                <a:latin typeface="Courier"/>
-              </a:rPr>
-              <a:t>], median_ci[</a:t>
-            </a:r>
-            <a:r>
-              <a:rPr>
-                <a:solidFill>
-                  <a:srgbClr val="AD0000"/>
-                </a:solidFill>
-                <a:latin typeface="Courier"/>
-              </a:rPr>
-              <a:t>1</a:t>
-            </a:r>
-            <a:r>
-              <a:rPr>
-                <a:solidFill>
-                  <a:srgbClr val="003B4F"/>
-                </a:solidFill>
-                <a:latin typeface="Courier"/>
-              </a:rPr>
-              <a:t>]),</a:t>
-            </a:r>
-            <a:br/>
-            <a:r>
-              <a:rPr>
-                <a:solidFill>
-                  <a:srgbClr val="003B4F"/>
-                </a:solidFill>
-                <a:latin typeface="Courier"/>
-              </a:rPr>
-              <a:t>  </a:t>
-            </a:r>
-            <a:r>
-              <a:rPr>
-                <a:solidFill>
-                  <a:srgbClr val="657422"/>
-                </a:solidFill>
-                <a:latin typeface="Courier"/>
-              </a:rPr>
-              <a:t>upper_95_ci =</a:t>
-            </a:r>
-            <a:r>
-              <a:rPr>
-                <a:solidFill>
-                  <a:srgbClr val="003B4F"/>
-                </a:solidFill>
-                <a:latin typeface="Courier"/>
-              </a:rPr>
-              <a:t> </a:t>
-            </a:r>
-            <a:r>
-              <a:rPr>
-                <a:solidFill>
-                  <a:srgbClr val="4758AB"/>
-                </a:solidFill>
-                <a:latin typeface="Courier"/>
-              </a:rPr>
-              <a:t>c</a:t>
-            </a:r>
-            <a:r>
-              <a:rPr>
-                <a:solidFill>
-                  <a:srgbClr val="003B4F"/>
-                </a:solidFill>
-                <a:latin typeface="Courier"/>
-              </a:rPr>
-              <a:t>(mean_ci[</a:t>
-            </a:r>
-            <a:r>
-              <a:rPr>
-                <a:solidFill>
-                  <a:srgbClr val="AD0000"/>
-                </a:solidFill>
-                <a:latin typeface="Courier"/>
-              </a:rPr>
-              <a:t>2</a:t>
-            </a:r>
-            <a:r>
-              <a:rPr>
-                <a:solidFill>
-                  <a:srgbClr val="003B4F"/>
-                </a:solidFill>
-                <a:latin typeface="Courier"/>
-              </a:rPr>
-              <a:t>], median_ci[</a:t>
-            </a:r>
-            <a:r>
-              <a:rPr>
-                <a:solidFill>
-                  <a:srgbClr val="AD0000"/>
-                </a:solidFill>
-                <a:latin typeface="Courier"/>
-              </a:rPr>
-              <a:t>2</a:t>
-            </a:r>
-            <a:r>
-              <a:rPr>
-                <a:solidFill>
-                  <a:srgbClr val="003B4F"/>
-                </a:solidFill>
-                <a:latin typeface="Courier"/>
-              </a:rPr>
-              <a:t>])</a:t>
-            </a:r>
-            <a:br/>
-            <a:r>
-              <a:rPr>
-                <a:solidFill>
-                  <a:srgbClr val="003B4F"/>
-                </a:solidFill>
-                <a:latin typeface="Courier"/>
-              </a:rPr>
-              <a:t>)</a:t>
-            </a:r>
-          </a:p>
-          <a:p>
-            <a:pPr lvl="0" indent="0">
-              <a:buNone/>
-            </a:pPr>
-            <a:r>
-              <a:rPr>
-                <a:latin typeface="Courier"/>
-              </a:rPr>
-              <a:t># A tibble: 2 × 3
-  estimator  lower_95_ci upper_95_ci
-  &lt;chr&gt;            &lt;dbl&gt;       &lt;dbl&gt;
-1 Mean TMB          7.04        8.25
-2 Median TMB        5.93        7.43</a:t>
-            </a:r>
-          </a:p>
-          <a:p>
-            <a:pPr lvl="0" indent="0" marL="0">
-              <a:buNone/>
-            </a:pPr>
-            <a:r>
-              <a:rPr b="1"/>
-              <a:t>Interpretation</a:t>
-            </a:r>
-          </a:p>
-          <a:p>
-            <a:pPr lvl="0"/>
-            <a:r>
-              <a:rPr/>
-              <a:t>confidence intervals contain the middle 95% of estimates generated from repeated bootstrap resampling</a:t>
-            </a:r>
-          </a:p>
-          <a:p>
-            <a:pPr lvl="0" indent="0" marL="0">
-              <a:buNone/>
-            </a:pPr>
-            <a:r>
-              <a:rPr/>
-              <a:t>For a 95% bootstrap confidence interval:</a:t>
-            </a:r>
-          </a:p>
-          <a:p>
-            <a:pPr lvl="0"/>
-            <a:r>
-              <a:rPr/>
-              <a:t>lower bound is the 2.5th percentile of the bootstrap estimates</a:t>
-            </a:r>
-          </a:p>
-          <a:p>
-            <a:pPr lvl="0"/>
-            <a:r>
-              <a:rPr/>
-              <a:t>upper bound is the 97.5th percentile of the bootstrap estimates</a:t>
-            </a:r>
-          </a:p>
-          <a:p>
-            <a:pPr lvl="0"/>
-            <a:r>
-              <a:rPr/>
-              <a:t>each bootstrap estimate represents one possible estimate of population TMB obtained from a resampled version of the observed sequencing dataset</a:t>
-            </a:r>
-          </a:p>
-          <a:p>
-            <a:pPr lvl="0"/>
-            <a:r>
-              <a:rPr/>
-              <a:t>some bootstrap estimates are smaller and some are larger because sampling variability causes estimates to fluctuate across samples</a:t>
-            </a:r>
-          </a:p>
-          <a:p>
-            <a:pPr lvl="0"/>
-            <a:r>
-              <a:rPr/>
-              <a:t>confidence interval summarizes the range of population TMB values that remain plausible given the observed data and the observed variability across resamples</a:t>
-            </a:r>
-          </a:p>
-        </p:txBody>
-      </p:sp>
-    </p:spTree>
-  </p:cSld>
-</p:sld>
-</file>
-
 <file path=ppt/slides/slide23.xml><?xml version="1.0" encoding="utf-8"?>
 <p:sld xmlns:a="http://schemas.openxmlformats.org/drawingml/2006/main" xmlns:r="http://schemas.openxmlformats.org/officeDocument/2006/relationships" xmlns:p="http://schemas.openxmlformats.org/presentationml/2006/main">
   <p:cSld>
@@ -6975,7 +6470,7 @@
             </a:pPr>
             <a:r>
               <a:rPr/>
-              <a:t>Summary</a:t>
+              <a:t>Bootstrap Confidence Interval</a:t>
             </a:r>
           </a:p>
         </p:txBody>
@@ -6995,52 +6490,559 @@
           <a:bodyPr/>
           <a:lstStyle/>
           <a:p>
-            <a:pPr lvl="0"/>
-            <a:r>
-              <a:rPr/>
-              <a:t>point estimates summarize characteristics of a population using observed sample data</a:t>
-            </a:r>
-          </a:p>
-          <a:p>
-            <a:pPr lvl="0"/>
-            <a:r>
-              <a:rPr/>
-              <a:t>different samples produce different estimates because of sampling variability</a:t>
-            </a:r>
-          </a:p>
-          <a:p>
-            <a:pPr lvl="0"/>
-            <a:r>
-              <a:rPr/>
-              <a:t>bootstrap resampling approximates repeated sampling directly from the observed dataset</a:t>
-            </a:r>
-          </a:p>
-          <a:p>
-            <a:pPr lvl="0"/>
-            <a:r>
-              <a:rPr/>
-              <a:t>bootstrap methods repeatedly:</a:t>
-            </a:r>
-          </a:p>
-          <a:p>
-            <a:pPr lvl="1"/>
-            <a:r>
-              <a:rPr/>
-              <a:t>resample the data with replacement</a:t>
-            </a:r>
-          </a:p>
-          <a:p>
-            <a:pPr lvl="1"/>
-            <a:r>
-              <a:rPr/>
-              <a:t>recompute the estimator</a:t>
-            </a:r>
-          </a:p>
-          <a:p>
-            <a:pPr lvl="1"/>
-            <a:r>
-              <a:rPr/>
-              <a:t>form an empirical sampling distribution</a:t>
+            <a:pPr lvl="0" indent="0">
+              <a:buNone/>
+            </a:pPr>
+            <a:r>
+              <a:rPr>
+                <a:solidFill>
+                  <a:srgbClr val="003B4F"/>
+                </a:solidFill>
+                <a:latin typeface="Courier"/>
+              </a:rPr>
+              <a:t>mean_ci &lt;- </a:t>
+            </a:r>
+            <a:r>
+              <a:rPr>
+                <a:solidFill>
+                  <a:srgbClr val="4758AB"/>
+                </a:solidFill>
+                <a:latin typeface="Courier"/>
+              </a:rPr>
+              <a:t>quantile</a:t>
+            </a:r>
+            <a:r>
+              <a:rPr>
+                <a:solidFill>
+                  <a:srgbClr val="003B4F"/>
+                </a:solidFill>
+                <a:latin typeface="Courier"/>
+              </a:rPr>
+              <a:t>(</a:t>
+            </a:r>
+            <a:br/>
+            <a:r>
+              <a:rPr>
+                <a:solidFill>
+                  <a:srgbClr val="003B4F"/>
+                </a:solidFill>
+                <a:latin typeface="Courier"/>
+              </a:rPr>
+              <a:t>  boot_means,</a:t>
+            </a:r>
+            <a:br/>
+            <a:r>
+              <a:rPr>
+                <a:solidFill>
+                  <a:srgbClr val="003B4F"/>
+                </a:solidFill>
+                <a:latin typeface="Courier"/>
+              </a:rPr>
+              <a:t>  </a:t>
+            </a:r>
+            <a:r>
+              <a:rPr>
+                <a:solidFill>
+                  <a:srgbClr val="657422"/>
+                </a:solidFill>
+                <a:latin typeface="Courier"/>
+              </a:rPr>
+              <a:t>probs =</a:t>
+            </a:r>
+            <a:r>
+              <a:rPr>
+                <a:solidFill>
+                  <a:srgbClr val="003B4F"/>
+                </a:solidFill>
+                <a:latin typeface="Courier"/>
+              </a:rPr>
+              <a:t> </a:t>
+            </a:r>
+            <a:r>
+              <a:rPr>
+                <a:solidFill>
+                  <a:srgbClr val="4758AB"/>
+                </a:solidFill>
+                <a:latin typeface="Courier"/>
+              </a:rPr>
+              <a:t>c</a:t>
+            </a:r>
+            <a:r>
+              <a:rPr>
+                <a:solidFill>
+                  <a:srgbClr val="003B4F"/>
+                </a:solidFill>
+                <a:latin typeface="Courier"/>
+              </a:rPr>
+              <a:t>(</a:t>
+            </a:r>
+            <a:r>
+              <a:rPr>
+                <a:solidFill>
+                  <a:srgbClr val="AD0000"/>
+                </a:solidFill>
+                <a:latin typeface="Courier"/>
+              </a:rPr>
+              <a:t>0.025</a:t>
+            </a:r>
+            <a:r>
+              <a:rPr>
+                <a:solidFill>
+                  <a:srgbClr val="003B4F"/>
+                </a:solidFill>
+                <a:latin typeface="Courier"/>
+              </a:rPr>
+              <a:t>, </a:t>
+            </a:r>
+            <a:r>
+              <a:rPr>
+                <a:solidFill>
+                  <a:srgbClr val="AD0000"/>
+                </a:solidFill>
+                <a:latin typeface="Courier"/>
+              </a:rPr>
+              <a:t>0.975</a:t>
+            </a:r>
+            <a:r>
+              <a:rPr>
+                <a:solidFill>
+                  <a:srgbClr val="003B4F"/>
+                </a:solidFill>
+                <a:latin typeface="Courier"/>
+              </a:rPr>
+              <a:t>)</a:t>
+            </a:r>
+            <a:br/>
+            <a:r>
+              <a:rPr>
+                <a:solidFill>
+                  <a:srgbClr val="003B4F"/>
+                </a:solidFill>
+                <a:latin typeface="Courier"/>
+              </a:rPr>
+              <a:t>)</a:t>
+            </a:r>
+            <a:br/>
+            <a:br/>
+            <a:r>
+              <a:rPr>
+                <a:solidFill>
+                  <a:srgbClr val="003B4F"/>
+                </a:solidFill>
+                <a:latin typeface="Courier"/>
+              </a:rPr>
+              <a:t>median_ci &lt;- </a:t>
+            </a:r>
+            <a:r>
+              <a:rPr>
+                <a:solidFill>
+                  <a:srgbClr val="4758AB"/>
+                </a:solidFill>
+                <a:latin typeface="Courier"/>
+              </a:rPr>
+              <a:t>quantile</a:t>
+            </a:r>
+            <a:r>
+              <a:rPr>
+                <a:solidFill>
+                  <a:srgbClr val="003B4F"/>
+                </a:solidFill>
+                <a:latin typeface="Courier"/>
+              </a:rPr>
+              <a:t>(</a:t>
+            </a:r>
+            <a:br/>
+            <a:r>
+              <a:rPr>
+                <a:solidFill>
+                  <a:srgbClr val="003B4F"/>
+                </a:solidFill>
+                <a:latin typeface="Courier"/>
+              </a:rPr>
+              <a:t>  boot_medians,</a:t>
+            </a:r>
+            <a:br/>
+            <a:r>
+              <a:rPr>
+                <a:solidFill>
+                  <a:srgbClr val="003B4F"/>
+                </a:solidFill>
+                <a:latin typeface="Courier"/>
+              </a:rPr>
+              <a:t>  </a:t>
+            </a:r>
+            <a:r>
+              <a:rPr>
+                <a:solidFill>
+                  <a:srgbClr val="657422"/>
+                </a:solidFill>
+                <a:latin typeface="Courier"/>
+              </a:rPr>
+              <a:t>probs =</a:t>
+            </a:r>
+            <a:r>
+              <a:rPr>
+                <a:solidFill>
+                  <a:srgbClr val="003B4F"/>
+                </a:solidFill>
+                <a:latin typeface="Courier"/>
+              </a:rPr>
+              <a:t> </a:t>
+            </a:r>
+            <a:r>
+              <a:rPr>
+                <a:solidFill>
+                  <a:srgbClr val="4758AB"/>
+                </a:solidFill>
+                <a:latin typeface="Courier"/>
+              </a:rPr>
+              <a:t>c</a:t>
+            </a:r>
+            <a:r>
+              <a:rPr>
+                <a:solidFill>
+                  <a:srgbClr val="003B4F"/>
+                </a:solidFill>
+                <a:latin typeface="Courier"/>
+              </a:rPr>
+              <a:t>(</a:t>
+            </a:r>
+            <a:r>
+              <a:rPr>
+                <a:solidFill>
+                  <a:srgbClr val="AD0000"/>
+                </a:solidFill>
+                <a:latin typeface="Courier"/>
+              </a:rPr>
+              <a:t>0.025</a:t>
+            </a:r>
+            <a:r>
+              <a:rPr>
+                <a:solidFill>
+                  <a:srgbClr val="003B4F"/>
+                </a:solidFill>
+                <a:latin typeface="Courier"/>
+              </a:rPr>
+              <a:t>, </a:t>
+            </a:r>
+            <a:r>
+              <a:rPr>
+                <a:solidFill>
+                  <a:srgbClr val="AD0000"/>
+                </a:solidFill>
+                <a:latin typeface="Courier"/>
+              </a:rPr>
+              <a:t>0.975</a:t>
+            </a:r>
+            <a:r>
+              <a:rPr>
+                <a:solidFill>
+                  <a:srgbClr val="003B4F"/>
+                </a:solidFill>
+                <a:latin typeface="Courier"/>
+              </a:rPr>
+              <a:t>)</a:t>
+            </a:r>
+            <a:br/>
+            <a:r>
+              <a:rPr>
+                <a:solidFill>
+                  <a:srgbClr val="003B4F"/>
+                </a:solidFill>
+                <a:latin typeface="Courier"/>
+              </a:rPr>
+              <a:t>)</a:t>
+            </a:r>
+            <a:br/>
+            <a:br/>
+            <a:r>
+              <a:rPr>
+                <a:solidFill>
+                  <a:srgbClr val="4758AB"/>
+                </a:solidFill>
+                <a:latin typeface="Courier"/>
+              </a:rPr>
+              <a:t>tibble</a:t>
+            </a:r>
+            <a:r>
+              <a:rPr>
+                <a:solidFill>
+                  <a:srgbClr val="003B4F"/>
+                </a:solidFill>
+                <a:latin typeface="Courier"/>
+              </a:rPr>
+              <a:t>(</a:t>
+            </a:r>
+            <a:br/>
+            <a:r>
+              <a:rPr>
+                <a:solidFill>
+                  <a:srgbClr val="003B4F"/>
+                </a:solidFill>
+                <a:latin typeface="Courier"/>
+              </a:rPr>
+              <a:t>  </a:t>
+            </a:r>
+            <a:r>
+              <a:rPr>
+                <a:solidFill>
+                  <a:srgbClr val="657422"/>
+                </a:solidFill>
+                <a:latin typeface="Courier"/>
+              </a:rPr>
+              <a:t>estimator =</a:t>
+            </a:r>
+            <a:r>
+              <a:rPr>
+                <a:solidFill>
+                  <a:srgbClr val="003B4F"/>
+                </a:solidFill>
+                <a:latin typeface="Courier"/>
+              </a:rPr>
+              <a:t> </a:t>
+            </a:r>
+            <a:r>
+              <a:rPr>
+                <a:solidFill>
+                  <a:srgbClr val="4758AB"/>
+                </a:solidFill>
+                <a:latin typeface="Courier"/>
+              </a:rPr>
+              <a:t>c</a:t>
+            </a:r>
+            <a:r>
+              <a:rPr>
+                <a:solidFill>
+                  <a:srgbClr val="003B4F"/>
+                </a:solidFill>
+                <a:latin typeface="Courier"/>
+              </a:rPr>
+              <a:t>(</a:t>
+            </a:r>
+            <a:r>
+              <a:rPr>
+                <a:solidFill>
+                  <a:srgbClr val="20794D"/>
+                </a:solidFill>
+                <a:latin typeface="Courier"/>
+              </a:rPr>
+              <a:t>"Mean TMB"</a:t>
+            </a:r>
+            <a:r>
+              <a:rPr>
+                <a:solidFill>
+                  <a:srgbClr val="003B4F"/>
+                </a:solidFill>
+                <a:latin typeface="Courier"/>
+              </a:rPr>
+              <a:t>, </a:t>
+            </a:r>
+            <a:r>
+              <a:rPr>
+                <a:solidFill>
+                  <a:srgbClr val="20794D"/>
+                </a:solidFill>
+                <a:latin typeface="Courier"/>
+              </a:rPr>
+              <a:t>"Median TMB"</a:t>
+            </a:r>
+            <a:r>
+              <a:rPr>
+                <a:solidFill>
+                  <a:srgbClr val="003B4F"/>
+                </a:solidFill>
+                <a:latin typeface="Courier"/>
+              </a:rPr>
+              <a:t>),</a:t>
+            </a:r>
+            <a:br/>
+            <a:r>
+              <a:rPr>
+                <a:solidFill>
+                  <a:srgbClr val="003B4F"/>
+                </a:solidFill>
+                <a:latin typeface="Courier"/>
+              </a:rPr>
+              <a:t>  </a:t>
+            </a:r>
+            <a:r>
+              <a:rPr>
+                <a:solidFill>
+                  <a:srgbClr val="657422"/>
+                </a:solidFill>
+                <a:latin typeface="Courier"/>
+              </a:rPr>
+              <a:t>lower_95_ci =</a:t>
+            </a:r>
+            <a:r>
+              <a:rPr>
+                <a:solidFill>
+                  <a:srgbClr val="003B4F"/>
+                </a:solidFill>
+                <a:latin typeface="Courier"/>
+              </a:rPr>
+              <a:t> </a:t>
+            </a:r>
+            <a:r>
+              <a:rPr>
+                <a:solidFill>
+                  <a:srgbClr val="4758AB"/>
+                </a:solidFill>
+                <a:latin typeface="Courier"/>
+              </a:rPr>
+              <a:t>c</a:t>
+            </a:r>
+            <a:r>
+              <a:rPr>
+                <a:solidFill>
+                  <a:srgbClr val="003B4F"/>
+                </a:solidFill>
+                <a:latin typeface="Courier"/>
+              </a:rPr>
+              <a:t>(mean_ci[</a:t>
+            </a:r>
+            <a:r>
+              <a:rPr>
+                <a:solidFill>
+                  <a:srgbClr val="AD0000"/>
+                </a:solidFill>
+                <a:latin typeface="Courier"/>
+              </a:rPr>
+              <a:t>1</a:t>
+            </a:r>
+            <a:r>
+              <a:rPr>
+                <a:solidFill>
+                  <a:srgbClr val="003B4F"/>
+                </a:solidFill>
+                <a:latin typeface="Courier"/>
+              </a:rPr>
+              <a:t>], median_ci[</a:t>
+            </a:r>
+            <a:r>
+              <a:rPr>
+                <a:solidFill>
+                  <a:srgbClr val="AD0000"/>
+                </a:solidFill>
+                <a:latin typeface="Courier"/>
+              </a:rPr>
+              <a:t>1</a:t>
+            </a:r>
+            <a:r>
+              <a:rPr>
+                <a:solidFill>
+                  <a:srgbClr val="003B4F"/>
+                </a:solidFill>
+                <a:latin typeface="Courier"/>
+              </a:rPr>
+              <a:t>]),</a:t>
+            </a:r>
+            <a:br/>
+            <a:r>
+              <a:rPr>
+                <a:solidFill>
+                  <a:srgbClr val="003B4F"/>
+                </a:solidFill>
+                <a:latin typeface="Courier"/>
+              </a:rPr>
+              <a:t>  </a:t>
+            </a:r>
+            <a:r>
+              <a:rPr>
+                <a:solidFill>
+                  <a:srgbClr val="657422"/>
+                </a:solidFill>
+                <a:latin typeface="Courier"/>
+              </a:rPr>
+              <a:t>upper_95_ci =</a:t>
+            </a:r>
+            <a:r>
+              <a:rPr>
+                <a:solidFill>
+                  <a:srgbClr val="003B4F"/>
+                </a:solidFill>
+                <a:latin typeface="Courier"/>
+              </a:rPr>
+              <a:t> </a:t>
+            </a:r>
+            <a:r>
+              <a:rPr>
+                <a:solidFill>
+                  <a:srgbClr val="4758AB"/>
+                </a:solidFill>
+                <a:latin typeface="Courier"/>
+              </a:rPr>
+              <a:t>c</a:t>
+            </a:r>
+            <a:r>
+              <a:rPr>
+                <a:solidFill>
+                  <a:srgbClr val="003B4F"/>
+                </a:solidFill>
+                <a:latin typeface="Courier"/>
+              </a:rPr>
+              <a:t>(mean_ci[</a:t>
+            </a:r>
+            <a:r>
+              <a:rPr>
+                <a:solidFill>
+                  <a:srgbClr val="AD0000"/>
+                </a:solidFill>
+                <a:latin typeface="Courier"/>
+              </a:rPr>
+              <a:t>2</a:t>
+            </a:r>
+            <a:r>
+              <a:rPr>
+                <a:solidFill>
+                  <a:srgbClr val="003B4F"/>
+                </a:solidFill>
+                <a:latin typeface="Courier"/>
+              </a:rPr>
+              <a:t>], median_ci[</a:t>
+            </a:r>
+            <a:r>
+              <a:rPr>
+                <a:solidFill>
+                  <a:srgbClr val="AD0000"/>
+                </a:solidFill>
+                <a:latin typeface="Courier"/>
+              </a:rPr>
+              <a:t>2</a:t>
+            </a:r>
+            <a:r>
+              <a:rPr>
+                <a:solidFill>
+                  <a:srgbClr val="003B4F"/>
+                </a:solidFill>
+                <a:latin typeface="Courier"/>
+              </a:rPr>
+              <a:t>])</a:t>
+            </a:r>
+            <a:br/>
+            <a:r>
+              <a:rPr>
+                <a:solidFill>
+                  <a:srgbClr val="003B4F"/>
+                </a:solidFill>
+                <a:latin typeface="Courier"/>
+              </a:rPr>
+              <a:t>)</a:t>
+            </a:r>
+          </a:p>
+          <a:p>
+            <a:pPr lvl="0" indent="0">
+              <a:buNone/>
+            </a:pPr>
+            <a:r>
+              <a:rPr>
+                <a:latin typeface="Courier"/>
+              </a:rPr>
+              <a:t># A tibble: 2 × 3
+  estimator  lower_95_ci upper_95_ci
+  &lt;chr&gt;            &lt;dbl&gt;       &lt;dbl&gt;
+1 Mean TMB          7.04        8.25
+2 Median TMB        5.93        7.43</a:t>
             </a:r>
           </a:p>
           <a:p>
@@ -7048,29 +7050,59 @@
               <a:buNone/>
             </a:pPr>
             <a:r>
-              <a:rPr/>
-              <a:t>bootstrap distributions can be used to estimate:</a:t>
-            </a:r>
-          </a:p>
-          <a:p>
-            <a:pPr lvl="0"/>
-            <a:r>
-              <a:rPr/>
-              <a:t>standard errors</a:t>
-            </a:r>
-          </a:p>
-          <a:p>
-            <a:pPr lvl="0"/>
-            <a:r>
-              <a:rPr/>
-              <a:t>confidence intervals</a:t>
-            </a:r>
-          </a:p>
-          <a:p>
-            <a:pPr lvl="0"/>
-            <a:r>
-              <a:rPr/>
-              <a:t>estimator stability</a:t>
+              <a:rPr b="1"/>
+              <a:t>Interpretation</a:t>
+            </a:r>
+          </a:p>
+          <a:p>
+            <a:pPr lvl="0"/>
+            <a:r>
+              <a:rPr/>
+              <a:t>confidence intervals contain the middle 95% of estimates generated from repeated bootstrap resampling</a:t>
+            </a:r>
+          </a:p>
+          <a:p>
+            <a:pPr lvl="0" indent="0" marL="0">
+              <a:buNone/>
+            </a:pPr>
+            <a:r>
+              <a:rPr/>
+              <a:t>For a 95% bootstrap confidence interval:</a:t>
+            </a:r>
+          </a:p>
+          <a:p>
+            <a:pPr lvl="0"/>
+            <a:r>
+              <a:rPr/>
+              <a:t>lower bound is the 2.5th percentile of the bootstrap estimates</a:t>
+            </a:r>
+          </a:p>
+          <a:p>
+            <a:pPr lvl="0"/>
+            <a:r>
+              <a:rPr/>
+              <a:t>upper bound is the 97.5th percentile of the bootstrap estimates</a:t>
+            </a:r>
+          </a:p>
+          <a:p>
+            <a:pPr lvl="0"/>
+            <a:r>
+              <a:rPr/>
+              <a:t>each bootstrap estimate represents one possible estimate of population TMB obtained from a resampled version of the observed sequencing dataset</a:t>
+            </a:r>
+          </a:p>
+          <a:p>
+            <a:pPr lvl="0"/>
+            <a:r>
+              <a:rPr/>
+              <a:t>some bootstrap estimates are smaller and some are larger because sampling variability causes estimates to fluctuate across samples</a:t>
+            </a:r>
+          </a:p>
+          <a:p>
+            <a:pPr lvl="0"/>
+            <a:r>
+              <a:rPr/>
+              <a:t>confidence interval summarizes the range of population TMB values that remain plausible given the observed data and the observed variability across resamples</a:t>
             </a:r>
           </a:p>
         </p:txBody>
@@ -7140,6 +7172,148 @@
             <a:pPr lvl="0"/>
             <a:r>
               <a:rPr/>
+              <a:t>point estimates summarize characteristics of a population using observed sample data</a:t>
+            </a:r>
+          </a:p>
+          <a:p>
+            <a:pPr lvl="0"/>
+            <a:r>
+              <a:rPr/>
+              <a:t>different samples produce different estimates because of sampling variability</a:t>
+            </a:r>
+          </a:p>
+          <a:p>
+            <a:pPr lvl="0"/>
+            <a:r>
+              <a:rPr/>
+              <a:t>bootstrap resampling approximates repeated sampling directly from the observed dataset</a:t>
+            </a:r>
+          </a:p>
+          <a:p>
+            <a:pPr lvl="0"/>
+            <a:r>
+              <a:rPr/>
+              <a:t>bootstrap methods repeatedly:</a:t>
+            </a:r>
+          </a:p>
+          <a:p>
+            <a:pPr lvl="1"/>
+            <a:r>
+              <a:rPr/>
+              <a:t>resample the data with replacement</a:t>
+            </a:r>
+          </a:p>
+          <a:p>
+            <a:pPr lvl="1"/>
+            <a:r>
+              <a:rPr/>
+              <a:t>recompute the estimator</a:t>
+            </a:r>
+          </a:p>
+          <a:p>
+            <a:pPr lvl="1"/>
+            <a:r>
+              <a:rPr/>
+              <a:t>form an empirical sampling distribution</a:t>
+            </a:r>
+          </a:p>
+          <a:p>
+            <a:pPr lvl="0" indent="0" marL="0">
+              <a:buNone/>
+            </a:pPr>
+            <a:r>
+              <a:rPr/>
+              <a:t>bootstrap distributions can be used to estimate:</a:t>
+            </a:r>
+          </a:p>
+          <a:p>
+            <a:pPr lvl="0"/>
+            <a:r>
+              <a:rPr/>
+              <a:t>standard errors</a:t>
+            </a:r>
+          </a:p>
+          <a:p>
+            <a:pPr lvl="0"/>
+            <a:r>
+              <a:rPr/>
+              <a:t>confidence intervals</a:t>
+            </a:r>
+          </a:p>
+          <a:p>
+            <a:pPr lvl="0"/>
+            <a:r>
+              <a:rPr/>
+              <a:t>estimator stability</a:t>
+            </a:r>
+          </a:p>
+        </p:txBody>
+      </p:sp>
+    </p:spTree>
+  </p:cSld>
+</p:sld>
+</file>
+
+<file path=ppt/slides/slide25.xml><?xml version="1.0" encoding="utf-8"?>
+<p:sld xmlns:a="http://schemas.openxmlformats.org/drawingml/2006/main" xmlns:r="http://schemas.openxmlformats.org/officeDocument/2006/relationships" xmlns:p="http://schemas.openxmlformats.org/presentationml/2006/main">
+  <p:cSld>
+    <p:spTree>
+      <p:nvGrpSpPr>
+        <p:cNvPr id="1" name=""/>
+        <p:cNvGrpSpPr/>
+        <p:nvPr/>
+      </p:nvGrpSpPr>
+      <p:grpSpPr>
+        <a:xfrm>
+          <a:off x="0" y="0"/>
+          <a:ext cx="0" cy="0"/>
+          <a:chOff x="0" y="0"/>
+          <a:chExt cx="0" cy="0"/>
+        </a:xfrm>
+      </p:grpSpPr>
+      <p:sp>
+        <p:nvSpPr>
+          <p:cNvPr id="2" name="Title 1"/>
+          <p:cNvSpPr>
+            <a:spLocks noGrp="1"/>
+          </p:cNvSpPr>
+          <p:nvPr>
+            <p:ph type="title"/>
+          </p:nvPr>
+        </p:nvSpPr>
+        <p:spPr/>
+        <p:txBody>
+          <a:bodyPr/>
+          <a:lstStyle/>
+          <a:p>
+            <a:pPr lvl="0" indent="0" marL="0">
+              <a:buNone/>
+            </a:pPr>
+            <a:r>
+              <a:rPr/>
+              <a:t>Summary</a:t>
+            </a:r>
+          </a:p>
+        </p:txBody>
+      </p:sp>
+      <p:sp>
+        <p:nvSpPr>
+          <p:cNvPr id="3" name="Content Placeholder 2"/>
+          <p:cNvSpPr>
+            <a:spLocks noGrp="1"/>
+          </p:cNvSpPr>
+          <p:nvPr>
+            <p:ph idx="1"/>
+          </p:nvPr>
+        </p:nvSpPr>
+        <p:spPr/>
+        <p:txBody>
+          <a:bodyPr/>
+          <a:lstStyle/>
+          <a:p>
+            <a:pPr lvl="0"/>
+            <a:r>
+              <a:rPr/>
               <a:t>point estimates summarize characteristics of a population using observed sample datbootstrap confidence intervals summarize the range of population values that remain plausible given the observed data and the variability observed across bootstrap resamples</a:t>
             </a:r>
           </a:p>
@@ -7915,54 +8089,6 @@
               <a:t>In this study, TMB is measured from tumor sequencing data to summarize the mutational profile of the patient cohort.</a:t>
             </a:r>
           </a:p>
-          <a:p>
-            <a:pPr lvl="0" indent="0" marL="0">
-              <a:buNone/>
-            </a:pPr>
-            <a:r>
-              <a:rPr/>
-              <a:t>Because TMB values are often right-skewed:</a:t>
-            </a:r>
-          </a:p>
-          <a:p>
-            <a:pPr lvl="0"/>
-            <a:r>
-              <a:rPr/>
-              <a:t>many tumors have low-to-moderate mutation burden</a:t>
-            </a:r>
-          </a:p>
-          <a:p>
-            <a:pPr lvl="0"/>
-            <a:r>
-              <a:rPr/>
-              <a:t>fewer tumors have very high mutation burden</a:t>
-            </a:r>
-          </a:p>
-          <a:p>
-            <a:pPr lvl="0"/>
-            <a:r>
-              <a:rPr/>
-              <a:t>extreme values can pull the mean upward</a:t>
-            </a:r>
-          </a:p>
-          <a:p>
-            <a:pPr lvl="0" indent="0" marL="0">
-              <a:buNone/>
-            </a:pPr>
-            <a:r>
-              <a:rPr/>
-              <a:t>Investigators want to estimate:</a:t>
-            </a:r>
-          </a:p>
-          <a:p>
-            <a:pPr lvl="0" indent="0" marL="1270000">
-              <a:buNone/>
-            </a:pPr>
-            <a:r>
-              <a:rPr sz="2000"/>
-              <a:t>What is a typical tumor mutation burden among patients in this sequencing cohort?</a:t>
-            </a:r>
-          </a:p>
         </p:txBody>
       </p:sp>
     </p:spTree>
@@ -8007,7 +8133,7 @@
             </a:pPr>
             <a:r>
               <a:rPr/>
-              <a:t>Simulated Tumor Mutation Burden Dataset</a:t>
+              <a:t>Example: Estimating Typical Tumor Mutation Burden</a:t>
             </a:r>
           </a:p>
         </p:txBody>
@@ -8027,30 +8153,12 @@
           <a:bodyPr/>
           <a:lstStyle/>
           <a:p>
-            <a:pPr lvl="0" indent="0">
-              <a:buNone/>
-            </a:pPr>
-            <a:r>
-              <a:rPr>
-                <a:latin typeface="Courier"/>
-              </a:rPr>
-              <a:t># A tibble: 5 × 6
-  patient_id tumor_type tumor_stage   age   tmb high_tmb_status
-       &lt;int&gt; &lt;chr&gt;      &lt;chr&gt;       &lt;dbl&gt; &lt;dbl&gt;           &lt;int&gt;
-1          1 Colorectal III            58  2.7                1
-2          2 Lung       III            76 11.5                0
-3          3 Melanoma   III            76  5.47               0
-4          4 Colorectal II             53 11.0                0
-5          5 Breast     II             54  4.79               0</a:t>
-            </a:r>
-          </a:p>
-          <a:p>
             <a:pPr lvl="0" indent="0" marL="0">
               <a:buNone/>
             </a:pPr>
             <a:r>
               <a:rPr b="1"/>
-              <a:t>Dataset Overview</a:t>
+              <a:t>Background</a:t>
             </a:r>
           </a:p>
           <a:p>
@@ -8059,72 +8167,28 @@
             </a:pPr>
             <a:r>
               <a:rPr/>
-              <a:t>each row represents one tumor sample from one patient</a:t>
-            </a:r>
-          </a:p>
-          <a:p>
-            <a:pPr lvl="0"/>
-            <a:r>
-              <a:rPr>
-                <a:latin typeface="Courier"/>
-              </a:rPr>
-              <a:t>tmb</a:t>
-            </a:r>
-            <a:r>
-              <a:rPr/>
-              <a:t> : tumor mutation burden measured as mutations per megabase</a:t>
-            </a:r>
-          </a:p>
-          <a:p>
-            <a:pPr lvl="0"/>
-            <a:r>
-              <a:rPr>
-                <a:latin typeface="Courier"/>
-              </a:rPr>
-              <a:t>tumor_type</a:t>
-            </a:r>
-            <a:r>
-              <a:rPr/>
-              <a:t> : cancer type represented in the sequencing cohort</a:t>
-            </a:r>
-          </a:p>
-          <a:p>
-            <a:pPr lvl="0"/>
-            <a:r>
-              <a:rPr>
-                <a:latin typeface="Courier"/>
-              </a:rPr>
-              <a:t>tumor_stage</a:t>
-            </a:r>
-            <a:r>
-              <a:rPr/>
-              <a:t> : clinical stage at sampling</a:t>
-            </a:r>
-          </a:p>
-          <a:p>
-            <a:pPr lvl="0"/>
-            <a:r>
-              <a:rPr>
-                <a:latin typeface="Courier"/>
-              </a:rPr>
-              <a:t>age</a:t>
-            </a:r>
-            <a:r>
-              <a:rPr/>
-              <a:t> : patient age at sequencing</a:t>
-            </a:r>
-          </a:p>
-          <a:p>
-            <a:pPr lvl="0"/>
-            <a:r>
-              <a:rPr>
-                <a:latin typeface="Courier"/>
-              </a:rPr>
-              <a:t>high_tmb_status</a:t>
-            </a:r>
-            <a:r>
-              <a:rPr/>
-              <a:t> : binary indicator for whether TMB is at least 10 mutations per megabase</a:t>
+              <a:t>TMB values are often right-skewed:</a:t>
+            </a:r>
+          </a:p>
+          <a:p>
+            <a:pPr lvl="0"/>
+            <a:r>
+              <a:rPr/>
+              <a:t>many tumors have low-to-moderate mutation burden</a:t>
+            </a:r>
+          </a:p>
+          <a:p>
+            <a:pPr lvl="0"/>
+            <a:r>
+              <a:rPr/>
+              <a:t>fewer tumors have very high mutation burden</a:t>
+            </a:r>
+          </a:p>
+          <a:p>
+            <a:pPr lvl="0"/>
+            <a:r>
+              <a:rPr/>
+              <a:t>extreme values can pull the mean upward</a:t>
             </a:r>
           </a:p>
           <a:p>
@@ -8133,7 +8197,16 @@
             </a:pPr>
             <a:r>
               <a:rPr/>
-              <a:t>:::</a:t>
+              <a:t>Investigators want to estimate:</a:t>
+            </a:r>
+          </a:p>
+          <a:p>
+            <a:pPr lvl="0" indent="0" marL="1270000">
+              <a:buNone/>
+            </a:pPr>
+            <a:r>
+              <a:rPr sz="2000"/>
+              <a:t>What is a typical tumor mutation burden among patients in this sequencing cohort?</a:t>
             </a:r>
           </a:p>
         </p:txBody>
